--- a/presentation/dashboard_presentation.pptx
+++ b/presentation/dashboard_presentation.pptx
@@ -5,16 +5,18 @@
     <p:sldMasterId id="2147483648" r:id="rId1"/>
   </p:sldMasterIdLst>
   <p:notesMasterIdLst>
-    <p:notesMasterId r:id="rId9"/>
+    <p:notesMasterId r:id="rId11"/>
   </p:notesMasterIdLst>
   <p:sldIdLst>
     <p:sldId id="256" r:id="rId2"/>
     <p:sldId id="257" r:id="rId3"/>
-    <p:sldId id="258" r:id="rId4"/>
-    <p:sldId id="259" r:id="rId5"/>
-    <p:sldId id="260" r:id="rId6"/>
-    <p:sldId id="261" r:id="rId7"/>
-    <p:sldId id="262" r:id="rId8"/>
+    <p:sldId id="263" r:id="rId4"/>
+    <p:sldId id="258" r:id="rId5"/>
+    <p:sldId id="259" r:id="rId6"/>
+    <p:sldId id="264" r:id="rId7"/>
+    <p:sldId id="260" r:id="rId8"/>
+    <p:sldId id="261" r:id="rId9"/>
+    <p:sldId id="262" r:id="rId10"/>
   </p:sldIdLst>
   <p:sldSz cx="12192000" cy="6858000"/>
   <p:notesSz cx="6858000" cy="12192000"/>
@@ -116,382 +118,6 @@
     </p:ext>
   </p:extLst>
 </p:presentation>
-</file>
-
-<file path=ppt/charts/chart1.xml><?xml version="1.0" encoding="utf-8"?>
-<c:chartSpace xmlns:c="http://schemas.openxmlformats.org/drawingml/2006/chart" xmlns:a="http://schemas.openxmlformats.org/drawingml/2006/main" xmlns:r="http://schemas.openxmlformats.org/officeDocument/2006/relationships" xmlns:c16r2="http://schemas.microsoft.com/office/drawing/2015/06/chart">
-  <c:date1904 val="0"/>
-  <c:lang val="de-DE"/>
-  <c:roundedCorners val="1"/>
-  <c:style val="2"/>
-  <c:chart>
-    <c:autoTitleDeleted val="1"/>
-    <c:plotArea>
-      <c:layout/>
-      <c:barChart>
-        <c:barDir val="bar"/>
-        <c:grouping val="stacked"/>
-        <c:varyColors val="0"/>
-        <c:ser>
-          <c:idx val="0"/>
-          <c:order val="0"/>
-          <c:tx>
-            <c:strRef>
-              <c:f>Sheet1!$B$1</c:f>
-              <c:strCache>
-                <c:ptCount val="1"/>
-                <c:pt idx="0">
-                  <c:v>CO₂ with alternatives</c:v>
-                </c:pt>
-              </c:strCache>
-            </c:strRef>
-          </c:tx>
-          <c:spPr>
-            <a:solidFill>
-              <a:srgbClr val="0D9488"/>
-            </a:solidFill>
-            <a:effectLst/>
-          </c:spPr>
-          <c:invertIfNegative val="0"/>
-          <c:dLbls>
-            <c:numFmt formatCode="#,##0" sourceLinked="0"/>
-            <c:spPr>
-              <a:noFill/>
-              <a:ln>
-                <a:noFill/>
-              </a:ln>
-              <a:effectLst/>
-            </c:spPr>
-            <c:txPr>
-              <a:bodyPr/>
-              <a:lstStyle/>
-              <a:p>
-                <a:pPr>
-                  <a:defRPr sz="1000" b="0" i="0" u="none" strike="noStrike">
-                    <a:solidFill>
-                      <a:srgbClr val="0F1923"/>
-                    </a:solidFill>
-                    <a:latin typeface="Arial"/>
-                  </a:defRPr>
-                </a:pPr>
-                <a:endParaRPr lang="de-DE"/>
-              </a:p>
-            </c:txPr>
-            <c:showLegendKey val="0"/>
-            <c:showVal val="1"/>
-            <c:showCatName val="0"/>
-            <c:showSerName val="0"/>
-            <c:showPercent val="0"/>
-            <c:showBubbleSize val="0"/>
-            <c:showLeaderLines val="0"/>
-            <c:extLst>
-              <c:ext xmlns:c15="http://schemas.microsoft.com/office/drawing/2012/chart" uri="{CE6537A1-D6FC-4f65-9D91-7224C49458BB}">
-                <c15:showLeaderLines val="0"/>
-              </c:ext>
-            </c:extLst>
-          </c:dLbls>
-          <c:cat>
-            <c:strRef>
-              <c:f>Sheet1!$A$2:$A$5</c:f>
-              <c:strCache>
-                <c:ptCount val="4"/>
-                <c:pt idx="0">
-                  <c:v>BU1</c:v>
-                </c:pt>
-                <c:pt idx="1">
-                  <c:v>BU2</c:v>
-                </c:pt>
-                <c:pt idx="2">
-                  <c:v>BU3</c:v>
-                </c:pt>
-                <c:pt idx="3">
-                  <c:v>BU4</c:v>
-                </c:pt>
-              </c:strCache>
-            </c:strRef>
-          </c:cat>
-          <c:val>
-            <c:numRef>
-              <c:f>Sheet1!$B$2:$B$5</c:f>
-              <c:numCache>
-                <c:formatCode>General</c:formatCode>
-                <c:ptCount val="4"/>
-                <c:pt idx="0">
-                  <c:v>162</c:v>
-                </c:pt>
-                <c:pt idx="1">
-                  <c:v>134</c:v>
-                </c:pt>
-                <c:pt idx="2">
-                  <c:v>198</c:v>
-                </c:pt>
-                <c:pt idx="3">
-                  <c:v>168</c:v>
-                </c:pt>
-              </c:numCache>
-            </c:numRef>
-          </c:val>
-          <c:extLst>
-            <c:ext xmlns:c16="http://schemas.microsoft.com/office/drawing/2014/chart" uri="{C3380CC4-5D6E-409C-BE32-E72D297353CC}">
-              <c16:uniqueId val="{00000000-91F4-B143-A941-81865A02BBA1}"/>
-            </c:ext>
-          </c:extLst>
-        </c:ser>
-        <c:ser>
-          <c:idx val="1"/>
-          <c:order val="1"/>
-          <c:tx>
-            <c:strRef>
-              <c:f>Sheet1!$C$1</c:f>
-              <c:strCache>
-                <c:ptCount val="1"/>
-                <c:pt idx="0">
-                  <c:v>Saving potential</c:v>
-                </c:pt>
-              </c:strCache>
-            </c:strRef>
-          </c:tx>
-          <c:spPr>
-            <a:solidFill>
-              <a:srgbClr val="5EEAD4"/>
-            </a:solidFill>
-            <a:effectLst/>
-          </c:spPr>
-          <c:invertIfNegative val="0"/>
-          <c:dLbls>
-            <c:numFmt formatCode="#,##0" sourceLinked="0"/>
-            <c:spPr>
-              <a:noFill/>
-              <a:ln>
-                <a:noFill/>
-              </a:ln>
-              <a:effectLst/>
-            </c:spPr>
-            <c:txPr>
-              <a:bodyPr/>
-              <a:lstStyle/>
-              <a:p>
-                <a:pPr>
-                  <a:defRPr sz="1000" b="0" i="0" u="none" strike="noStrike">
-                    <a:solidFill>
-                      <a:srgbClr val="0F1923"/>
-                    </a:solidFill>
-                    <a:latin typeface="Arial"/>
-                  </a:defRPr>
-                </a:pPr>
-                <a:endParaRPr lang="de-DE"/>
-              </a:p>
-            </c:txPr>
-            <c:showLegendKey val="0"/>
-            <c:showVal val="1"/>
-            <c:showCatName val="0"/>
-            <c:showSerName val="0"/>
-            <c:showPercent val="0"/>
-            <c:showBubbleSize val="0"/>
-            <c:showLeaderLines val="0"/>
-            <c:extLst>
-              <c:ext xmlns:c15="http://schemas.microsoft.com/office/drawing/2012/chart" uri="{CE6537A1-D6FC-4f65-9D91-7224C49458BB}">
-                <c15:showLeaderLines val="0"/>
-              </c:ext>
-            </c:extLst>
-          </c:dLbls>
-          <c:cat>
-            <c:strRef>
-              <c:f>Sheet1!$A$2:$A$5</c:f>
-              <c:strCache>
-                <c:ptCount val="4"/>
-                <c:pt idx="0">
-                  <c:v>BU1</c:v>
-                </c:pt>
-                <c:pt idx="1">
-                  <c:v>BU2</c:v>
-                </c:pt>
-                <c:pt idx="2">
-                  <c:v>BU3</c:v>
-                </c:pt>
-                <c:pt idx="3">
-                  <c:v>BU4</c:v>
-                </c:pt>
-              </c:strCache>
-            </c:strRef>
-          </c:cat>
-          <c:val>
-            <c:numRef>
-              <c:f>Sheet1!$C$2:$C$5</c:f>
-              <c:numCache>
-                <c:formatCode>General</c:formatCode>
-                <c:ptCount val="4"/>
-                <c:pt idx="0">
-                  <c:v>28</c:v>
-                </c:pt>
-                <c:pt idx="1">
-                  <c:v>16</c:v>
-                </c:pt>
-                <c:pt idx="2">
-                  <c:v>51</c:v>
-                </c:pt>
-                <c:pt idx="3">
-                  <c:v>18</c:v>
-                </c:pt>
-              </c:numCache>
-            </c:numRef>
-          </c:val>
-          <c:extLst>
-            <c:ext xmlns:c16="http://schemas.microsoft.com/office/drawing/2014/chart" uri="{C3380CC4-5D6E-409C-BE32-E72D297353CC}">
-              <c16:uniqueId val="{00000001-91F4-B143-A941-81865A02BBA1}"/>
-            </c:ext>
-          </c:extLst>
-        </c:ser>
-        <c:dLbls>
-          <c:showLegendKey val="0"/>
-          <c:showVal val="1"/>
-          <c:showCatName val="0"/>
-          <c:showSerName val="0"/>
-          <c:showPercent val="0"/>
-          <c:showBubbleSize val="0"/>
-        </c:dLbls>
-        <c:gapWidth val="50"/>
-        <c:overlap val="100"/>
-        <c:axId val="2094734554"/>
-        <c:axId val="2094734552"/>
-      </c:barChart>
-      <c:catAx>
-        <c:axId val="2094734554"/>
-        <c:scaling>
-          <c:orientation val="minMax"/>
-        </c:scaling>
-        <c:delete val="0"/>
-        <c:axPos val="l"/>
-        <c:numFmt formatCode="General" sourceLinked="1"/>
-        <c:majorTickMark val="out"/>
-        <c:minorTickMark val="none"/>
-        <c:tickLblPos val="nextTo"/>
-        <c:spPr>
-          <a:ln w="12700" cap="flat">
-            <a:solidFill>
-              <a:srgbClr val="888888"/>
-            </a:solidFill>
-            <a:prstDash val="solid"/>
-            <a:round/>
-          </a:ln>
-        </c:spPr>
-        <c:txPr>
-          <a:bodyPr/>
-          <a:lstStyle/>
-          <a:p>
-            <a:pPr>
-              <a:defRPr sz="1200" b="0" i="0" u="none" strike="noStrike">
-                <a:solidFill>
-                  <a:srgbClr val="E2E8F0"/>
-                </a:solidFill>
-                <a:latin typeface="Arial"/>
-              </a:defRPr>
-            </a:pPr>
-            <a:endParaRPr lang="de-DE"/>
-          </a:p>
-        </c:txPr>
-        <c:crossAx val="2094734552"/>
-        <c:crosses val="autoZero"/>
-        <c:auto val="1"/>
-        <c:lblAlgn val="ctr"/>
-        <c:lblOffset val="100"/>
-        <c:noMultiLvlLbl val="1"/>
-      </c:catAx>
-      <c:valAx>
-        <c:axId val="2094734552"/>
-        <c:scaling>
-          <c:orientation val="minMax"/>
-        </c:scaling>
-        <c:delete val="0"/>
-        <c:axPos val="b"/>
-        <c:majorGridlines>
-          <c:spPr>
-            <a:ln w="6350" cap="flat">
-              <a:solidFill>
-                <a:srgbClr val="1E3A4A"/>
-              </a:solidFill>
-              <a:prstDash val="solid"/>
-              <a:round/>
-            </a:ln>
-          </c:spPr>
-        </c:majorGridlines>
-        <c:numFmt formatCode="General" sourceLinked="0"/>
-        <c:majorTickMark val="out"/>
-        <c:minorTickMark val="none"/>
-        <c:tickLblPos val="low"/>
-        <c:spPr>
-          <a:ln w="12700" cap="flat">
-            <a:solidFill>
-              <a:srgbClr val="888888"/>
-            </a:solidFill>
-            <a:prstDash val="solid"/>
-            <a:round/>
-          </a:ln>
-        </c:spPr>
-        <c:txPr>
-          <a:bodyPr/>
-          <a:lstStyle/>
-          <a:p>
-            <a:pPr>
-              <a:defRPr sz="1200" b="0" i="0" u="none" strike="noStrike">
-                <a:solidFill>
-                  <a:srgbClr val="94A3B8"/>
-                </a:solidFill>
-                <a:latin typeface="Arial"/>
-              </a:defRPr>
-            </a:pPr>
-            <a:endParaRPr lang="de-DE"/>
-          </a:p>
-        </c:txPr>
-        <c:crossAx val="2094734554"/>
-        <c:crosses val="autoZero"/>
-        <c:crossBetween val="between"/>
-      </c:valAx>
-      <c:spPr>
-        <a:solidFill>
-          <a:srgbClr val="192535"/>
-        </a:solidFill>
-        <a:ln>
-          <a:noFill/>
-        </a:ln>
-        <a:effectLst/>
-      </c:spPr>
-    </c:plotArea>
-    <c:legend>
-      <c:legendPos val="t"/>
-      <c:overlay val="0"/>
-      <c:txPr>
-        <a:bodyPr/>
-        <a:lstStyle/>
-        <a:p>
-          <a:pPr>
-            <a:defRPr sz="1100">
-              <a:solidFill>
-                <a:srgbClr val="E2E8F0"/>
-              </a:solidFill>
-            </a:defRPr>
-          </a:pPr>
-          <a:endParaRPr lang="de-DE"/>
-        </a:p>
-      </c:txPr>
-    </c:legend>
-    <c:plotVisOnly val="1"/>
-    <c:dispBlanksAs val="span"/>
-    <c:showDLblsOverMax val="1"/>
-  </c:chart>
-  <c:spPr>
-    <a:solidFill>
-      <a:srgbClr val="192535"/>
-    </a:solidFill>
-    <a:ln>
-      <a:noFill/>
-    </a:ln>
-    <a:effectLst/>
-  </c:spPr>
-  <c:externalData r:id="rId1">
-    <c:autoUpdate val="0"/>
-  </c:externalData>
-</c:chartSpace>
 </file>
 
 <file path=ppt/notesMasters/notesMaster1.xml><?xml version="1.0" encoding="utf-8"?>
@@ -852,7 +478,7 @@
           <a:p>
             <a:fld id="{F7021451-1387-4CA6-816F-3879F97B5CBC}" type="slidenum">
               <a:rPr lang="en-US"/>
-              <a:t>3</a:t>
+              <a:t>4</a:t>
             </a:fld>
             <a:endParaRPr lang="en-US"/>
           </a:p>
@@ -936,7 +562,7 @@
           <a:p>
             <a:fld id="{F7021451-1387-4CA6-816F-3879F97B5CBC}" type="slidenum">
               <a:rPr lang="en-US"/>
-              <a:t>4</a:t>
+              <a:t>5</a:t>
             </a:fld>
             <a:endParaRPr lang="en-US"/>
           </a:p>
@@ -1020,7 +646,7 @@
           <a:p>
             <a:fld id="{F7021451-1387-4CA6-816F-3879F97B5CBC}" type="slidenum">
               <a:rPr lang="en-US"/>
-              <a:t>5</a:t>
+              <a:t>7</a:t>
             </a:fld>
             <a:endParaRPr lang="en-US"/>
           </a:p>
@@ -1104,7 +730,7 @@
           <a:p>
             <a:fld id="{F7021451-1387-4CA6-816F-3879F97B5CBC}" type="slidenum">
               <a:rPr lang="en-US"/>
-              <a:t>6</a:t>
+              <a:t>8</a:t>
             </a:fld>
             <a:endParaRPr lang="en-US"/>
           </a:p>
@@ -1188,7 +814,7 @@
           <a:p>
             <a:fld id="{F7021451-1387-4CA6-816F-3879F97B5CBC}" type="slidenum">
               <a:rPr lang="en-US"/>
-              <a:t>7</a:t>
+              <a:t>9</a:t>
             </a:fld>
             <a:endParaRPr lang="en-US"/>
           </a:p>
@@ -1686,7 +1312,7 @@
                 <a:ea typeface="Calibri" pitchFamily="34" charset="-122"/>
                 <a:cs typeface="Calibri" pitchFamily="34" charset="-120"/>
               </a:rPr>
-              <a:t>SUSTAINABILITY INTELLIGENCE</a:t>
+              <a:t>FS26 - ADLS</a:t>
             </a:r>
             <a:endParaRPr lang="en-US" sz="1000" dirty="0"/>
           </a:p>
@@ -2163,45 +1789,6 @@
                 <a:cs typeface="Calibri" pitchFamily="34" charset="-120"/>
               </a:rPr>
               <a:t>CO₂ Tracked</a:t>
-            </a:r>
-            <a:endParaRPr lang="en-US" sz="1000" dirty="0"/>
-          </a:p>
-        </p:txBody>
-      </p:sp>
-      <p:sp>
-        <p:nvSpPr>
-          <p:cNvPr id="19" name="Text 16"/>
-          <p:cNvSpPr/>
-          <p:nvPr/>
-        </p:nvSpPr>
-        <p:spPr>
-          <a:xfrm>
-            <a:off x="0" y="6236208"/>
-            <a:ext cx="12161520" cy="365760"/>
-          </a:xfrm>
-          <a:prstGeom prst="rect">
-            <a:avLst/>
-          </a:prstGeom>
-          <a:noFill/>
-          <a:ln/>
-        </p:spPr>
-        <p:txBody>
-          <a:bodyPr wrap="square" rtlCol="0" anchor="ctr"/>
-          <a:lstStyle/>
-          <a:p>
-            <a:pPr marL="0" indent="0" algn="ctr">
-              <a:buNone/>
-            </a:pPr>
-            <a:r>
-              <a:rPr lang="en-US" sz="1000" b="1" dirty="0">
-                <a:solidFill>
-                  <a:srgbClr val="0F1923"/>
-                </a:solidFill>
-                <a:latin typeface="Calibri" pitchFamily="34" charset="0"/>
-                <a:ea typeface="Calibri" pitchFamily="34" charset="-122"/>
-                <a:cs typeface="Calibri" pitchFamily="34" charset="-120"/>
-              </a:rPr>
-              <a:t>Confidential  ·  2026  ·  Sustainability Team</a:t>
             </a:r>
             <a:endParaRPr lang="en-US" sz="1000" dirty="0"/>
           </a:p>
@@ -2849,7 +2436,7 @@
                 <a:ea typeface="Calibri" pitchFamily="34" charset="-122"/>
                 <a:cs typeface="Calibri" pitchFamily="34" charset="-120"/>
               </a:rPr>
-              <a:t>Many short-haul flights could switch to train — but no tool surfaces these opportunities.</a:t>
+              <a:t>Many short-haul flights could switch to train  but no tool surfaces these opportunities.</a:t>
             </a:r>
             <a:endParaRPr lang="en-US" sz="1300" dirty="0"/>
           </a:p>
@@ -2993,6 +2580,447 @@
 </file>
 
 <file path=ppt/slides/slide3.xml><?xml version="1.0" encoding="utf-8"?>
+<p:sld xmlns:a="http://schemas.openxmlformats.org/drawingml/2006/main" xmlns:r="http://schemas.openxmlformats.org/officeDocument/2006/relationships" xmlns:p="http://schemas.openxmlformats.org/presentationml/2006/main">
+  <p:cSld name="Slide Personas">
+    <p:bg>
+      <p:bgPr>
+        <a:solidFill>
+          <a:srgbClr val="0F1923"/>
+        </a:solidFill>
+        <a:effectLst/>
+      </p:bgPr>
+    </p:bg>
+    <p:spTree>
+      <p:nvGrpSpPr>
+        <p:cNvPr id="1" name=""/>
+        <p:cNvGrpSpPr/>
+        <p:nvPr/>
+      </p:nvGrpSpPr>
+      <p:grpSpPr>
+        <a:xfrm>
+          <a:off x="0" y="0"/>
+          <a:ext cx="0" cy="0"/>
+          <a:chOff x="0" y="0"/>
+          <a:chExt cx="0" cy="0"/>
+        </a:xfrm>
+      </p:grpSpPr>
+      <p:sp>
+        <p:nvSpPr>
+          <p:cNvPr id="2" name="Text 0"/>
+          <p:cNvSpPr/>
+          <p:nvPr/>
+        </p:nvSpPr>
+        <p:spPr>
+          <a:xfrm>
+            <a:off x="457200" y="274320"/>
+            <a:ext cx="10972800" cy="365760"/>
+          </a:xfrm>
+          <a:prstGeom prst="rect">
+            <a:avLst/>
+          </a:prstGeom>
+          <a:noFill/>
+          <a:ln/>
+        </p:spPr>
+        <p:txBody>
+          <a:bodyPr wrap="square" rtlCol="0" anchor="ctr"/>
+          <a:lstStyle/>
+          <a:p>
+            <a:pPr marL="0" indent="0">
+              <a:buNone/>
+            </a:pPr>
+            <a:r>
+              <a:rPr lang="en-US" sz="1000" b="1" kern="0" spc="300" dirty="0">
+                <a:solidFill>
+                  <a:srgbClr val="0D9488"/>
+                </a:solidFill>
+                <a:latin typeface="Calibri" pitchFamily="34" charset="0"/>
+              </a:rPr>
+              <a:t>02  —  WHO USES IT</a:t>
+            </a:r>
+          </a:p>
+        </p:txBody>
+      </p:sp>
+      <p:sp>
+        <p:nvSpPr>
+          <p:cNvPr id="3" name="Text 1"/>
+          <p:cNvSpPr/>
+          <p:nvPr/>
+        </p:nvSpPr>
+        <p:spPr>
+          <a:xfrm>
+            <a:off x="457200" y="640080"/>
+            <a:ext cx="10972800" cy="822960"/>
+          </a:xfrm>
+          <a:prstGeom prst="rect">
+            <a:avLst/>
+          </a:prstGeom>
+          <a:noFill/>
+          <a:ln/>
+        </p:spPr>
+        <p:txBody>
+          <a:bodyPr wrap="square" rtlCol="0" anchor="ctr"/>
+          <a:lstStyle/>
+          <a:p>
+            <a:pPr marL="0" indent="0">
+              <a:buNone/>
+            </a:pPr>
+            <a:r>
+              <a:rPr lang="en-US" sz="4000" b="1" dirty="0">
+                <a:solidFill>
+                  <a:srgbClr val="FFFFFF"/>
+                </a:solidFill>
+                <a:latin typeface="Calibri" pitchFamily="34" charset="0"/>
+              </a:rPr>
+              <a:t>Two Personas, One Tool</a:t>
+            </a:r>
+          </a:p>
+        </p:txBody>
+      </p:sp>
+      <p:sp>
+        <p:nvSpPr>
+          <p:cNvPr id="4" name="Card1"/>
+          <p:cNvSpPr/>
+          <p:nvPr/>
+        </p:nvSpPr>
+        <p:spPr>
+          <a:xfrm>
+            <a:off x="457200" y="1645920"/>
+            <a:ext cx="5486400" cy="3657600"/>
+          </a:xfrm>
+          <a:prstGeom prst="rect">
+            <a:avLst/>
+          </a:prstGeom>
+          <a:solidFill>
+            <a:srgbClr val="192535"/>
+          </a:solidFill>
+          <a:ln/>
+          <a:effectLst>
+            <a:outerShdw blurRad="152400" dist="38100" dir="8100000" algn="bl" rotWithShape="0">
+              <a:srgbClr val="000000">
+                <a:alpha val="25000"/>
+              </a:srgbClr>
+            </a:outerShdw>
+          </a:effectLst>
+        </p:spPr>
+        <p:txBody>
+          <a:bodyPr/>
+          <a:lstStyle/>
+          <a:p>
+            <a:endParaRPr/>
+          </a:p>
+        </p:txBody>
+      </p:sp>
+      <p:sp>
+        <p:nvSpPr>
+          <p:cNvPr id="5" name="Bar1"/>
+          <p:cNvSpPr/>
+          <p:nvPr/>
+        </p:nvSpPr>
+        <p:spPr>
+          <a:xfrm>
+            <a:off x="457200" y="1645920"/>
+            <a:ext cx="54864" cy="3657600"/>
+          </a:xfrm>
+          <a:prstGeom prst="rect">
+            <a:avLst/>
+          </a:prstGeom>
+          <a:solidFill>
+            <a:srgbClr val="0D9488"/>
+          </a:solidFill>
+          <a:ln/>
+        </p:spPr>
+        <p:txBody>
+          <a:bodyPr/>
+          <a:lstStyle/>
+          <a:p>
+            <a:endParaRPr/>
+          </a:p>
+        </p:txBody>
+      </p:sp>
+      <p:sp>
+        <p:nvSpPr>
+          <p:cNvPr id="6" name="Text P1"/>
+          <p:cNvSpPr/>
+          <p:nvPr/>
+        </p:nvSpPr>
+        <p:spPr>
+          <a:xfrm>
+            <a:off x="640080" y="1737360"/>
+            <a:ext cx="5120640" cy="3474720"/>
+          </a:xfrm>
+          <a:prstGeom prst="rect">
+            <a:avLst/>
+          </a:prstGeom>
+          <a:noFill/>
+          <a:ln/>
+        </p:spPr>
+        <p:txBody>
+          <a:bodyPr wrap="square" rtlCol="0" anchor="t"/>
+          <a:lstStyle/>
+          <a:p>
+            <a:pPr marL="0" indent="0">
+              <a:lnSpc>
+                <a:spcPts val="2800"/>
+              </a:lnSpc>
+              <a:buNone/>
+            </a:pPr>
+            <a:r>
+              <a:rPr lang="en-US" sz="2000" b="1" dirty="0">
+                <a:solidFill>
+                  <a:srgbClr val="FFFFFF"/>
+                </a:solidFill>
+                <a:latin typeface="Calibri" pitchFamily="34" charset="0"/>
+              </a:rPr>
+              <a:t>Anna Meier</a:t>
+            </a:r>
+          </a:p>
+          <a:p>
+            <a:pPr marL="0" indent="0">
+              <a:lnSpc>
+                <a:spcPts val="2800"/>
+              </a:lnSpc>
+              <a:buNone/>
+            </a:pPr>
+            <a:r>
+              <a:rPr lang="en-US" sz="1300" b="1" dirty="0">
+                <a:solidFill>
+                  <a:srgbClr val="0D9488"/>
+                </a:solidFill>
+                <a:latin typeface="Calibri" pitchFamily="34" charset="0"/>
+              </a:rPr>
+              <a:t>Sustainability Manager</a:t>
+            </a:r>
+          </a:p>
+          <a:p>
+            <a:pPr marL="0" indent="0">
+              <a:lnSpc>
+                <a:spcPts val="2800"/>
+              </a:lnSpc>
+              <a:buNone/>
+            </a:pPr>
+            <a:r>
+              <a:rPr lang="en-US" sz="1300" dirty="0">
+                <a:solidFill>
+                  <a:srgbClr val="94A3B8"/>
+                </a:solidFill>
+                <a:latin typeface="Calibri" pitchFamily="34" charset="0"/>
+              </a:rPr>
+              <a:t>Goal: Monitor CO₂ budgets across all BUs and report to leadership monthly.</a:t>
+            </a:r>
+          </a:p>
+          <a:p>
+            <a:pPr marL="0" indent="0">
+              <a:lnSpc>
+                <a:spcPts val="2800"/>
+              </a:lnSpc>
+              <a:buNone/>
+            </a:pPr>
+            <a:r>
+              <a:rPr lang="en-US" sz="1300" dirty="0">
+                <a:solidFill>
+                  <a:srgbClr val="94A3B8"/>
+                </a:solidFill>
+                <a:latin typeface="Calibri" pitchFamily="34" charset="0"/>
+              </a:rPr>
+              <a:t>Pain: Data scattered across Excel files, no live overview of compliance.</a:t>
+            </a:r>
+          </a:p>
+          <a:p>
+            <a:pPr marL="0" indent="0">
+              <a:lnSpc>
+                <a:spcPts val="2800"/>
+              </a:lnSpc>
+              <a:buNone/>
+            </a:pPr>
+            <a:r>
+              <a:rPr lang="en-US" sz="1300" dirty="0">
+                <a:solidFill>
+                  <a:srgbClr val="E2E8F0"/>
+                </a:solidFill>
+                <a:latin typeface="Calibri" pitchFamily="34" charset="0"/>
+              </a:rPr>
+              <a:t>Dashboard value: Real-time gauges + budget status at a glance.</a:t>
+            </a:r>
+          </a:p>
+        </p:txBody>
+      </p:sp>
+      <p:sp>
+        <p:nvSpPr>
+          <p:cNvPr id="7" name="Card2"/>
+          <p:cNvSpPr/>
+          <p:nvPr/>
+        </p:nvSpPr>
+        <p:spPr>
+          <a:xfrm>
+            <a:off x="6217920" y="1645920"/>
+            <a:ext cx="5486400" cy="3657600"/>
+          </a:xfrm>
+          <a:prstGeom prst="rect">
+            <a:avLst/>
+          </a:prstGeom>
+          <a:solidFill>
+            <a:srgbClr val="192535"/>
+          </a:solidFill>
+          <a:ln/>
+          <a:effectLst>
+            <a:outerShdw blurRad="152400" dist="38100" dir="8100000" algn="bl" rotWithShape="0">
+              <a:srgbClr val="000000">
+                <a:alpha val="25000"/>
+              </a:srgbClr>
+            </a:outerShdw>
+          </a:effectLst>
+        </p:spPr>
+        <p:txBody>
+          <a:bodyPr/>
+          <a:lstStyle/>
+          <a:p>
+            <a:endParaRPr/>
+          </a:p>
+        </p:txBody>
+      </p:sp>
+      <p:sp>
+        <p:nvSpPr>
+          <p:cNvPr id="8" name="Bar2"/>
+          <p:cNvSpPr/>
+          <p:nvPr/>
+        </p:nvSpPr>
+        <p:spPr>
+          <a:xfrm>
+            <a:off x="6217920" y="1645920"/>
+            <a:ext cx="54864" cy="3657600"/>
+          </a:xfrm>
+          <a:prstGeom prst="rect">
+            <a:avLst/>
+          </a:prstGeom>
+          <a:solidFill>
+            <a:srgbClr val="2563EB"/>
+          </a:solidFill>
+          <a:ln/>
+        </p:spPr>
+        <p:txBody>
+          <a:bodyPr/>
+          <a:lstStyle/>
+          <a:p>
+            <a:endParaRPr/>
+          </a:p>
+        </p:txBody>
+      </p:sp>
+      <p:sp>
+        <p:nvSpPr>
+          <p:cNvPr id="9" name="Text P2"/>
+          <p:cNvSpPr/>
+          <p:nvPr/>
+        </p:nvSpPr>
+        <p:spPr>
+          <a:xfrm>
+            <a:off x="6400800" y="1737360"/>
+            <a:ext cx="5120640" cy="3474720"/>
+          </a:xfrm>
+          <a:prstGeom prst="rect">
+            <a:avLst/>
+          </a:prstGeom>
+          <a:noFill/>
+          <a:ln/>
+        </p:spPr>
+        <p:txBody>
+          <a:bodyPr wrap="square" rtlCol="0" anchor="t"/>
+          <a:lstStyle/>
+          <a:p>
+            <a:pPr marL="0" indent="0">
+              <a:lnSpc>
+                <a:spcPts val="2800"/>
+              </a:lnSpc>
+              <a:buNone/>
+            </a:pPr>
+            <a:r>
+              <a:rPr lang="en-US" sz="2000" b="1" dirty="0">
+                <a:solidFill>
+                  <a:srgbClr val="FFFFFF"/>
+                </a:solidFill>
+                <a:latin typeface="Calibri" pitchFamily="34" charset="0"/>
+              </a:rPr>
+              <a:t>Daniel Schmid</a:t>
+            </a:r>
+          </a:p>
+          <a:p>
+            <a:pPr marL="0" indent="0">
+              <a:lnSpc>
+                <a:spcPts val="2800"/>
+              </a:lnSpc>
+              <a:buNone/>
+            </a:pPr>
+            <a:r>
+              <a:rPr lang="en-US" sz="1300" b="1" dirty="0">
+                <a:solidFill>
+                  <a:srgbClr val="2563EB"/>
+                </a:solidFill>
+                <a:latin typeface="Calibri" pitchFamily="34" charset="0"/>
+              </a:rPr>
+              <a:t>Travel Manager</a:t>
+            </a:r>
+          </a:p>
+          <a:p>
+            <a:pPr marL="0" indent="0">
+              <a:lnSpc>
+                <a:spcPts val="2800"/>
+              </a:lnSpc>
+              <a:buNone/>
+            </a:pPr>
+            <a:r>
+              <a:rPr lang="en-US" sz="1300" dirty="0">
+                <a:solidFill>
+                  <a:srgbClr val="94A3B8"/>
+                </a:solidFill>
+                <a:latin typeface="Calibri" pitchFamily="34" charset="0"/>
+              </a:rPr>
+              <a:t>Goal: Approve upcoming trips while staying within CO₂ and cost limits.</a:t>
+            </a:r>
+          </a:p>
+          <a:p>
+            <a:pPr marL="0" indent="0">
+              <a:lnSpc>
+                <a:spcPts val="2800"/>
+              </a:lnSpc>
+              <a:buNone/>
+            </a:pPr>
+            <a:r>
+              <a:rPr lang="en-US" sz="1300" dirty="0">
+                <a:solidFill>
+                  <a:srgbClr val="94A3B8"/>
+                </a:solidFill>
+                <a:latin typeface="Calibri" pitchFamily="34" charset="0"/>
+              </a:rPr>
+              <a:t>Pain: No way to see if a planned flight has a viable train alternative.</a:t>
+            </a:r>
+          </a:p>
+          <a:p>
+            <a:pPr marL="0" indent="0">
+              <a:lnSpc>
+                <a:spcPts val="2800"/>
+              </a:lnSpc>
+              <a:buNone/>
+            </a:pPr>
+            <a:r>
+              <a:rPr lang="en-US" sz="1300" dirty="0">
+                <a:solidFill>
+                  <a:srgbClr val="E2E8F0"/>
+                </a:solidFill>
+                <a:latin typeface="Calibri" pitchFamily="34" charset="0"/>
+              </a:rPr>
+              <a:t>Dashboard value: Route deep-dive + one-click mode-shift alternatives.</a:t>
+            </a:r>
+          </a:p>
+        </p:txBody>
+      </p:sp>
+    </p:spTree>
+  </p:cSld>
+  <p:clrMapOvr>
+    <a:masterClrMapping/>
+  </p:clrMapOvr>
+</p:sld>
+</file>
+
+<file path=ppt/slides/slide4.xml><?xml version="1.0" encoding="utf-8"?>
 <p:sld xmlns:a="http://schemas.openxmlformats.org/drawingml/2006/main" xmlns:r="http://schemas.openxmlformats.org/officeDocument/2006/relationships" xmlns:p="http://schemas.openxmlformats.org/presentationml/2006/main">
   <p:cSld name="Slide 3">
     <p:bg>
@@ -3050,7 +3078,7 @@
                 <a:ea typeface="Calibri" pitchFamily="34" charset="-122"/>
                 <a:cs typeface="Calibri" pitchFamily="34" charset="-120"/>
               </a:rPr>
-              <a:t>02  —  WHAT THE DASHBOARD SHOWS</a:t>
+              <a:t>03  —  WHAT THE DASHBOARD SHOWS</a:t>
             </a:r>
             <a:endParaRPr lang="en-US" sz="1000" dirty="0"/>
           </a:p>
@@ -3923,7 +3951,7 @@
 </p:sld>
 </file>
 
-<file path=ppt/slides/slide4.xml><?xml version="1.0" encoding="utf-8"?>
+<file path=ppt/slides/slide5.xml><?xml version="1.0" encoding="utf-8"?>
 <p:sld xmlns:a="http://schemas.openxmlformats.org/drawingml/2006/main" xmlns:r="http://schemas.openxmlformats.org/officeDocument/2006/relationships" xmlns:p="http://schemas.openxmlformats.org/presentationml/2006/main">
   <p:cSld name="Slide 4">
     <p:bg>
@@ -3981,7 +4009,7 @@
                 <a:ea typeface="Calibri" pitchFamily="34" charset="-122"/>
                 <a:cs typeface="Calibri" pitchFamily="34" charset="-120"/>
               </a:rPr>
-              <a:t>03  —  BUDGET COMPLIANCE</a:t>
+              <a:t>04  —  BUDGET COMPLIANCE</a:t>
             </a:r>
             <a:endParaRPr lang="en-US" sz="1000" dirty="0"/>
           </a:p>
@@ -4738,22 +4766,862 @@
           </a:p>
         </p:txBody>
       </p:sp>
-      <p:graphicFrame>
-        <p:nvGraphicFramePr>
-          <p:cNvPr id="24" name="Chart 0"/>
-          <p:cNvGraphicFramePr/>
-          <p:nvPr/>
-        </p:nvGraphicFramePr>
-        <p:xfrm>
-          <a:off x="457200" y="3246120"/>
-          <a:ext cx="5669280" cy="3200400"/>
-        </p:xfrm>
-        <a:graphic>
-          <a:graphicData uri="http://schemas.openxmlformats.org/drawingml/2006/chart">
-            <c:chart xmlns:c="http://schemas.openxmlformats.org/drawingml/2006/chart" xmlns:r="http://schemas.openxmlformats.org/officeDocument/2006/relationships" r:id="rId3"/>
-          </a:graphicData>
-        </a:graphic>
-      </p:graphicFrame>
+      <p:sp>
+        <p:nvSpPr>
+          <p:cNvPr id="100" name="GaugeBg_BU1"/>
+          <p:cNvSpPr/>
+          <p:nvPr/>
+        </p:nvSpPr>
+        <p:spPr>
+          <a:xfrm>
+            <a:off x="882396" y="3276120"/>
+            <a:ext cx="1984247" cy="1984247"/>
+          </a:xfrm>
+          <a:prstGeom prst="arc">
+            <a:avLst>
+              <a:gd name="adj1" fmla="val 10800000"/>
+              <a:gd name="adj2" fmla="val 21600000"/>
+            </a:avLst>
+          </a:prstGeom>
+          <a:solidFill>
+            <a:srgbClr val="2A3A4A"/>
+          </a:solidFill>
+          <a:ln w="180000">
+            <a:solidFill>
+              <a:srgbClr val="2A3A4A"/>
+            </a:solidFill>
+          </a:ln>
+        </p:spPr>
+        <p:txBody>
+          <a:bodyPr/>
+          <a:lstStyle/>
+          <a:p>
+            <a:endParaRPr/>
+          </a:p>
+        </p:txBody>
+      </p:sp>
+      <p:sp>
+        <p:nvSpPr>
+          <p:cNvPr id="101" name="GaugeFg_BU1"/>
+          <p:cNvSpPr/>
+          <p:nvPr/>
+        </p:nvSpPr>
+        <p:spPr>
+          <a:xfrm>
+            <a:off x="882396" y="3276120"/>
+            <a:ext cx="1984247" cy="1984247"/>
+          </a:xfrm>
+          <a:prstGeom prst="arc">
+            <a:avLst>
+              <a:gd name="adj1" fmla="val 10800000"/>
+              <a:gd name="adj2" fmla="val 21600000"/>
+            </a:avLst>
+          </a:prstGeom>
+          <a:solidFill>
+            <a:srgbClr val="EF4444"/>
+          </a:solidFill>
+          <a:ln w="180000">
+            <a:solidFill>
+              <a:srgbClr val="EF4444"/>
+            </a:solidFill>
+          </a:ln>
+        </p:spPr>
+        <p:txBody>
+          <a:bodyPr/>
+          <a:lstStyle/>
+          <a:p>
+            <a:endParaRPr/>
+          </a:p>
+        </p:txBody>
+      </p:sp>
+      <p:sp>
+        <p:nvSpPr>
+          <p:cNvPr id="102" name="GaugeHole_BU1"/>
+          <p:cNvSpPr/>
+          <p:nvPr/>
+        </p:nvSpPr>
+        <p:spPr>
+          <a:xfrm>
+            <a:off x="1299088" y="3692812"/>
+            <a:ext cx="1150863" cy="1150863"/>
+          </a:xfrm>
+          <a:prstGeom prst="ellipse">
+            <a:avLst/>
+          </a:prstGeom>
+          <a:solidFill>
+            <a:srgbClr val="0F1923"/>
+          </a:solidFill>
+          <a:ln w="0">
+            <a:noFill/>
+          </a:ln>
+        </p:spPr>
+        <p:txBody>
+          <a:bodyPr/>
+          <a:lstStyle/>
+          <a:p>
+            <a:endParaRPr/>
+          </a:p>
+        </p:txBody>
+      </p:sp>
+      <p:sp>
+        <p:nvSpPr>
+          <p:cNvPr id="103" name="GaugeLabel_BU1"/>
+          <p:cNvSpPr/>
+          <p:nvPr/>
+        </p:nvSpPr>
+        <p:spPr>
+          <a:xfrm>
+            <a:off x="457200" y="3772181"/>
+            <a:ext cx="2834640" cy="436534"/>
+          </a:xfrm>
+          <a:prstGeom prst="rect">
+            <a:avLst/>
+          </a:prstGeom>
+          <a:noFill/>
+          <a:ln/>
+        </p:spPr>
+        <p:txBody>
+          <a:bodyPr wrap="square" rtlCol="0" anchor="ctr"/>
+          <a:lstStyle/>
+          <a:p>
+            <a:pPr marL="0" indent="0" algn="ctr">
+              <a:buNone/>
+            </a:pPr>
+            <a:r>
+              <a:rPr lang="en-US" sz="2200" b="1" dirty="0">
+                <a:solidFill>
+                  <a:srgbClr val="EF4444"/>
+                </a:solidFill>
+                <a:latin typeface="Calibri" pitchFamily="34" charset="0"/>
+              </a:rPr>
+              <a:t>106%</a:t>
+            </a:r>
+          </a:p>
+        </p:txBody>
+      </p:sp>
+      <p:sp>
+        <p:nvSpPr>
+          <p:cNvPr id="104" name="GaugeName_BU1"/>
+          <p:cNvSpPr/>
+          <p:nvPr/>
+        </p:nvSpPr>
+        <p:spPr>
+          <a:xfrm>
+            <a:off x="457200" y="4208716"/>
+            <a:ext cx="2834640" cy="357164"/>
+          </a:xfrm>
+          <a:prstGeom prst="rect">
+            <a:avLst/>
+          </a:prstGeom>
+          <a:noFill/>
+          <a:ln/>
+        </p:spPr>
+        <p:txBody>
+          <a:bodyPr wrap="square" rtlCol="0" anchor="ctr"/>
+          <a:lstStyle/>
+          <a:p>
+            <a:pPr marL="0" indent="0" algn="ctr">
+              <a:buNone/>
+            </a:pPr>
+            <a:r>
+              <a:rPr lang="en-US" sz="1300" b="1" dirty="0">
+                <a:solidFill>
+                  <a:srgbClr val="2563EB"/>
+                </a:solidFill>
+                <a:latin typeface="Calibri" pitchFamily="34" charset="0"/>
+              </a:rPr>
+              <a:t>BU1</a:t>
+            </a:r>
+            <a:r>
+              <a:rPr lang="en-US" sz="1100" dirty="0">
+                <a:solidFill>
+                  <a:srgbClr val="94A3B8"/>
+                </a:solidFill>
+                <a:latin typeface="Calibri" pitchFamily="34" charset="0"/>
+              </a:rPr>
+              <a:t>  190 t / 180 t</a:t>
+            </a:r>
+          </a:p>
+        </p:txBody>
+      </p:sp>
+      <p:sp>
+        <p:nvSpPr>
+          <p:cNvPr id="105" name="GaugeStatus_BU1"/>
+          <p:cNvSpPr/>
+          <p:nvPr/>
+        </p:nvSpPr>
+        <p:spPr>
+          <a:xfrm>
+            <a:off x="465704" y="4466667"/>
+            <a:ext cx="2834640" cy="317479"/>
+          </a:xfrm>
+          <a:prstGeom prst="rect">
+            <a:avLst/>
+          </a:prstGeom>
+          <a:noFill/>
+          <a:ln/>
+        </p:spPr>
+        <p:txBody>
+          <a:bodyPr wrap="square" rtlCol="0" anchor="ctr"/>
+          <a:lstStyle/>
+          <a:p>
+            <a:pPr marL="0" indent="0" algn="ctr">
+              <a:buNone/>
+            </a:pPr>
+            <a:r>
+              <a:rPr lang="en-US" sz="1100" b="1" dirty="0">
+                <a:solidFill>
+                  <a:srgbClr val="EF4444"/>
+                </a:solidFill>
+                <a:latin typeface="Calibri" pitchFamily="34" charset="0"/>
+              </a:rPr>
+              <a:t>▲ 10 t over</a:t>
+            </a:r>
+          </a:p>
+        </p:txBody>
+      </p:sp>
+      <p:sp>
+        <p:nvSpPr>
+          <p:cNvPr id="106" name="GaugeBg_BU2"/>
+          <p:cNvSpPr/>
+          <p:nvPr/>
+        </p:nvSpPr>
+        <p:spPr>
+          <a:xfrm>
+            <a:off x="3717036" y="3276120"/>
+            <a:ext cx="1984247" cy="1984247"/>
+          </a:xfrm>
+          <a:prstGeom prst="arc">
+            <a:avLst>
+              <a:gd name="adj1" fmla="val 10800000"/>
+              <a:gd name="adj2" fmla="val 21600000"/>
+            </a:avLst>
+          </a:prstGeom>
+          <a:solidFill>
+            <a:srgbClr val="2A3A4A"/>
+          </a:solidFill>
+          <a:ln w="180000">
+            <a:solidFill>
+              <a:srgbClr val="2A3A4A"/>
+            </a:solidFill>
+          </a:ln>
+        </p:spPr>
+        <p:txBody>
+          <a:bodyPr/>
+          <a:lstStyle/>
+          <a:p>
+            <a:endParaRPr/>
+          </a:p>
+        </p:txBody>
+      </p:sp>
+      <p:sp>
+        <p:nvSpPr>
+          <p:cNvPr id="107" name="GaugeFg_BU2"/>
+          <p:cNvSpPr/>
+          <p:nvPr/>
+        </p:nvSpPr>
+        <p:spPr>
+          <a:xfrm>
+            <a:off x="3717036" y="3276120"/>
+            <a:ext cx="1984247" cy="1984247"/>
+          </a:xfrm>
+          <a:prstGeom prst="arc">
+            <a:avLst>
+              <a:gd name="adj1" fmla="val 10800000"/>
+              <a:gd name="adj2" fmla="val 18900000"/>
+            </a:avLst>
+          </a:prstGeom>
+          <a:solidFill>
+            <a:srgbClr val="10B981"/>
+          </a:solidFill>
+          <a:ln w="180000">
+            <a:solidFill>
+              <a:srgbClr val="10B981"/>
+            </a:solidFill>
+          </a:ln>
+        </p:spPr>
+        <p:txBody>
+          <a:bodyPr/>
+          <a:lstStyle/>
+          <a:p>
+            <a:endParaRPr/>
+          </a:p>
+        </p:txBody>
+      </p:sp>
+      <p:sp>
+        <p:nvSpPr>
+          <p:cNvPr id="108" name="GaugeHole_BU2"/>
+          <p:cNvSpPr/>
+          <p:nvPr/>
+        </p:nvSpPr>
+        <p:spPr>
+          <a:xfrm>
+            <a:off x="4133728" y="3692812"/>
+            <a:ext cx="1150863" cy="1150863"/>
+          </a:xfrm>
+          <a:prstGeom prst="ellipse">
+            <a:avLst/>
+          </a:prstGeom>
+          <a:solidFill>
+            <a:srgbClr val="0F1923"/>
+          </a:solidFill>
+          <a:ln w="0">
+            <a:noFill/>
+          </a:ln>
+        </p:spPr>
+        <p:txBody>
+          <a:bodyPr/>
+          <a:lstStyle/>
+          <a:p>
+            <a:endParaRPr/>
+          </a:p>
+        </p:txBody>
+      </p:sp>
+      <p:sp>
+        <p:nvSpPr>
+          <p:cNvPr id="109" name="GaugeLabel_BU2"/>
+          <p:cNvSpPr/>
+          <p:nvPr/>
+        </p:nvSpPr>
+        <p:spPr>
+          <a:xfrm>
+            <a:off x="3291840" y="3772181"/>
+            <a:ext cx="2834640" cy="436534"/>
+          </a:xfrm>
+          <a:prstGeom prst="rect">
+            <a:avLst/>
+          </a:prstGeom>
+          <a:noFill/>
+          <a:ln/>
+        </p:spPr>
+        <p:txBody>
+          <a:bodyPr wrap="square" rtlCol="0" anchor="ctr"/>
+          <a:lstStyle/>
+          <a:p>
+            <a:pPr marL="0" indent="0" algn="ctr">
+              <a:buNone/>
+            </a:pPr>
+            <a:r>
+              <a:rPr lang="en-US" sz="2200" b="1" dirty="0">
+                <a:solidFill>
+                  <a:srgbClr val="10B981"/>
+                </a:solidFill>
+                <a:latin typeface="Calibri" pitchFamily="34" charset="0"/>
+              </a:rPr>
+              <a:t>75%</a:t>
+            </a:r>
+          </a:p>
+        </p:txBody>
+      </p:sp>
+      <p:sp>
+        <p:nvSpPr>
+          <p:cNvPr id="110" name="GaugeName_BU2"/>
+          <p:cNvSpPr/>
+          <p:nvPr/>
+        </p:nvSpPr>
+        <p:spPr>
+          <a:xfrm>
+            <a:off x="3291840" y="4208716"/>
+            <a:ext cx="2834640" cy="357164"/>
+          </a:xfrm>
+          <a:prstGeom prst="rect">
+            <a:avLst/>
+          </a:prstGeom>
+          <a:noFill/>
+          <a:ln/>
+        </p:spPr>
+        <p:txBody>
+          <a:bodyPr wrap="square" rtlCol="0" anchor="ctr"/>
+          <a:lstStyle/>
+          <a:p>
+            <a:pPr marL="0" indent="0" algn="ctr">
+              <a:buNone/>
+            </a:pPr>
+            <a:r>
+              <a:rPr lang="en-US" sz="1300" b="1" dirty="0">
+                <a:solidFill>
+                  <a:srgbClr val="7C3AED"/>
+                </a:solidFill>
+                <a:latin typeface="Calibri" pitchFamily="34" charset="0"/>
+              </a:rPr>
+              <a:t>BU2</a:t>
+            </a:r>
+            <a:r>
+              <a:rPr lang="en-US" sz="1100" dirty="0">
+                <a:solidFill>
+                  <a:srgbClr val="94A3B8"/>
+                </a:solidFill>
+                <a:latin typeface="Calibri" pitchFamily="34" charset="0"/>
+              </a:rPr>
+              <a:t>  150 t / 200 t</a:t>
+            </a:r>
+          </a:p>
+        </p:txBody>
+      </p:sp>
+      <p:sp>
+        <p:nvSpPr>
+          <p:cNvPr id="111" name="GaugeStatus_BU2"/>
+          <p:cNvSpPr/>
+          <p:nvPr/>
+        </p:nvSpPr>
+        <p:spPr>
+          <a:xfrm>
+            <a:off x="3332988" y="4499312"/>
+            <a:ext cx="2834640" cy="317479"/>
+          </a:xfrm>
+          <a:prstGeom prst="rect">
+            <a:avLst/>
+          </a:prstGeom>
+          <a:noFill/>
+          <a:ln/>
+        </p:spPr>
+        <p:txBody>
+          <a:bodyPr wrap="square" rtlCol="0" anchor="ctr"/>
+          <a:lstStyle/>
+          <a:p>
+            <a:pPr marL="0" indent="0" algn="ctr">
+              <a:buNone/>
+            </a:pPr>
+            <a:r>
+              <a:rPr lang="en-US" sz="1100" b="1" dirty="0">
+                <a:solidFill>
+                  <a:srgbClr val="10B981"/>
+                </a:solidFill>
+                <a:latin typeface="Calibri" pitchFamily="34" charset="0"/>
+              </a:rPr>
+              <a:t>✓ 50 t left</a:t>
+            </a:r>
+          </a:p>
+        </p:txBody>
+      </p:sp>
+      <p:sp>
+        <p:nvSpPr>
+          <p:cNvPr id="112" name="GaugeBg_BU3"/>
+          <p:cNvSpPr/>
+          <p:nvPr/>
+        </p:nvSpPr>
+        <p:spPr>
+          <a:xfrm>
+            <a:off x="882396" y="4876320"/>
+            <a:ext cx="1984247" cy="1984247"/>
+          </a:xfrm>
+          <a:prstGeom prst="arc">
+            <a:avLst>
+              <a:gd name="adj1" fmla="val 10800000"/>
+              <a:gd name="adj2" fmla="val 21600000"/>
+            </a:avLst>
+          </a:prstGeom>
+          <a:solidFill>
+            <a:srgbClr val="2A3A4A"/>
+          </a:solidFill>
+          <a:ln w="180000">
+            <a:solidFill>
+              <a:srgbClr val="2A3A4A"/>
+            </a:solidFill>
+          </a:ln>
+        </p:spPr>
+        <p:txBody>
+          <a:bodyPr/>
+          <a:lstStyle/>
+          <a:p>
+            <a:endParaRPr/>
+          </a:p>
+        </p:txBody>
+      </p:sp>
+      <p:sp>
+        <p:nvSpPr>
+          <p:cNvPr id="113" name="GaugeFg_BU3"/>
+          <p:cNvSpPr/>
+          <p:nvPr/>
+        </p:nvSpPr>
+        <p:spPr>
+          <a:xfrm>
+            <a:off x="882396" y="4876320"/>
+            <a:ext cx="1984247" cy="1984247"/>
+          </a:xfrm>
+          <a:prstGeom prst="arc">
+            <a:avLst>
+              <a:gd name="adj1" fmla="val 10800000"/>
+              <a:gd name="adj2" fmla="val 21600000"/>
+            </a:avLst>
+          </a:prstGeom>
+          <a:solidFill>
+            <a:srgbClr val="EF4444"/>
+          </a:solidFill>
+          <a:ln w="180000">
+            <a:solidFill>
+              <a:srgbClr val="EF4444"/>
+            </a:solidFill>
+          </a:ln>
+        </p:spPr>
+        <p:txBody>
+          <a:bodyPr/>
+          <a:lstStyle/>
+          <a:p>
+            <a:endParaRPr/>
+          </a:p>
+        </p:txBody>
+      </p:sp>
+      <p:sp>
+        <p:nvSpPr>
+          <p:cNvPr id="114" name="GaugeHole_BU3"/>
+          <p:cNvSpPr/>
+          <p:nvPr/>
+        </p:nvSpPr>
+        <p:spPr>
+          <a:xfrm>
+            <a:off x="1299088" y="5293012"/>
+            <a:ext cx="1150863" cy="1150863"/>
+          </a:xfrm>
+          <a:prstGeom prst="ellipse">
+            <a:avLst/>
+          </a:prstGeom>
+          <a:solidFill>
+            <a:srgbClr val="0F1923"/>
+          </a:solidFill>
+          <a:ln w="0">
+            <a:noFill/>
+          </a:ln>
+        </p:spPr>
+        <p:txBody>
+          <a:bodyPr/>
+          <a:lstStyle/>
+          <a:p>
+            <a:endParaRPr/>
+          </a:p>
+        </p:txBody>
+      </p:sp>
+      <p:sp>
+        <p:nvSpPr>
+          <p:cNvPr id="115" name="GaugeLabel_BU3"/>
+          <p:cNvSpPr/>
+          <p:nvPr/>
+        </p:nvSpPr>
+        <p:spPr>
+          <a:xfrm>
+            <a:off x="457200" y="5372381"/>
+            <a:ext cx="2834640" cy="436534"/>
+          </a:xfrm>
+          <a:prstGeom prst="rect">
+            <a:avLst/>
+          </a:prstGeom>
+          <a:noFill/>
+          <a:ln/>
+        </p:spPr>
+        <p:txBody>
+          <a:bodyPr wrap="square" rtlCol="0" anchor="ctr"/>
+          <a:lstStyle/>
+          <a:p>
+            <a:pPr marL="0" indent="0" algn="ctr">
+              <a:buNone/>
+            </a:pPr>
+            <a:r>
+              <a:rPr lang="en-US" sz="2200" b="1" dirty="0">
+                <a:solidFill>
+                  <a:srgbClr val="EF4444"/>
+                </a:solidFill>
+                <a:latin typeface="Calibri" pitchFamily="34" charset="0"/>
+              </a:rPr>
+              <a:t>142%</a:t>
+            </a:r>
+          </a:p>
+        </p:txBody>
+      </p:sp>
+      <p:sp>
+        <p:nvSpPr>
+          <p:cNvPr id="116" name="GaugeName_BU3"/>
+          <p:cNvSpPr/>
+          <p:nvPr/>
+        </p:nvSpPr>
+        <p:spPr>
+          <a:xfrm>
+            <a:off x="457200" y="5808916"/>
+            <a:ext cx="2834640" cy="357164"/>
+          </a:xfrm>
+          <a:prstGeom prst="rect">
+            <a:avLst/>
+          </a:prstGeom>
+          <a:noFill/>
+          <a:ln/>
+        </p:spPr>
+        <p:txBody>
+          <a:bodyPr wrap="square" rtlCol="0" anchor="ctr"/>
+          <a:lstStyle/>
+          <a:p>
+            <a:pPr marL="0" indent="0" algn="ctr">
+              <a:buNone/>
+            </a:pPr>
+            <a:r>
+              <a:rPr lang="en-US" sz="1300" b="1" dirty="0">
+                <a:solidFill>
+                  <a:srgbClr val="0891B2"/>
+                </a:solidFill>
+                <a:latin typeface="Calibri" pitchFamily="34" charset="0"/>
+              </a:rPr>
+              <a:t>BU3</a:t>
+            </a:r>
+            <a:r>
+              <a:rPr lang="en-US" sz="1100" dirty="0">
+                <a:solidFill>
+                  <a:srgbClr val="94A3B8"/>
+                </a:solidFill>
+                <a:latin typeface="Calibri" pitchFamily="34" charset="0"/>
+              </a:rPr>
+              <a:t>  249 t / 175 t</a:t>
+            </a:r>
+          </a:p>
+        </p:txBody>
+      </p:sp>
+      <p:sp>
+        <p:nvSpPr>
+          <p:cNvPr id="117" name="GaugeStatus_BU3"/>
+          <p:cNvSpPr/>
+          <p:nvPr/>
+        </p:nvSpPr>
+        <p:spPr>
+          <a:xfrm>
+            <a:off x="457200" y="6166080"/>
+            <a:ext cx="2834640" cy="317479"/>
+          </a:xfrm>
+          <a:prstGeom prst="rect">
+            <a:avLst/>
+          </a:prstGeom>
+          <a:noFill/>
+          <a:ln/>
+        </p:spPr>
+        <p:txBody>
+          <a:bodyPr wrap="square" rtlCol="0" anchor="ctr"/>
+          <a:lstStyle/>
+          <a:p>
+            <a:pPr marL="0" indent="0" algn="ctr">
+              <a:buNone/>
+            </a:pPr>
+            <a:r>
+              <a:rPr lang="en-US" sz="1100" b="1" dirty="0">
+                <a:solidFill>
+                  <a:srgbClr val="EF4444"/>
+                </a:solidFill>
+                <a:latin typeface="Calibri" pitchFamily="34" charset="0"/>
+              </a:rPr>
+              <a:t>▲ 74 t over</a:t>
+            </a:r>
+          </a:p>
+        </p:txBody>
+      </p:sp>
+      <p:sp>
+        <p:nvSpPr>
+          <p:cNvPr id="118" name="GaugeBg_BU4"/>
+          <p:cNvSpPr/>
+          <p:nvPr/>
+        </p:nvSpPr>
+        <p:spPr>
+          <a:xfrm>
+            <a:off x="3717036" y="4876320"/>
+            <a:ext cx="1984247" cy="1984247"/>
+          </a:xfrm>
+          <a:prstGeom prst="arc">
+            <a:avLst>
+              <a:gd name="adj1" fmla="val 10800000"/>
+              <a:gd name="adj2" fmla="val 21600000"/>
+            </a:avLst>
+          </a:prstGeom>
+          <a:solidFill>
+            <a:srgbClr val="2A3A4A"/>
+          </a:solidFill>
+          <a:ln w="180000">
+            <a:solidFill>
+              <a:srgbClr val="2A3A4A"/>
+            </a:solidFill>
+          </a:ln>
+        </p:spPr>
+        <p:txBody>
+          <a:bodyPr/>
+          <a:lstStyle/>
+          <a:p>
+            <a:endParaRPr/>
+          </a:p>
+        </p:txBody>
+      </p:sp>
+      <p:sp>
+        <p:nvSpPr>
+          <p:cNvPr id="119" name="GaugeFg_BU4"/>
+          <p:cNvSpPr/>
+          <p:nvPr/>
+        </p:nvSpPr>
+        <p:spPr>
+          <a:xfrm>
+            <a:off x="3717036" y="4876320"/>
+            <a:ext cx="1984247" cy="1984247"/>
+          </a:xfrm>
+          <a:prstGeom prst="arc">
+            <a:avLst>
+              <a:gd name="adj1" fmla="val 10800000"/>
+              <a:gd name="adj2" fmla="val 21372631"/>
+            </a:avLst>
+          </a:prstGeom>
+          <a:solidFill>
+            <a:srgbClr val="F59E0B"/>
+          </a:solidFill>
+          <a:ln w="180000">
+            <a:solidFill>
+              <a:srgbClr val="F59E0B"/>
+            </a:solidFill>
+          </a:ln>
+        </p:spPr>
+        <p:txBody>
+          <a:bodyPr/>
+          <a:lstStyle/>
+          <a:p>
+            <a:endParaRPr/>
+          </a:p>
+        </p:txBody>
+      </p:sp>
+      <p:sp>
+        <p:nvSpPr>
+          <p:cNvPr id="120" name="GaugeHole_BU4"/>
+          <p:cNvSpPr/>
+          <p:nvPr/>
+        </p:nvSpPr>
+        <p:spPr>
+          <a:xfrm>
+            <a:off x="4133728" y="5293012"/>
+            <a:ext cx="1150863" cy="1150863"/>
+          </a:xfrm>
+          <a:prstGeom prst="ellipse">
+            <a:avLst/>
+          </a:prstGeom>
+          <a:solidFill>
+            <a:srgbClr val="0F1923"/>
+          </a:solidFill>
+          <a:ln w="0">
+            <a:noFill/>
+          </a:ln>
+        </p:spPr>
+        <p:txBody>
+          <a:bodyPr/>
+          <a:lstStyle/>
+          <a:p>
+            <a:endParaRPr/>
+          </a:p>
+        </p:txBody>
+      </p:sp>
+      <p:sp>
+        <p:nvSpPr>
+          <p:cNvPr id="121" name="GaugeLabel_BU4"/>
+          <p:cNvSpPr/>
+          <p:nvPr/>
+        </p:nvSpPr>
+        <p:spPr>
+          <a:xfrm>
+            <a:off x="3291840" y="5372381"/>
+            <a:ext cx="2834640" cy="436534"/>
+          </a:xfrm>
+          <a:prstGeom prst="rect">
+            <a:avLst/>
+          </a:prstGeom>
+          <a:noFill/>
+          <a:ln/>
+        </p:spPr>
+        <p:txBody>
+          <a:bodyPr wrap="square" rtlCol="0" anchor="ctr"/>
+          <a:lstStyle/>
+          <a:p>
+            <a:pPr marL="0" indent="0" algn="ctr">
+              <a:buNone/>
+            </a:pPr>
+            <a:r>
+              <a:rPr lang="en-US" sz="2200" b="1" dirty="0">
+                <a:solidFill>
+                  <a:srgbClr val="F59E0B"/>
+                </a:solidFill>
+                <a:latin typeface="Calibri" pitchFamily="34" charset="0"/>
+              </a:rPr>
+              <a:t>98%</a:t>
+            </a:r>
+          </a:p>
+        </p:txBody>
+      </p:sp>
+      <p:sp>
+        <p:nvSpPr>
+          <p:cNvPr id="122" name="GaugeName_BU4"/>
+          <p:cNvSpPr/>
+          <p:nvPr/>
+        </p:nvSpPr>
+        <p:spPr>
+          <a:xfrm>
+            <a:off x="3291840" y="5808916"/>
+            <a:ext cx="2834640" cy="357164"/>
+          </a:xfrm>
+          <a:prstGeom prst="rect">
+            <a:avLst/>
+          </a:prstGeom>
+          <a:noFill/>
+          <a:ln/>
+        </p:spPr>
+        <p:txBody>
+          <a:bodyPr wrap="square" rtlCol="0" anchor="ctr"/>
+          <a:lstStyle/>
+          <a:p>
+            <a:pPr marL="0" indent="0" algn="ctr">
+              <a:buNone/>
+            </a:pPr>
+            <a:r>
+              <a:rPr lang="en-US" sz="1300" b="1" dirty="0">
+                <a:solidFill>
+                  <a:srgbClr val="DB2777"/>
+                </a:solidFill>
+                <a:latin typeface="Calibri" pitchFamily="34" charset="0"/>
+              </a:rPr>
+              <a:t>BU4</a:t>
+            </a:r>
+            <a:r>
+              <a:rPr lang="en-US" sz="1100" dirty="0">
+                <a:solidFill>
+                  <a:srgbClr val="94A3B8"/>
+                </a:solidFill>
+                <a:latin typeface="Calibri" pitchFamily="34" charset="0"/>
+              </a:rPr>
+              <a:t>  186 t / 190 t</a:t>
+            </a:r>
+          </a:p>
+        </p:txBody>
+      </p:sp>
+      <p:sp>
+        <p:nvSpPr>
+          <p:cNvPr id="123" name="GaugeStatus_BU4"/>
+          <p:cNvSpPr/>
+          <p:nvPr/>
+        </p:nvSpPr>
+        <p:spPr>
+          <a:xfrm>
+            <a:off x="3291840" y="6166080"/>
+            <a:ext cx="2834640" cy="317479"/>
+          </a:xfrm>
+          <a:prstGeom prst="rect">
+            <a:avLst/>
+          </a:prstGeom>
+          <a:noFill/>
+          <a:ln/>
+        </p:spPr>
+        <p:txBody>
+          <a:bodyPr wrap="square" rtlCol="0" anchor="ctr"/>
+          <a:lstStyle/>
+          <a:p>
+            <a:pPr marL="0" indent="0" algn="ctr">
+              <a:buNone/>
+            </a:pPr>
+            <a:r>
+              <a:rPr lang="en-US" sz="1100" b="1" dirty="0">
+                <a:solidFill>
+                  <a:srgbClr val="F59E0B"/>
+                </a:solidFill>
+                <a:latin typeface="Calibri" pitchFamily="34" charset="0"/>
+              </a:rPr>
+              <a:t>~ 4 t left</a:t>
+            </a:r>
+          </a:p>
+        </p:txBody>
+      </p:sp>
       <p:sp>
         <p:nvSpPr>
           <p:cNvPr id="25" name="Text 22"/>
@@ -5513,7 +6381,665 @@
 </p:sld>
 </file>
 
-<file path=ppt/slides/slide5.xml><?xml version="1.0" encoding="utf-8"?>
+<file path=ppt/slides/slide6.xml><?xml version="1.0" encoding="utf-8"?>
+<p:sld xmlns:a="http://schemas.openxmlformats.org/drawingml/2006/main" xmlns:r="http://schemas.openxmlformats.org/officeDocument/2006/relationships" xmlns:p="http://schemas.openxmlformats.org/presentationml/2006/main">
+  <p:cSld name="Slide Design Rationale">
+    <p:bg>
+      <p:bgPr>
+        <a:solidFill>
+          <a:srgbClr val="0F1923"/>
+        </a:solidFill>
+        <a:effectLst/>
+      </p:bgPr>
+    </p:bg>
+    <p:spTree>
+      <p:nvGrpSpPr>
+        <p:cNvPr id="1" name=""/>
+        <p:cNvGrpSpPr/>
+        <p:nvPr/>
+      </p:nvGrpSpPr>
+      <p:grpSpPr>
+        <a:xfrm>
+          <a:off x="0" y="0"/>
+          <a:ext cx="0" cy="0"/>
+          <a:chOff x="0" y="0"/>
+          <a:chExt cx="0" cy="0"/>
+        </a:xfrm>
+      </p:grpSpPr>
+      <p:sp>
+        <p:nvSpPr>
+          <p:cNvPr id="2" name="Text 0"/>
+          <p:cNvSpPr/>
+          <p:nvPr/>
+        </p:nvSpPr>
+        <p:spPr>
+          <a:xfrm>
+            <a:off x="457200" y="274320"/>
+            <a:ext cx="10972800" cy="365760"/>
+          </a:xfrm>
+          <a:prstGeom prst="rect">
+            <a:avLst/>
+          </a:prstGeom>
+          <a:noFill/>
+          <a:ln/>
+        </p:spPr>
+        <p:txBody>
+          <a:bodyPr wrap="square" rtlCol="0" anchor="ctr"/>
+          <a:lstStyle/>
+          <a:p>
+            <a:pPr marL="0" indent="0">
+              <a:buNone/>
+            </a:pPr>
+            <a:r>
+              <a:rPr lang="en-US" sz="1000" b="1" kern="0" spc="300" dirty="0">
+                <a:solidFill>
+                  <a:srgbClr val="0D9488"/>
+                </a:solidFill>
+                <a:latin typeface="Calibri" pitchFamily="34" charset="0"/>
+              </a:rPr>
+              <a:t>05  —  DESIGN </a:t>
+            </a:r>
+          </a:p>
+        </p:txBody>
+      </p:sp>
+      <p:sp>
+        <p:nvSpPr>
+          <p:cNvPr id="3" name="Text 1"/>
+          <p:cNvSpPr/>
+          <p:nvPr/>
+        </p:nvSpPr>
+        <p:spPr>
+          <a:xfrm>
+            <a:off x="457200" y="640080"/>
+            <a:ext cx="10972800" cy="822960"/>
+          </a:xfrm>
+          <a:prstGeom prst="rect">
+            <a:avLst/>
+          </a:prstGeom>
+          <a:noFill/>
+          <a:ln/>
+        </p:spPr>
+        <p:txBody>
+          <a:bodyPr wrap="square" rtlCol="0" anchor="ctr"/>
+          <a:lstStyle/>
+          <a:p>
+            <a:pPr marL="0" indent="0">
+              <a:buNone/>
+            </a:pPr>
+            <a:r>
+              <a:rPr lang="en-US" sz="4000" b="1" dirty="0">
+                <a:solidFill>
+                  <a:srgbClr val="FFFFFF"/>
+                </a:solidFill>
+                <a:latin typeface="Calibri" pitchFamily="34" charset="0"/>
+              </a:rPr>
+              <a:t>Why These Visual Choices?</a:t>
+            </a:r>
+          </a:p>
+        </p:txBody>
+      </p:sp>
+      <p:sp>
+        <p:nvSpPr>
+          <p:cNvPr id="4" name="Card1"/>
+          <p:cNvSpPr/>
+          <p:nvPr/>
+        </p:nvSpPr>
+        <p:spPr>
+          <a:xfrm>
+            <a:off x="457200" y="1645920"/>
+            <a:ext cx="2651760" cy="3657600"/>
+          </a:xfrm>
+          <a:prstGeom prst="rect">
+            <a:avLst/>
+          </a:prstGeom>
+          <a:solidFill>
+            <a:srgbClr val="192535"/>
+          </a:solidFill>
+          <a:ln/>
+          <a:effectLst>
+            <a:outerShdw blurRad="152400" dist="38100" dir="8100000" algn="bl" rotWithShape="0">
+              <a:srgbClr val="000000">
+                <a:alpha val="25000"/>
+              </a:srgbClr>
+            </a:outerShdw>
+          </a:effectLst>
+        </p:spPr>
+        <p:txBody>
+          <a:bodyPr/>
+          <a:lstStyle/>
+          <a:p>
+            <a:endParaRPr/>
+          </a:p>
+        </p:txBody>
+      </p:sp>
+      <p:sp>
+        <p:nvSpPr>
+          <p:cNvPr id="5" name="Bar1"/>
+          <p:cNvSpPr/>
+          <p:nvPr/>
+        </p:nvSpPr>
+        <p:spPr>
+          <a:xfrm>
+            <a:off x="457200" y="1645920"/>
+            <a:ext cx="54864" cy="3657600"/>
+          </a:xfrm>
+          <a:prstGeom prst="rect">
+            <a:avLst/>
+          </a:prstGeom>
+          <a:solidFill>
+            <a:srgbClr val="EF4444"/>
+          </a:solidFill>
+          <a:ln/>
+        </p:spPr>
+        <p:txBody>
+          <a:bodyPr/>
+          <a:lstStyle/>
+          <a:p>
+            <a:endParaRPr/>
+          </a:p>
+        </p:txBody>
+      </p:sp>
+      <p:sp>
+        <p:nvSpPr>
+          <p:cNvPr id="6" name="TextC1"/>
+          <p:cNvSpPr/>
+          <p:nvPr/>
+        </p:nvSpPr>
+        <p:spPr>
+          <a:xfrm>
+            <a:off x="640080" y="1737360"/>
+            <a:ext cx="2377440" cy="3474720"/>
+          </a:xfrm>
+          <a:prstGeom prst="rect">
+            <a:avLst/>
+          </a:prstGeom>
+          <a:noFill/>
+          <a:ln/>
+        </p:spPr>
+        <p:txBody>
+          <a:bodyPr wrap="square" rtlCol="0" anchor="t"/>
+          <a:lstStyle/>
+          <a:p>
+            <a:pPr marL="0" indent="0">
+              <a:lnSpc>
+                <a:spcPts val="2400"/>
+              </a:lnSpc>
+              <a:buNone/>
+            </a:pPr>
+            <a:r>
+              <a:rPr lang="en-US" sz="1600" b="1" dirty="0">
+                <a:solidFill>
+                  <a:srgbClr val="FFFFFF"/>
+                </a:solidFill>
+                <a:latin typeface="Calibri" pitchFamily="34" charset="0"/>
+              </a:rPr>
+              <a:t>Gauges</a:t>
+            </a:r>
+          </a:p>
+          <a:p>
+            <a:pPr marL="0" indent="0">
+              <a:lnSpc>
+                <a:spcPts val="2400"/>
+              </a:lnSpc>
+              <a:buNone/>
+            </a:pPr>
+            <a:r>
+              <a:rPr lang="en-US" sz="1200" dirty="0">
+                <a:solidFill>
+                  <a:srgbClr val="94A3B8"/>
+                </a:solidFill>
+                <a:latin typeface="Calibri" pitchFamily="34" charset="0"/>
+              </a:rPr>
+              <a:t>Encode status (under / approaching / over) at a glance, no numbers needed to detect overruns.</a:t>
+            </a:r>
+          </a:p>
+          <a:p>
+            <a:pPr marL="0" indent="0">
+              <a:lnSpc>
+                <a:spcPts val="2400"/>
+              </a:lnSpc>
+              <a:buNone/>
+            </a:pPr>
+            <a:r>
+              <a:rPr lang="en-US" sz="1200" b="1" dirty="0">
+                <a:solidFill>
+                  <a:srgbClr val="EF4444"/>
+                </a:solidFill>
+                <a:latin typeface="Calibri" pitchFamily="34" charset="0"/>
+              </a:rPr>
+              <a:t>Red = over budget</a:t>
+            </a:r>
+          </a:p>
+          <a:p>
+            <a:pPr marL="0" indent="0">
+              <a:lnSpc>
+                <a:spcPts val="2400"/>
+              </a:lnSpc>
+              <a:buNone/>
+            </a:pPr>
+            <a:r>
+              <a:rPr lang="en-US" sz="1200" b="1" dirty="0">
+                <a:solidFill>
+                  <a:srgbClr val="F59E0B"/>
+                </a:solidFill>
+                <a:latin typeface="Calibri" pitchFamily="34" charset="0"/>
+              </a:rPr>
+              <a:t>Amber = approaching</a:t>
+            </a:r>
+          </a:p>
+          <a:p>
+            <a:pPr marL="0" indent="0">
+              <a:lnSpc>
+                <a:spcPts val="2400"/>
+              </a:lnSpc>
+              <a:buNone/>
+            </a:pPr>
+            <a:r>
+              <a:rPr lang="en-US" sz="1200" b="1" dirty="0">
+                <a:solidFill>
+                  <a:srgbClr val="10B981"/>
+                </a:solidFill>
+                <a:latin typeface="Calibri" pitchFamily="34" charset="0"/>
+              </a:rPr>
+              <a:t>Green = on track</a:t>
+            </a:r>
+          </a:p>
+        </p:txBody>
+      </p:sp>
+      <p:sp>
+        <p:nvSpPr>
+          <p:cNvPr id="7" name="Card2"/>
+          <p:cNvSpPr/>
+          <p:nvPr/>
+        </p:nvSpPr>
+        <p:spPr>
+          <a:xfrm>
+            <a:off x="3383280" y="1645920"/>
+            <a:ext cx="2651760" cy="3657600"/>
+          </a:xfrm>
+          <a:prstGeom prst="rect">
+            <a:avLst/>
+          </a:prstGeom>
+          <a:solidFill>
+            <a:srgbClr val="192535"/>
+          </a:solidFill>
+          <a:ln/>
+          <a:effectLst>
+            <a:outerShdw blurRad="152400" dist="38100" dir="8100000" algn="bl" rotWithShape="0">
+              <a:srgbClr val="000000">
+                <a:alpha val="25000"/>
+              </a:srgbClr>
+            </a:outerShdw>
+          </a:effectLst>
+        </p:spPr>
+        <p:txBody>
+          <a:bodyPr/>
+          <a:lstStyle/>
+          <a:p>
+            <a:endParaRPr/>
+          </a:p>
+        </p:txBody>
+      </p:sp>
+      <p:sp>
+        <p:nvSpPr>
+          <p:cNvPr id="8" name="Bar2"/>
+          <p:cNvSpPr/>
+          <p:nvPr/>
+        </p:nvSpPr>
+        <p:spPr>
+          <a:xfrm>
+            <a:off x="3383280" y="1645920"/>
+            <a:ext cx="54864" cy="3657600"/>
+          </a:xfrm>
+          <a:prstGeom prst="rect">
+            <a:avLst/>
+          </a:prstGeom>
+          <a:solidFill>
+            <a:srgbClr val="0D9488"/>
+          </a:solidFill>
+          <a:ln/>
+        </p:spPr>
+        <p:txBody>
+          <a:bodyPr/>
+          <a:lstStyle/>
+          <a:p>
+            <a:endParaRPr/>
+          </a:p>
+        </p:txBody>
+      </p:sp>
+      <p:sp>
+        <p:nvSpPr>
+          <p:cNvPr id="9" name="TextC2"/>
+          <p:cNvSpPr/>
+          <p:nvPr/>
+        </p:nvSpPr>
+        <p:spPr>
+          <a:xfrm>
+            <a:off x="3566160" y="1737360"/>
+            <a:ext cx="2377440" cy="3474720"/>
+          </a:xfrm>
+          <a:prstGeom prst="rect">
+            <a:avLst/>
+          </a:prstGeom>
+          <a:noFill/>
+          <a:ln/>
+        </p:spPr>
+        <p:txBody>
+          <a:bodyPr wrap="square" rtlCol="0" anchor="t"/>
+          <a:lstStyle/>
+          <a:p>
+            <a:pPr marL="0" indent="0">
+              <a:lnSpc>
+                <a:spcPts val="2400"/>
+              </a:lnSpc>
+              <a:buNone/>
+            </a:pPr>
+            <a:r>
+              <a:rPr lang="en-US" sz="1600" b="1" dirty="0">
+                <a:solidFill>
+                  <a:srgbClr val="FFFFFF"/>
+                </a:solidFill>
+                <a:latin typeface="Calibri" pitchFamily="34" charset="0"/>
+              </a:rPr>
+              <a:t>Connection Map</a:t>
+            </a:r>
+          </a:p>
+          <a:p>
+            <a:pPr marL="0" indent="0">
+              <a:lnSpc>
+                <a:spcPts val="2400"/>
+              </a:lnSpc>
+              <a:buNone/>
+            </a:pPr>
+            <a:r>
+              <a:rPr lang="en-US" sz="1200" dirty="0">
+                <a:solidFill>
+                  <a:srgbClr val="94A3B8"/>
+                </a:solidFill>
+                <a:latin typeface="Calibri" pitchFamily="34" charset="0"/>
+              </a:rPr>
+              <a:t>Shows geographic concentration of emissions. Line thickness = CO₂ volume. Color = transport mode.</a:t>
+            </a:r>
+          </a:p>
+          <a:p>
+            <a:pPr marL="0" indent="0">
+              <a:lnSpc>
+                <a:spcPts val="2400"/>
+              </a:lnSpc>
+              <a:buNone/>
+            </a:pPr>
+            <a:r>
+              <a:rPr lang="en-US" sz="1200" dirty="0">
+                <a:solidFill>
+                  <a:srgbClr val="E2E8F0"/>
+                </a:solidFill>
+                <a:latin typeface="Calibri" pitchFamily="34" charset="0"/>
+              </a:rPr>
+              <a:t>Answers: Where do we fly most? Which routes drive the most CO₂?</a:t>
+            </a:r>
+          </a:p>
+        </p:txBody>
+      </p:sp>
+      <p:sp>
+        <p:nvSpPr>
+          <p:cNvPr id="10" name="Card3"/>
+          <p:cNvSpPr/>
+          <p:nvPr/>
+        </p:nvSpPr>
+        <p:spPr>
+          <a:xfrm>
+            <a:off x="6309360" y="1645920"/>
+            <a:ext cx="2651760" cy="3657600"/>
+          </a:xfrm>
+          <a:prstGeom prst="rect">
+            <a:avLst/>
+          </a:prstGeom>
+          <a:solidFill>
+            <a:srgbClr val="192535"/>
+          </a:solidFill>
+          <a:ln/>
+          <a:effectLst>
+            <a:outerShdw blurRad="152400" dist="38100" dir="8100000" algn="bl" rotWithShape="0">
+              <a:srgbClr val="000000">
+                <a:alpha val="25000"/>
+              </a:srgbClr>
+            </a:outerShdw>
+          </a:effectLst>
+        </p:spPr>
+        <p:txBody>
+          <a:bodyPr/>
+          <a:lstStyle/>
+          <a:p>
+            <a:endParaRPr/>
+          </a:p>
+        </p:txBody>
+      </p:sp>
+      <p:sp>
+        <p:nvSpPr>
+          <p:cNvPr id="11" name="Bar3"/>
+          <p:cNvSpPr/>
+          <p:nvPr/>
+        </p:nvSpPr>
+        <p:spPr>
+          <a:xfrm>
+            <a:off x="6309360" y="1645920"/>
+            <a:ext cx="54864" cy="3657600"/>
+          </a:xfrm>
+          <a:prstGeom prst="rect">
+            <a:avLst/>
+          </a:prstGeom>
+          <a:solidFill>
+            <a:srgbClr val="2563EB"/>
+          </a:solidFill>
+          <a:ln/>
+        </p:spPr>
+        <p:txBody>
+          <a:bodyPr/>
+          <a:lstStyle/>
+          <a:p>
+            <a:endParaRPr/>
+          </a:p>
+        </p:txBody>
+      </p:sp>
+      <p:sp>
+        <p:nvSpPr>
+          <p:cNvPr id="12" name="TextC3"/>
+          <p:cNvSpPr/>
+          <p:nvPr/>
+        </p:nvSpPr>
+        <p:spPr>
+          <a:xfrm>
+            <a:off x="6492240" y="1737360"/>
+            <a:ext cx="2377440" cy="3474720"/>
+          </a:xfrm>
+          <a:prstGeom prst="rect">
+            <a:avLst/>
+          </a:prstGeom>
+          <a:noFill/>
+          <a:ln/>
+        </p:spPr>
+        <p:txBody>
+          <a:bodyPr wrap="square" rtlCol="0" anchor="t"/>
+          <a:lstStyle/>
+          <a:p>
+            <a:pPr marL="0" indent="0">
+              <a:lnSpc>
+                <a:spcPts val="2400"/>
+              </a:lnSpc>
+              <a:buNone/>
+            </a:pPr>
+            <a:r>
+              <a:rPr lang="en-US" sz="1600" b="1" dirty="0">
+                <a:solidFill>
+                  <a:srgbClr val="FFFFFF"/>
+                </a:solidFill>
+                <a:latin typeface="Calibri" pitchFamily="34" charset="0"/>
+              </a:rPr>
+              <a:t>Ranked Table</a:t>
+            </a:r>
+          </a:p>
+          <a:p>
+            <a:pPr marL="0" indent="0">
+              <a:lnSpc>
+                <a:spcPts val="2400"/>
+              </a:lnSpc>
+              <a:buNone/>
+            </a:pPr>
+            <a:r>
+              <a:rPr lang="en-US" sz="1200" dirty="0">
+                <a:solidFill>
+                  <a:srgbClr val="94A3B8"/>
+                </a:solidFill>
+                <a:latin typeface="Calibri" pitchFamily="34" charset="0"/>
+              </a:rPr>
+              <a:t>Prioritises action: highest saving potential shown first. One row = one decision a manager can act on today.</a:t>
+            </a:r>
+          </a:p>
+          <a:p>
+            <a:pPr marL="0" indent="0">
+              <a:lnSpc>
+                <a:spcPts val="2400"/>
+              </a:lnSpc>
+              <a:buNone/>
+            </a:pPr>
+            <a:r>
+              <a:rPr lang="en-US" sz="1200" dirty="0">
+                <a:solidFill>
+                  <a:srgbClr val="E2E8F0"/>
+                </a:solidFill>
+                <a:latin typeface="Calibri" pitchFamily="34" charset="0"/>
+              </a:rPr>
+              <a:t>Consistent BU color palette carried across all charts for zero re-learning.</a:t>
+            </a:r>
+          </a:p>
+        </p:txBody>
+      </p:sp>
+      <p:sp>
+        <p:nvSpPr>
+          <p:cNvPr id="13" name="Card4"/>
+          <p:cNvSpPr/>
+          <p:nvPr/>
+        </p:nvSpPr>
+        <p:spPr>
+          <a:xfrm>
+            <a:off x="9235440" y="1645920"/>
+            <a:ext cx="2194560" cy="3657600"/>
+          </a:xfrm>
+          <a:prstGeom prst="rect">
+            <a:avLst/>
+          </a:prstGeom>
+          <a:solidFill>
+            <a:srgbClr val="192535"/>
+          </a:solidFill>
+          <a:ln/>
+          <a:effectLst>
+            <a:outerShdw blurRad="152400" dist="38100" dir="8100000" algn="bl" rotWithShape="0">
+              <a:srgbClr val="000000">
+                <a:alpha val="25000"/>
+              </a:srgbClr>
+            </a:outerShdw>
+          </a:effectLst>
+        </p:spPr>
+        <p:txBody>
+          <a:bodyPr/>
+          <a:lstStyle/>
+          <a:p>
+            <a:endParaRPr/>
+          </a:p>
+        </p:txBody>
+      </p:sp>
+      <p:sp>
+        <p:nvSpPr>
+          <p:cNvPr id="14" name="Bar4"/>
+          <p:cNvSpPr/>
+          <p:nvPr/>
+        </p:nvSpPr>
+        <p:spPr>
+          <a:xfrm>
+            <a:off x="9235440" y="1645920"/>
+            <a:ext cx="54864" cy="3657600"/>
+          </a:xfrm>
+          <a:prstGeom prst="rect">
+            <a:avLst/>
+          </a:prstGeom>
+          <a:solidFill>
+            <a:srgbClr val="10B981"/>
+          </a:solidFill>
+          <a:ln/>
+        </p:spPr>
+        <p:txBody>
+          <a:bodyPr/>
+          <a:lstStyle/>
+          <a:p>
+            <a:endParaRPr/>
+          </a:p>
+        </p:txBody>
+      </p:sp>
+      <p:sp>
+        <p:nvSpPr>
+          <p:cNvPr id="15" name="TextC4"/>
+          <p:cNvSpPr/>
+          <p:nvPr/>
+        </p:nvSpPr>
+        <p:spPr>
+          <a:xfrm>
+            <a:off x="9418320" y="1737360"/>
+            <a:ext cx="1920240" cy="3474720"/>
+          </a:xfrm>
+          <a:prstGeom prst="rect">
+            <a:avLst/>
+          </a:prstGeom>
+          <a:noFill/>
+          <a:ln/>
+        </p:spPr>
+        <p:txBody>
+          <a:bodyPr wrap="square" rtlCol="0" anchor="t"/>
+          <a:lstStyle/>
+          <a:p>
+            <a:pPr marL="0" indent="0">
+              <a:lnSpc>
+                <a:spcPts val="2400"/>
+              </a:lnSpc>
+              <a:buNone/>
+            </a:pPr>
+            <a:r>
+              <a:rPr lang="en-US" sz="1600" b="1" dirty="0">
+                <a:solidFill>
+                  <a:srgbClr val="FFFFFF"/>
+                </a:solidFill>
+                <a:latin typeface="Calibri" pitchFamily="34" charset="0"/>
+              </a:rPr>
+              <a:t>Narrative Flow</a:t>
+            </a:r>
+          </a:p>
+          <a:p>
+            <a:pPr marL="0" indent="0">
+              <a:lnSpc>
+                <a:spcPts val="2400"/>
+              </a:lnSpc>
+              <a:buNone/>
+            </a:pPr>
+            <a:r>
+              <a:rPr lang="en-US" sz="1200" dirty="0">
+                <a:solidFill>
+                  <a:srgbClr val="94A3B8"/>
+                </a:solidFill>
+                <a:latin typeface="Calibri" pitchFamily="34" charset="0"/>
+              </a:rPr>
+              <a:t>Overview → BU detail → Geography → Action. Each section answers one question before handing off to the next.</a:t>
+            </a:r>
+          </a:p>
+        </p:txBody>
+      </p:sp>
+    </p:spTree>
+  </p:cSld>
+  <p:clrMapOvr>
+    <a:masterClrMapping/>
+  </p:clrMapOvr>
+</p:sld>
+</file>
+
+<file path=ppt/slides/slide7.xml><?xml version="1.0" encoding="utf-8"?>
 <p:sld xmlns:a="http://schemas.openxmlformats.org/drawingml/2006/main" xmlns:r="http://schemas.openxmlformats.org/officeDocument/2006/relationships" xmlns:p="http://schemas.openxmlformats.org/presentationml/2006/main">
   <p:cSld name="Slide 5">
     <p:bg>
@@ -5571,7 +7097,7 @@
                 <a:ea typeface="Calibri" pitchFamily="34" charset="-122"/>
                 <a:cs typeface="Calibri" pitchFamily="34" charset="-120"/>
               </a:rPr>
-              <a:t>04  —  REDUCTION LEVERS</a:t>
+              <a:t>06  —  Workflow</a:t>
             </a:r>
             <a:endParaRPr lang="en-US" sz="1000" dirty="0"/>
           </a:p>
@@ -5706,17 +7232,6 @@
             <a:pPr marL="0" indent="0" algn="ctr">
               <a:buNone/>
             </a:pPr>
-            <a:r>
-              <a:rPr lang="en-US" sz="1600" b="1" dirty="0">
-                <a:solidFill>
-                  <a:srgbClr val="0F1923"/>
-                </a:solidFill>
-                <a:latin typeface="Calibri" pitchFamily="34" charset="0"/>
-                <a:ea typeface="Calibri" pitchFamily="34" charset="-122"/>
-                <a:cs typeface="Calibri" pitchFamily="34" charset="-120"/>
-              </a:rPr>
-              <a:t>1</a:t>
-            </a:r>
             <a:endParaRPr lang="en-US" sz="1600" dirty="0"/>
           </a:p>
         </p:txBody>
@@ -5737,7 +7252,7 @@
         </p:blipFill>
         <p:spPr>
           <a:xfrm>
-            <a:off x="658368" y="2377440"/>
+            <a:off x="1508760" y="1950360"/>
             <a:ext cx="502920" cy="502920"/>
           </a:xfrm>
           <a:prstGeom prst="rect">
@@ -5753,7 +7268,7 @@
         </p:nvSpPr>
         <p:spPr>
           <a:xfrm>
-            <a:off x="658368" y="3017520"/>
+            <a:off x="1399032" y="2598831"/>
             <a:ext cx="2286000" cy="365760"/>
           </a:xfrm>
           <a:prstGeom prst="rect">
@@ -5792,7 +7307,7 @@
         </p:nvSpPr>
         <p:spPr>
           <a:xfrm>
-            <a:off x="658368" y="3429000"/>
+            <a:off x="822960" y="2727600"/>
             <a:ext cx="2286000" cy="1371600"/>
           </a:xfrm>
           <a:prstGeom prst="rect">
@@ -5916,17 +7431,6 @@
             <a:pPr marL="0" indent="0" algn="ctr">
               <a:buNone/>
             </a:pPr>
-            <a:r>
-              <a:rPr lang="en-US" sz="1600" b="1" dirty="0">
-                <a:solidFill>
-                  <a:srgbClr val="0F1923"/>
-                </a:solidFill>
-                <a:latin typeface="Calibri" pitchFamily="34" charset="0"/>
-                <a:ea typeface="Calibri" pitchFamily="34" charset="-122"/>
-                <a:cs typeface="Calibri" pitchFamily="34" charset="-120"/>
-              </a:rPr>
-              <a:t>2</a:t>
-            </a:r>
             <a:endParaRPr lang="en-US" sz="1600" dirty="0"/>
           </a:p>
         </p:txBody>
@@ -5947,7 +7451,7 @@
         </p:blipFill>
         <p:spPr>
           <a:xfrm>
-            <a:off x="3447288" y="2377440"/>
+            <a:off x="4251959" y="1956816"/>
             <a:ext cx="502920" cy="502920"/>
           </a:xfrm>
           <a:prstGeom prst="rect">
@@ -5963,8 +7467,8 @@
         </p:nvSpPr>
         <p:spPr>
           <a:xfrm>
-            <a:off x="3447288" y="3017520"/>
-            <a:ext cx="2286000" cy="365760"/>
+            <a:off x="4003731" y="2651760"/>
+            <a:ext cx="1044325" cy="365760"/>
           </a:xfrm>
           <a:prstGeom prst="rect">
             <a:avLst/>
@@ -6002,7 +7506,7 @@
         </p:nvSpPr>
         <p:spPr>
           <a:xfrm>
-            <a:off x="3447288" y="3429000"/>
+            <a:off x="3528062" y="2671808"/>
             <a:ext cx="2286000" cy="1371600"/>
           </a:xfrm>
           <a:prstGeom prst="rect">
@@ -6102,45 +7606,6 @@
           </a:p>
         </p:txBody>
       </p:sp>
-      <p:sp>
-        <p:nvSpPr>
-          <p:cNvPr id="18" name="Text 14"/>
-          <p:cNvSpPr/>
-          <p:nvPr/>
-        </p:nvSpPr>
-        <p:spPr>
-          <a:xfrm>
-            <a:off x="7040880" y="1691640"/>
-            <a:ext cx="594360" cy="594360"/>
-          </a:xfrm>
-          <a:prstGeom prst="rect">
-            <a:avLst/>
-          </a:prstGeom>
-          <a:noFill/>
-          <a:ln/>
-        </p:spPr>
-        <p:txBody>
-          <a:bodyPr wrap="square" rtlCol="0" anchor="ctr"/>
-          <a:lstStyle/>
-          <a:p>
-            <a:pPr marL="0" indent="0" algn="ctr">
-              <a:buNone/>
-            </a:pPr>
-            <a:r>
-              <a:rPr lang="en-US" sz="1600" b="1" dirty="0">
-                <a:solidFill>
-                  <a:srgbClr val="0F1923"/>
-                </a:solidFill>
-                <a:latin typeface="Calibri" pitchFamily="34" charset="0"/>
-                <a:ea typeface="Calibri" pitchFamily="34" charset="-122"/>
-                <a:cs typeface="Calibri" pitchFamily="34" charset="-120"/>
-              </a:rPr>
-              <a:t>3</a:t>
-            </a:r>
-            <a:endParaRPr lang="en-US" sz="1600" dirty="0"/>
-          </a:p>
-        </p:txBody>
-      </p:sp>
       <p:pic>
         <p:nvPicPr>
           <p:cNvPr id="19" name="Image 2" descr="preencoded.png"/>
@@ -6157,7 +7622,7 @@
         </p:blipFill>
         <p:spPr>
           <a:xfrm>
-            <a:off x="6236208" y="2377440"/>
+            <a:off x="7086600" y="2068504"/>
             <a:ext cx="502920" cy="502920"/>
           </a:xfrm>
           <a:prstGeom prst="rect">
@@ -6173,7 +7638,7 @@
         </p:nvSpPr>
         <p:spPr>
           <a:xfrm>
-            <a:off x="6236208" y="3017520"/>
+            <a:off x="6961634" y="2743629"/>
             <a:ext cx="2286000" cy="365760"/>
           </a:xfrm>
           <a:prstGeom prst="rect">
@@ -6212,7 +7677,7 @@
         </p:nvSpPr>
         <p:spPr>
           <a:xfrm>
-            <a:off x="6236208" y="3429000"/>
+            <a:off x="6339842" y="2710114"/>
             <a:ext cx="2286000" cy="1371600"/>
           </a:xfrm>
           <a:prstGeom prst="rect">
@@ -6312,45 +7777,6 @@
           </a:p>
         </p:txBody>
       </p:sp>
-      <p:sp>
-        <p:nvSpPr>
-          <p:cNvPr id="24" name="Text 19"/>
-          <p:cNvSpPr/>
-          <p:nvPr/>
-        </p:nvSpPr>
-        <p:spPr>
-          <a:xfrm>
-            <a:off x="9829800" y="1691640"/>
-            <a:ext cx="594360" cy="594360"/>
-          </a:xfrm>
-          <a:prstGeom prst="rect">
-            <a:avLst/>
-          </a:prstGeom>
-          <a:noFill/>
-          <a:ln/>
-        </p:spPr>
-        <p:txBody>
-          <a:bodyPr wrap="square" rtlCol="0" anchor="ctr"/>
-          <a:lstStyle/>
-          <a:p>
-            <a:pPr marL="0" indent="0" algn="ctr">
-              <a:buNone/>
-            </a:pPr>
-            <a:r>
-              <a:rPr lang="en-US" sz="1600" b="1" dirty="0">
-                <a:solidFill>
-                  <a:srgbClr val="0F1923"/>
-                </a:solidFill>
-                <a:latin typeface="Calibri" pitchFamily="34" charset="0"/>
-                <a:ea typeface="Calibri" pitchFamily="34" charset="-122"/>
-                <a:cs typeface="Calibri" pitchFamily="34" charset="-120"/>
-              </a:rPr>
-              <a:t>4</a:t>
-            </a:r>
-            <a:endParaRPr lang="en-US" sz="1600" dirty="0"/>
-          </a:p>
-        </p:txBody>
-      </p:sp>
       <p:pic>
         <p:nvPicPr>
           <p:cNvPr id="25" name="Image 3" descr="preencoded.png"/>
@@ -6367,7 +7793,7 @@
         </p:blipFill>
         <p:spPr>
           <a:xfrm>
-            <a:off x="9025128" y="2377440"/>
+            <a:off x="9890758" y="2168183"/>
             <a:ext cx="502920" cy="502920"/>
           </a:xfrm>
           <a:prstGeom prst="rect">
@@ -6383,7 +7809,7 @@
         </p:nvSpPr>
         <p:spPr>
           <a:xfrm>
-            <a:off x="9025128" y="3017520"/>
+            <a:off x="9753598" y="2825222"/>
             <a:ext cx="2286000" cy="365760"/>
           </a:xfrm>
           <a:prstGeom prst="rect">
@@ -6422,7 +7848,7 @@
         </p:nvSpPr>
         <p:spPr>
           <a:xfrm>
-            <a:off x="9025128" y="3429000"/>
+            <a:off x="9131806" y="2762543"/>
             <a:ext cx="2286000" cy="1371600"/>
           </a:xfrm>
           <a:prstGeom prst="rect">
@@ -9144,7 +10570,7 @@
 </p:sld>
 </file>
 
-<file path=ppt/slides/slide6.xml><?xml version="1.0" encoding="utf-8"?>
+<file path=ppt/slides/slide8.xml><?xml version="1.0" encoding="utf-8"?>
 <p:sld xmlns:a="http://schemas.openxmlformats.org/drawingml/2006/main" xmlns:r="http://schemas.openxmlformats.org/officeDocument/2006/relationships" xmlns:p="http://schemas.openxmlformats.org/presentationml/2006/main">
   <p:cSld name="Slide 6">
     <p:bg>
@@ -9202,7 +10628,7 @@
                 <a:ea typeface="Calibri" pitchFamily="34" charset="-122"/>
                 <a:cs typeface="Calibri" pitchFamily="34" charset="-120"/>
               </a:rPr>
-              <a:t>05  —  HOW TO USE</a:t>
+              <a:t>07  —  HOW TO USE</a:t>
             </a:r>
             <a:endParaRPr lang="en-US" sz="1000" dirty="0"/>
           </a:p>
@@ -9337,45 +10763,6 @@
       </p:sp>
       <p:sp>
         <p:nvSpPr>
-          <p:cNvPr id="7" name="Text 5"/>
-          <p:cNvSpPr/>
-          <p:nvPr/>
-        </p:nvSpPr>
-        <p:spPr>
-          <a:xfrm>
-            <a:off x="640080" y="1965960"/>
-            <a:ext cx="594360" cy="594360"/>
-          </a:xfrm>
-          <a:prstGeom prst="rect">
-            <a:avLst/>
-          </a:prstGeom>
-          <a:noFill/>
-          <a:ln/>
-        </p:spPr>
-        <p:txBody>
-          <a:bodyPr wrap="square" rtlCol="0" anchor="ctr"/>
-          <a:lstStyle/>
-          <a:p>
-            <a:pPr marL="0" indent="0" algn="ctr">
-              <a:buNone/>
-            </a:pPr>
-            <a:r>
-              <a:rPr lang="en-US" sz="1800" b="1" dirty="0">
-                <a:solidFill>
-                  <a:srgbClr val="0F1923"/>
-                </a:solidFill>
-                <a:latin typeface="Calibri" pitchFamily="34" charset="0"/>
-                <a:ea typeface="Calibri" pitchFamily="34" charset="-122"/>
-                <a:cs typeface="Calibri" pitchFamily="34" charset="-120"/>
-              </a:rPr>
-              <a:t>1</a:t>
-            </a:r>
-            <a:endParaRPr lang="en-US" sz="1800" dirty="0"/>
-          </a:p>
-        </p:txBody>
-      </p:sp>
-      <p:sp>
-        <p:nvSpPr>
           <p:cNvPr id="8" name="Text 6"/>
           <p:cNvSpPr/>
           <p:nvPr/>
@@ -9545,14 +10932,14 @@
       </p:sp>
       <p:sp>
         <p:nvSpPr>
-          <p:cNvPr id="13" name="Text 11"/>
-          <p:cNvSpPr/>
-          <p:nvPr/>
-        </p:nvSpPr>
-        <p:spPr>
-          <a:xfrm>
-            <a:off x="640080" y="3520440"/>
-            <a:ext cx="594360" cy="594360"/>
+          <p:cNvPr id="14" name="Text 12"/>
+          <p:cNvSpPr/>
+          <p:nvPr/>
+        </p:nvSpPr>
+        <p:spPr>
+          <a:xfrm>
+            <a:off x="1417320" y="3291840"/>
+            <a:ext cx="4846320" cy="411480"/>
           </a:xfrm>
           <a:prstGeom prst="rect">
             <a:avLst/>
@@ -9561,61 +10948,22 @@
           <a:ln/>
         </p:spPr>
         <p:txBody>
-          <a:bodyPr wrap="square" rtlCol="0" anchor="ctr"/>
-          <a:lstStyle/>
-          <a:p>
-            <a:pPr marL="0" indent="0" algn="ctr">
-              <a:buNone/>
-            </a:pPr>
-            <a:r>
-              <a:rPr lang="en-US" sz="1800" b="1" dirty="0">
-                <a:solidFill>
-                  <a:srgbClr val="0F1923"/>
+          <a:bodyPr wrap="square" lIns="0" tIns="0" rIns="0" bIns="0" rtlCol="0" anchor="ctr"/>
+          <a:lstStyle/>
+          <a:p>
+            <a:pPr marL="0" indent="0">
+              <a:buNone/>
+            </a:pPr>
+            <a:r>
+              <a:rPr lang="en-US" sz="1500" b="1" dirty="0">
+                <a:solidFill>
+                  <a:srgbClr val="FFFFFF"/>
                 </a:solidFill>
                 <a:latin typeface="Calibri" pitchFamily="34" charset="0"/>
                 <a:ea typeface="Calibri" pitchFamily="34" charset="-122"/>
                 <a:cs typeface="Calibri" pitchFamily="34" charset="-120"/>
               </a:rPr>
-              <a:t>2</a:t>
-            </a:r>
-            <a:endParaRPr lang="en-US" sz="1800" dirty="0"/>
-          </a:p>
-        </p:txBody>
-      </p:sp>
-      <p:sp>
-        <p:nvSpPr>
-          <p:cNvPr id="14" name="Text 12"/>
-          <p:cNvSpPr/>
-          <p:nvPr/>
-        </p:nvSpPr>
-        <p:spPr>
-          <a:xfrm>
-            <a:off x="1417320" y="3291840"/>
-            <a:ext cx="4846320" cy="411480"/>
-          </a:xfrm>
-          <a:prstGeom prst="rect">
-            <a:avLst/>
-          </a:prstGeom>
-          <a:noFill/>
-          <a:ln/>
-        </p:spPr>
-        <p:txBody>
-          <a:bodyPr wrap="square" lIns="0" tIns="0" rIns="0" bIns="0" rtlCol="0" anchor="ctr"/>
-          <a:lstStyle/>
-          <a:p>
-            <a:pPr marL="0" indent="0">
-              <a:buNone/>
-            </a:pPr>
-            <a:r>
-              <a:rPr lang="en-US" sz="1500" b="1" dirty="0">
-                <a:solidFill>
-                  <a:srgbClr val="FFFFFF"/>
-                </a:solidFill>
-                <a:latin typeface="Calibri" pitchFamily="34" charset="0"/>
-                <a:ea typeface="Calibri" pitchFamily="34" charset="-122"/>
-                <a:cs typeface="Calibri" pitchFamily="34" charset="-120"/>
-              </a:rPr>
-              <a:t>Upload Planned Trips (optional)</a:t>
+              <a:t>Upload Planned Trips</a:t>
             </a:r>
             <a:endParaRPr lang="en-US" sz="1500" dirty="0"/>
           </a:p>
@@ -9657,7 +11005,7 @@
                 <a:ea typeface="Calibri" pitchFamily="34" charset="-122"/>
                 <a:cs typeface="Calibri" pitchFamily="34" charset="-120"/>
               </a:rPr>
-              <a:t>Excel with upcoming trips. Without it, the dashboard analyses the historical data itself — useful for retrospective reviews.</a:t>
+              <a:t>Excel with upcoming trips. Without it, the dashboard analyses the historical data itself, useful for retrospective reviews.</a:t>
             </a:r>
             <a:endParaRPr lang="en-US" sz="1200" dirty="0"/>
           </a:p>
@@ -9748,45 +11096,6 @@
           <a:lstStyle/>
           <a:p>
             <a:endParaRPr/>
-          </a:p>
-        </p:txBody>
-      </p:sp>
-      <p:sp>
-        <p:nvSpPr>
-          <p:cNvPr id="19" name="Text 17"/>
-          <p:cNvSpPr/>
-          <p:nvPr/>
-        </p:nvSpPr>
-        <p:spPr>
-          <a:xfrm>
-            <a:off x="640080" y="5074920"/>
-            <a:ext cx="594360" cy="594360"/>
-          </a:xfrm>
-          <a:prstGeom prst="rect">
-            <a:avLst/>
-          </a:prstGeom>
-          <a:noFill/>
-          <a:ln/>
-        </p:spPr>
-        <p:txBody>
-          <a:bodyPr wrap="square" rtlCol="0" anchor="ctr"/>
-          <a:lstStyle/>
-          <a:p>
-            <a:pPr marL="0" indent="0" algn="ctr">
-              <a:buNone/>
-            </a:pPr>
-            <a:r>
-              <a:rPr lang="en-US" sz="1800" b="1" dirty="0">
-                <a:solidFill>
-                  <a:srgbClr val="0F1923"/>
-                </a:solidFill>
-                <a:latin typeface="Calibri" pitchFamily="34" charset="0"/>
-                <a:ea typeface="Calibri" pitchFamily="34" charset="-122"/>
-                <a:cs typeface="Calibri" pitchFamily="34" charset="-120"/>
-              </a:rPr>
-              <a:t>3</a:t>
-            </a:r>
-            <a:endParaRPr lang="en-US" sz="1800" dirty="0"/>
           </a:p>
         </p:txBody>
       </p:sp>
@@ -10523,7 +11832,7 @@
                 <a:ea typeface="Calibri" pitchFamily="34" charset="-122"/>
                 <a:cs typeface="Calibri" pitchFamily="34" charset="-120"/>
               </a:rPr>
-              <a:t>Use the sidebar to switch CO₂ metric at any time — no reload needed.</a:t>
+              <a:t>Use the sidebar to switch CO₂ metric at any time, no reload needed.</a:t>
             </a:r>
             <a:endParaRPr lang="en-US" sz="1100" dirty="0"/>
           </a:p>
@@ -10537,7 +11846,7 @@
 </p:sld>
 </file>
 
-<file path=ppt/slides/slide7.xml><?xml version="1.0" encoding="utf-8"?>
+<file path=ppt/slides/slide9.xml><?xml version="1.0" encoding="utf-8"?>
 <p:sld xmlns:a="http://schemas.openxmlformats.org/drawingml/2006/main" xmlns:r="http://schemas.openxmlformats.org/officeDocument/2006/relationships" xmlns:p="http://schemas.openxmlformats.org/presentationml/2006/main">
   <p:cSld name="Slide 7">
     <p:bg>
@@ -10650,7 +11959,7 @@
                 <a:ea typeface="Calibri" pitchFamily="34" charset="-122"/>
                 <a:cs typeface="Calibri" pitchFamily="34" charset="-120"/>
               </a:rPr>
-              <a:t>06  —  TAKEAWAYS</a:t>
+              <a:t>08  —  TAKEAWAYS</a:t>
             </a:r>
             <a:endParaRPr lang="en-US" sz="1000" dirty="0"/>
           </a:p>
@@ -11047,7 +12356,7 @@
                 <a:ea typeface="Calibri" pitchFamily="34" charset="-122"/>
                 <a:cs typeface="Calibri" pitchFamily="34" charset="-120"/>
               </a:rPr>
-              <a:t>Runs locally — upload your own data in seconds</a:t>
+              <a:t>Runs locally</a:t>
             </a:r>
             <a:endParaRPr lang="en-US" sz="1300" dirty="0"/>
           </a:p>

--- a/presentation/dashboard_presentation.pptx
+++ b/presentation/dashboard_presentation.pptx
@@ -5,18 +5,19 @@
     <p:sldMasterId id="2147483648" r:id="rId1"/>
   </p:sldMasterIdLst>
   <p:notesMasterIdLst>
-    <p:notesMasterId r:id="rId11"/>
+    <p:notesMasterId r:id="rId12"/>
   </p:notesMasterIdLst>
   <p:sldIdLst>
     <p:sldId id="256" r:id="rId2"/>
-    <p:sldId id="257" r:id="rId3"/>
-    <p:sldId id="263" r:id="rId4"/>
-    <p:sldId id="258" r:id="rId5"/>
-    <p:sldId id="259" r:id="rId6"/>
-    <p:sldId id="264" r:id="rId7"/>
-    <p:sldId id="260" r:id="rId8"/>
-    <p:sldId id="261" r:id="rId9"/>
-    <p:sldId id="262" r:id="rId10"/>
+    <p:sldId id="265" r:id="rId3"/>
+    <p:sldId id="257" r:id="rId4"/>
+    <p:sldId id="263" r:id="rId5"/>
+    <p:sldId id="258" r:id="rId6"/>
+    <p:sldId id="260" r:id="rId7"/>
+    <p:sldId id="259" r:id="rId8"/>
+    <p:sldId id="264" r:id="rId9"/>
+    <p:sldId id="261" r:id="rId10"/>
+    <p:sldId id="262" r:id="rId11"/>
   </p:sldIdLst>
   <p:sldSz cx="12192000" cy="6858000"/>
   <p:notesSz cx="6858000" cy="12192000"/>
@@ -394,7 +395,7 @@
           <a:p>
             <a:fld id="{F7021451-1387-4CA6-816F-3879F97B5CBC}" type="slidenum">
               <a:rPr lang="en-US"/>
-              <a:t>2</a:t>
+              <a:t>3</a:t>
             </a:fld>
             <a:endParaRPr lang="en-US"/>
           </a:p>
@@ -478,7 +479,7 @@
           <a:p>
             <a:fld id="{F7021451-1387-4CA6-816F-3879F97B5CBC}" type="slidenum">
               <a:rPr lang="en-US"/>
-              <a:t>4</a:t>
+              <a:t>5</a:t>
             </a:fld>
             <a:endParaRPr lang="en-US"/>
           </a:p>
@@ -562,7 +563,7 @@
           <a:p>
             <a:fld id="{F7021451-1387-4CA6-816F-3879F97B5CBC}" type="slidenum">
               <a:rPr lang="en-US"/>
-              <a:t>5</a:t>
+              <a:t>6</a:t>
             </a:fld>
             <a:endParaRPr lang="en-US"/>
           </a:p>
@@ -684,7 +685,7 @@
       </p:grpSpPr>
       <p:sp>
         <p:nvSpPr>
-          <p:cNvPr id="2" name="Slide Image Placeholder 1"/>
+          <p:cNvPr id="2" name="Folienbildplatzhalter 1"/>
           <p:cNvSpPr>
             <a:spLocks noGrp="1" noRot="1" noChangeAspect="1"/>
           </p:cNvSpPr>
@@ -692,11 +693,25 @@
             <p:ph type="sldImg"/>
           </p:nvPr>
         </p:nvSpPr>
-        <p:spPr/>
-      </p:sp>
-      <p:sp>
-        <p:nvSpPr>
-          <p:cNvPr id="3" name="Notes Placeholder 2"/>
+        <p:spPr>
+          <a:xfrm>
+            <a:off x="-228600" y="1524000"/>
+            <a:ext cx="7315200" cy="4114800"/>
+          </a:xfrm>
+          <a:prstGeom prst="rect">
+            <a:avLst/>
+          </a:prstGeom>
+          <a:noFill/>
+          <a:ln w="12700">
+            <a:solidFill>
+              <a:prstClr val="black"/>
+            </a:solidFill>
+          </a:ln>
+        </p:spPr>
+      </p:sp>
+      <p:sp>
+        <p:nvSpPr>
+          <p:cNvPr id="3" name="Notizenplatzhalter 2"/>
           <p:cNvSpPr>
             <a:spLocks noGrp="1"/>
           </p:cNvSpPr>
@@ -704,42 +719,40 @@
             <p:ph type="body" idx="1"/>
           </p:nvPr>
         </p:nvSpPr>
-        <p:spPr/>
+        <p:spPr>
+          <a:xfrm>
+            <a:off x="685800" y="5867400"/>
+            <a:ext cx="5486400" cy="4800600"/>
+          </a:xfrm>
+          <a:prstGeom prst="rect">
+            <a:avLst/>
+          </a:prstGeom>
+        </p:spPr>
         <p:txBody>
           <a:bodyPr/>
           <a:lstStyle/>
           <a:p>
-            <a:endParaRPr lang="en-US" dirty="0"/>
-          </a:p>
-        </p:txBody>
-      </p:sp>
-      <p:sp>
-        <p:nvSpPr>
-          <p:cNvPr id="4" name="Slide Number Placeholder 3"/>
-          <p:cNvSpPr>
-            <a:spLocks noGrp="1"/>
-          </p:cNvSpPr>
-          <p:nvPr>
-            <p:ph type="sldNum" sz="quarter" idx="10"/>
-          </p:nvPr>
-        </p:nvSpPr>
-        <p:spPr/>
-        <p:txBody>
-          <a:bodyPr/>
-          <a:lstStyle/>
-          <a:p>
-            <a:fld id="{F7021451-1387-4CA6-816F-3879F97B5CBC}" type="slidenum">
-              <a:rPr lang="en-US"/>
-              <a:t>8</a:t>
-            </a:fld>
-            <a:endParaRPr lang="en-US"/>
+            <a:r>
+              <a:rPr lang="en-GB" dirty="0"/>
+              <a:t>Ranked table addition:</a:t>
+            </a:r>
+            <a:br>
+              <a:rPr lang="en-GB" dirty="0"/>
+            </a:br>
+            <a:r>
+              <a:rPr lang="en-GB" dirty="0">
+                <a:sym typeface="Wingdings" pitchFamily="2" charset="2"/>
+              </a:rPr>
+              <a:t> Detailed view of each alternative route (bar charts, CO2 emission…)</a:t>
+            </a:r>
+            <a:endParaRPr lang="en-GB" dirty="0"/>
           </a:p>
         </p:txBody>
       </p:sp>
     </p:spTree>
     <p:extLst>
       <p:ext uri="{BB962C8B-B14F-4D97-AF65-F5344CB8AC3E}">
-        <p14:creationId xmlns:p14="http://schemas.microsoft.com/office/powerpoint/2010/main" val="1024086991"/>
+        <p14:creationId xmlns:p14="http://schemas.microsoft.com/office/powerpoint/2010/main" val="1915275259"/>
       </p:ext>
     </p:extLst>
   </p:cSld>
@@ -815,6 +828,90 @@
             <a:fld id="{F7021451-1387-4CA6-816F-3879F97B5CBC}" type="slidenum">
               <a:rPr lang="en-US"/>
               <a:t>9</a:t>
+            </a:fld>
+            <a:endParaRPr lang="en-US"/>
+          </a:p>
+        </p:txBody>
+      </p:sp>
+    </p:spTree>
+    <p:extLst>
+      <p:ext uri="{BB962C8B-B14F-4D97-AF65-F5344CB8AC3E}">
+        <p14:creationId xmlns:p14="http://schemas.microsoft.com/office/powerpoint/2010/main" val="1024086991"/>
+      </p:ext>
+    </p:extLst>
+  </p:cSld>
+  <p:clrMapOvr>
+    <a:masterClrMapping/>
+  </p:clrMapOvr>
+</p:notes>
+</file>
+
+<file path=ppt/notesSlides/notesSlide8.xml><?xml version="1.0" encoding="utf-8"?>
+<p:notes xmlns:a="http://schemas.openxmlformats.org/drawingml/2006/main" xmlns:r="http://schemas.openxmlformats.org/officeDocument/2006/relationships" xmlns:p="http://schemas.openxmlformats.org/presentationml/2006/main">
+  <p:cSld>
+    <p:spTree>
+      <p:nvGrpSpPr>
+        <p:cNvPr id="1" name=""/>
+        <p:cNvGrpSpPr/>
+        <p:nvPr/>
+      </p:nvGrpSpPr>
+      <p:grpSpPr>
+        <a:xfrm>
+          <a:off x="0" y="0"/>
+          <a:ext cx="0" cy="0"/>
+          <a:chOff x="0" y="0"/>
+          <a:chExt cx="0" cy="0"/>
+        </a:xfrm>
+      </p:grpSpPr>
+      <p:sp>
+        <p:nvSpPr>
+          <p:cNvPr id="2" name="Slide Image Placeholder 1"/>
+          <p:cNvSpPr>
+            <a:spLocks noGrp="1" noRot="1" noChangeAspect="1"/>
+          </p:cNvSpPr>
+          <p:nvPr>
+            <p:ph type="sldImg"/>
+          </p:nvPr>
+        </p:nvSpPr>
+        <p:spPr/>
+      </p:sp>
+      <p:sp>
+        <p:nvSpPr>
+          <p:cNvPr id="3" name="Notes Placeholder 2"/>
+          <p:cNvSpPr>
+            <a:spLocks noGrp="1"/>
+          </p:cNvSpPr>
+          <p:nvPr>
+            <p:ph type="body" idx="1"/>
+          </p:nvPr>
+        </p:nvSpPr>
+        <p:spPr/>
+        <p:txBody>
+          <a:bodyPr/>
+          <a:lstStyle/>
+          <a:p>
+            <a:endParaRPr lang="en-US" dirty="0"/>
+          </a:p>
+        </p:txBody>
+      </p:sp>
+      <p:sp>
+        <p:nvSpPr>
+          <p:cNvPr id="4" name="Slide Number Placeholder 3"/>
+          <p:cNvSpPr>
+            <a:spLocks noGrp="1"/>
+          </p:cNvSpPr>
+          <p:nvPr>
+            <p:ph type="sldNum" sz="quarter" idx="10"/>
+          </p:nvPr>
+        </p:nvSpPr>
+        <p:spPr/>
+        <p:txBody>
+          <a:bodyPr/>
+          <a:lstStyle/>
+          <a:p>
+            <a:fld id="{F7021451-1387-4CA6-816F-3879F97B5CBC}" type="slidenum">
+              <a:rPr lang="en-US"/>
+              <a:t>10</a:t>
             </a:fld>
             <a:endParaRPr lang="en-US"/>
           </a:p>
@@ -1802,7 +1899,881 @@
 </p:sld>
 </file>
 
+<file path=ppt/slides/slide10.xml><?xml version="1.0" encoding="utf-8"?>
+<p:sld xmlns:a="http://schemas.openxmlformats.org/drawingml/2006/main" xmlns:r="http://schemas.openxmlformats.org/officeDocument/2006/relationships" xmlns:p="http://schemas.openxmlformats.org/presentationml/2006/main">
+  <p:cSld name="Slide 7">
+    <p:bg>
+      <p:bgPr>
+        <a:solidFill>
+          <a:srgbClr val="0F1923"/>
+        </a:solidFill>
+        <a:effectLst/>
+      </p:bgPr>
+    </p:bg>
+    <p:spTree>
+      <p:nvGrpSpPr>
+        <p:cNvPr id="1" name=""/>
+        <p:cNvGrpSpPr/>
+        <p:nvPr/>
+      </p:nvGrpSpPr>
+      <p:grpSpPr>
+        <a:xfrm>
+          <a:off x="0" y="0"/>
+          <a:ext cx="0" cy="0"/>
+          <a:chOff x="0" y="0"/>
+          <a:chExt cx="0" cy="0"/>
+        </a:xfrm>
+      </p:grpSpPr>
+      <p:sp>
+        <p:nvSpPr>
+          <p:cNvPr id="2" name="Shape 0"/>
+          <p:cNvSpPr/>
+          <p:nvPr/>
+        </p:nvSpPr>
+        <p:spPr>
+          <a:xfrm>
+            <a:off x="7132320" y="0"/>
+            <a:ext cx="5029200" cy="6858000"/>
+          </a:xfrm>
+          <a:prstGeom prst="rect">
+            <a:avLst/>
+          </a:prstGeom>
+          <a:solidFill>
+            <a:srgbClr val="0D9488">
+              <a:alpha val="90000"/>
+            </a:srgbClr>
+          </a:solidFill>
+          <a:ln/>
+        </p:spPr>
+        <p:txBody>
+          <a:bodyPr/>
+          <a:lstStyle/>
+          <a:p>
+            <a:endParaRPr/>
+          </a:p>
+        </p:txBody>
+      </p:sp>
+      <p:pic>
+        <p:nvPicPr>
+          <p:cNvPr id="3" name="Image 0" descr="preencoded.png"/>
+          <p:cNvPicPr>
+            <a:picLocks noChangeAspect="1"/>
+          </p:cNvPicPr>
+          <p:nvPr/>
+        </p:nvPicPr>
+        <p:blipFill>
+          <a:blip r:embed="rId3">
+            <a:alphaModFix amt="75000"/>
+          </a:blip>
+          <a:stretch>
+            <a:fillRect/>
+          </a:stretch>
+        </p:blipFill>
+        <p:spPr>
+          <a:xfrm>
+            <a:off x="7498080" y="365760"/>
+            <a:ext cx="4206240" cy="4206240"/>
+          </a:xfrm>
+          <a:prstGeom prst="rect">
+            <a:avLst/>
+          </a:prstGeom>
+        </p:spPr>
+      </p:pic>
+      <p:sp>
+        <p:nvSpPr>
+          <p:cNvPr id="4" name="Text 1"/>
+          <p:cNvSpPr/>
+          <p:nvPr/>
+        </p:nvSpPr>
+        <p:spPr>
+          <a:xfrm>
+            <a:off x="457200" y="365760"/>
+            <a:ext cx="6400800" cy="365760"/>
+          </a:xfrm>
+          <a:prstGeom prst="rect">
+            <a:avLst/>
+          </a:prstGeom>
+          <a:noFill/>
+          <a:ln/>
+        </p:spPr>
+        <p:txBody>
+          <a:bodyPr wrap="square" rtlCol="0" anchor="ctr"/>
+          <a:lstStyle/>
+          <a:p>
+            <a:pPr marL="0" indent="0">
+              <a:buNone/>
+            </a:pPr>
+            <a:r>
+              <a:rPr lang="en-US" sz="1000" b="1" kern="0" spc="300" dirty="0">
+                <a:solidFill>
+                  <a:srgbClr val="0D9488"/>
+                </a:solidFill>
+                <a:latin typeface="Calibri" pitchFamily="34" charset="0"/>
+                <a:ea typeface="Calibri" pitchFamily="34" charset="-122"/>
+                <a:cs typeface="Calibri" pitchFamily="34" charset="-120"/>
+              </a:rPr>
+              <a:t>08  —  TAKEAWAYS</a:t>
+            </a:r>
+            <a:endParaRPr lang="en-US" sz="1000" dirty="0"/>
+          </a:p>
+        </p:txBody>
+      </p:sp>
+      <p:sp>
+        <p:nvSpPr>
+          <p:cNvPr id="5" name="Text 2"/>
+          <p:cNvSpPr/>
+          <p:nvPr/>
+        </p:nvSpPr>
+        <p:spPr>
+          <a:xfrm>
+            <a:off x="457200" y="822960"/>
+            <a:ext cx="6400800" cy="2194560"/>
+          </a:xfrm>
+          <a:prstGeom prst="rect">
+            <a:avLst/>
+          </a:prstGeom>
+          <a:noFill/>
+          <a:ln/>
+        </p:spPr>
+        <p:txBody>
+          <a:bodyPr wrap="square" rtlCol="0" anchor="ctr"/>
+          <a:lstStyle/>
+          <a:p>
+            <a:pPr marL="0" indent="0">
+              <a:lnSpc>
+                <a:spcPct val="115000"/>
+              </a:lnSpc>
+              <a:buNone/>
+            </a:pPr>
+            <a:r>
+              <a:rPr lang="en-US" sz="4200" b="1" dirty="0">
+                <a:solidFill>
+                  <a:srgbClr val="FFFFFF"/>
+                </a:solidFill>
+                <a:latin typeface="Calibri" pitchFamily="34" charset="0"/>
+                <a:ea typeface="Calibri" pitchFamily="34" charset="-122"/>
+                <a:cs typeface="Calibri" pitchFamily="34" charset="-120"/>
+              </a:rPr>
+              <a:t>Ready to Reduce</a:t>
+            </a:r>
+            <a:endParaRPr lang="en-US" sz="4200" dirty="0"/>
+          </a:p>
+          <a:p>
+            <a:pPr marL="0" indent="0">
+              <a:lnSpc>
+                <a:spcPct val="115000"/>
+              </a:lnSpc>
+              <a:buNone/>
+            </a:pPr>
+            <a:r>
+              <a:rPr lang="en-US" sz="4200" b="1" dirty="0">
+                <a:solidFill>
+                  <a:srgbClr val="FFFFFF"/>
+                </a:solidFill>
+                <a:latin typeface="Calibri" pitchFamily="34" charset="0"/>
+                <a:ea typeface="Calibri" pitchFamily="34" charset="-122"/>
+                <a:cs typeface="Calibri" pitchFamily="34" charset="-120"/>
+              </a:rPr>
+              <a:t>Your Carbon</a:t>
+            </a:r>
+            <a:endParaRPr lang="en-US" sz="4200" dirty="0"/>
+          </a:p>
+          <a:p>
+            <a:pPr marL="0" indent="0">
+              <a:lnSpc>
+                <a:spcPct val="115000"/>
+              </a:lnSpc>
+              <a:buNone/>
+            </a:pPr>
+            <a:r>
+              <a:rPr lang="en-US" sz="4200" b="1" dirty="0">
+                <a:solidFill>
+                  <a:srgbClr val="FFFFFF"/>
+                </a:solidFill>
+                <a:latin typeface="Calibri" pitchFamily="34" charset="0"/>
+                <a:ea typeface="Calibri" pitchFamily="34" charset="-122"/>
+                <a:cs typeface="Calibri" pitchFamily="34" charset="-120"/>
+              </a:rPr>
+              <a:t>Footprint?</a:t>
+            </a:r>
+            <a:endParaRPr lang="en-US" sz="4200" dirty="0"/>
+          </a:p>
+        </p:txBody>
+      </p:sp>
+      <p:pic>
+        <p:nvPicPr>
+          <p:cNvPr id="6" name="Image 1" descr="preencoded.png"/>
+          <p:cNvPicPr>
+            <a:picLocks noChangeAspect="1"/>
+          </p:cNvPicPr>
+          <p:nvPr/>
+        </p:nvPicPr>
+        <p:blipFill>
+          <a:blip r:embed="rId4"/>
+          <a:stretch>
+            <a:fillRect/>
+          </a:stretch>
+        </p:blipFill>
+        <p:spPr>
+          <a:xfrm>
+            <a:off x="457200" y="3319272"/>
+            <a:ext cx="320040" cy="320040"/>
+          </a:xfrm>
+          <a:prstGeom prst="rect">
+            <a:avLst/>
+          </a:prstGeom>
+        </p:spPr>
+      </p:pic>
+      <p:sp>
+        <p:nvSpPr>
+          <p:cNvPr id="7" name="Text 3"/>
+          <p:cNvSpPr/>
+          <p:nvPr/>
+        </p:nvSpPr>
+        <p:spPr>
+          <a:xfrm>
+            <a:off x="914400" y="3291840"/>
+            <a:ext cx="5943600" cy="411480"/>
+          </a:xfrm>
+          <a:prstGeom prst="rect">
+            <a:avLst/>
+          </a:prstGeom>
+          <a:noFill/>
+          <a:ln/>
+        </p:spPr>
+        <p:txBody>
+          <a:bodyPr wrap="square" rtlCol="0" anchor="ctr"/>
+          <a:lstStyle/>
+          <a:p>
+            <a:pPr marL="0" indent="0">
+              <a:buNone/>
+            </a:pPr>
+            <a:r>
+              <a:rPr lang="en-US" sz="1300" dirty="0">
+                <a:solidFill>
+                  <a:srgbClr val="E2E8F0"/>
+                </a:solidFill>
+                <a:latin typeface="Calibri" pitchFamily="34" charset="0"/>
+                <a:ea typeface="Calibri" pitchFamily="34" charset="-122"/>
+                <a:cs typeface="Calibri" pitchFamily="34" charset="-120"/>
+              </a:rPr>
+              <a:t>Real-time budget compliance across all BUs</a:t>
+            </a:r>
+            <a:endParaRPr lang="en-US" sz="1300" dirty="0"/>
+          </a:p>
+        </p:txBody>
+      </p:sp>
+      <p:pic>
+        <p:nvPicPr>
+          <p:cNvPr id="8" name="Image 2" descr="preencoded.png"/>
+          <p:cNvPicPr>
+            <a:picLocks noChangeAspect="1"/>
+          </p:cNvPicPr>
+          <p:nvPr/>
+        </p:nvPicPr>
+        <p:blipFill>
+          <a:blip r:embed="rId4"/>
+          <a:stretch>
+            <a:fillRect/>
+          </a:stretch>
+        </p:blipFill>
+        <p:spPr>
+          <a:xfrm>
+            <a:off x="457200" y="3831336"/>
+            <a:ext cx="320040" cy="320040"/>
+          </a:xfrm>
+          <a:prstGeom prst="rect">
+            <a:avLst/>
+          </a:prstGeom>
+        </p:spPr>
+      </p:pic>
+      <p:sp>
+        <p:nvSpPr>
+          <p:cNvPr id="9" name="Text 4"/>
+          <p:cNvSpPr/>
+          <p:nvPr/>
+        </p:nvSpPr>
+        <p:spPr>
+          <a:xfrm>
+            <a:off x="914400" y="3803904"/>
+            <a:ext cx="5943600" cy="411480"/>
+          </a:xfrm>
+          <a:prstGeom prst="rect">
+            <a:avLst/>
+          </a:prstGeom>
+          <a:noFill/>
+          <a:ln/>
+        </p:spPr>
+        <p:txBody>
+          <a:bodyPr wrap="square" rtlCol="0" anchor="ctr"/>
+          <a:lstStyle/>
+          <a:p>
+            <a:pPr marL="0" indent="0">
+              <a:buNone/>
+            </a:pPr>
+            <a:r>
+              <a:rPr lang="en-US" sz="1300" dirty="0">
+                <a:solidFill>
+                  <a:srgbClr val="E2E8F0"/>
+                </a:solidFill>
+                <a:latin typeface="Calibri" pitchFamily="34" charset="0"/>
+                <a:ea typeface="Calibri" pitchFamily="34" charset="-122"/>
+                <a:cs typeface="Calibri" pitchFamily="34" charset="-120"/>
+              </a:rPr>
+              <a:t>Automatic detection of mode-shift opportunities</a:t>
+            </a:r>
+            <a:endParaRPr lang="en-US" sz="1300" dirty="0"/>
+          </a:p>
+        </p:txBody>
+      </p:sp>
+      <p:pic>
+        <p:nvPicPr>
+          <p:cNvPr id="10" name="Image 3" descr="preencoded.png"/>
+          <p:cNvPicPr>
+            <a:picLocks noChangeAspect="1"/>
+          </p:cNvPicPr>
+          <p:nvPr/>
+        </p:nvPicPr>
+        <p:blipFill>
+          <a:blip r:embed="rId4"/>
+          <a:stretch>
+            <a:fillRect/>
+          </a:stretch>
+        </p:blipFill>
+        <p:spPr>
+          <a:xfrm>
+            <a:off x="457200" y="4343400"/>
+            <a:ext cx="320040" cy="320040"/>
+          </a:xfrm>
+          <a:prstGeom prst="rect">
+            <a:avLst/>
+          </a:prstGeom>
+        </p:spPr>
+      </p:pic>
+      <p:sp>
+        <p:nvSpPr>
+          <p:cNvPr id="11" name="Text 5"/>
+          <p:cNvSpPr/>
+          <p:nvPr/>
+        </p:nvSpPr>
+        <p:spPr>
+          <a:xfrm>
+            <a:off x="914400" y="4315968"/>
+            <a:ext cx="5943600" cy="411480"/>
+          </a:xfrm>
+          <a:prstGeom prst="rect">
+            <a:avLst/>
+          </a:prstGeom>
+          <a:noFill/>
+          <a:ln/>
+        </p:spPr>
+        <p:txBody>
+          <a:bodyPr wrap="square" rtlCol="0" anchor="ctr"/>
+          <a:lstStyle/>
+          <a:p>
+            <a:pPr marL="0" indent="0">
+              <a:buNone/>
+            </a:pPr>
+            <a:r>
+              <a:rPr lang="en-US" sz="1300" dirty="0">
+                <a:solidFill>
+                  <a:srgbClr val="E2E8F0"/>
+                </a:solidFill>
+                <a:latin typeface="Calibri" pitchFamily="34" charset="0"/>
+                <a:ea typeface="Calibri" pitchFamily="34" charset="-122"/>
+                <a:cs typeface="Calibri" pitchFamily="34" charset="-120"/>
+              </a:rPr>
+              <a:t>Interactive maps and route deep-dives</a:t>
+            </a:r>
+            <a:endParaRPr lang="en-US" sz="1300" dirty="0"/>
+          </a:p>
+        </p:txBody>
+      </p:sp>
+      <p:pic>
+        <p:nvPicPr>
+          <p:cNvPr id="12" name="Image 4" descr="preencoded.png"/>
+          <p:cNvPicPr>
+            <a:picLocks noChangeAspect="1"/>
+          </p:cNvPicPr>
+          <p:nvPr/>
+        </p:nvPicPr>
+        <p:blipFill>
+          <a:blip r:embed="rId4"/>
+          <a:stretch>
+            <a:fillRect/>
+          </a:stretch>
+        </p:blipFill>
+        <p:spPr>
+          <a:xfrm>
+            <a:off x="457200" y="4855464"/>
+            <a:ext cx="320040" cy="320040"/>
+          </a:xfrm>
+          <a:prstGeom prst="rect">
+            <a:avLst/>
+          </a:prstGeom>
+        </p:spPr>
+      </p:pic>
+      <p:sp>
+        <p:nvSpPr>
+          <p:cNvPr id="13" name="Text 6"/>
+          <p:cNvSpPr/>
+          <p:nvPr/>
+        </p:nvSpPr>
+        <p:spPr>
+          <a:xfrm>
+            <a:off x="914400" y="4828032"/>
+            <a:ext cx="5943600" cy="411480"/>
+          </a:xfrm>
+          <a:prstGeom prst="rect">
+            <a:avLst/>
+          </a:prstGeom>
+          <a:noFill/>
+          <a:ln/>
+        </p:spPr>
+        <p:txBody>
+          <a:bodyPr wrap="square" rtlCol="0" anchor="ctr"/>
+          <a:lstStyle/>
+          <a:p>
+            <a:pPr marL="0" indent="0">
+              <a:buNone/>
+            </a:pPr>
+            <a:r>
+              <a:rPr lang="en-US" sz="1300" dirty="0">
+                <a:solidFill>
+                  <a:srgbClr val="E2E8F0"/>
+                </a:solidFill>
+                <a:latin typeface="Calibri" pitchFamily="34" charset="0"/>
+                <a:ea typeface="Calibri" pitchFamily="34" charset="-122"/>
+                <a:cs typeface="Calibri" pitchFamily="34" charset="-120"/>
+              </a:rPr>
+              <a:t>Excel export with per-trip recommendations</a:t>
+            </a:r>
+            <a:endParaRPr lang="en-US" sz="1300" dirty="0"/>
+          </a:p>
+        </p:txBody>
+      </p:sp>
+      <p:sp>
+        <p:nvSpPr>
+          <p:cNvPr id="15" name="Text 7"/>
+          <p:cNvSpPr/>
+          <p:nvPr/>
+        </p:nvSpPr>
+        <p:spPr>
+          <a:xfrm>
+            <a:off x="914400" y="5340096"/>
+            <a:ext cx="5943600" cy="411480"/>
+          </a:xfrm>
+          <a:prstGeom prst="rect">
+            <a:avLst/>
+          </a:prstGeom>
+          <a:noFill/>
+          <a:ln/>
+        </p:spPr>
+        <p:txBody>
+          <a:bodyPr wrap="square" rtlCol="0" anchor="ctr"/>
+          <a:lstStyle/>
+          <a:p>
+            <a:pPr marL="0" indent="0">
+              <a:buNone/>
+            </a:pPr>
+            <a:endParaRPr lang="en-US" sz="1300" dirty="0"/>
+          </a:p>
+        </p:txBody>
+      </p:sp>
+      <p:sp>
+        <p:nvSpPr>
+          <p:cNvPr id="16" name="Text 8"/>
+          <p:cNvSpPr/>
+          <p:nvPr/>
+        </p:nvSpPr>
+        <p:spPr>
+          <a:xfrm>
+            <a:off x="7498080" y="5029200"/>
+            <a:ext cx="4206240" cy="594360"/>
+          </a:xfrm>
+          <a:prstGeom prst="rect">
+            <a:avLst/>
+          </a:prstGeom>
+          <a:noFill/>
+          <a:ln/>
+        </p:spPr>
+        <p:txBody>
+          <a:bodyPr wrap="square" rtlCol="0" anchor="ctr"/>
+          <a:lstStyle/>
+          <a:p>
+            <a:pPr marL="0" indent="0" algn="ctr">
+              <a:buNone/>
+            </a:pPr>
+            <a:r>
+              <a:rPr lang="en-US" sz="2800" b="1" dirty="0">
+                <a:solidFill>
+                  <a:srgbClr val="0F1923"/>
+                </a:solidFill>
+                <a:latin typeface="Calibri" pitchFamily="34" charset="0"/>
+                <a:ea typeface="Calibri" pitchFamily="34" charset="-122"/>
+                <a:cs typeface="Calibri" pitchFamily="34" charset="-120"/>
+              </a:rPr>
+              <a:t>Get Started</a:t>
+            </a:r>
+            <a:endParaRPr lang="en-US" sz="2800" dirty="0"/>
+          </a:p>
+        </p:txBody>
+      </p:sp>
+      <p:sp>
+        <p:nvSpPr>
+          <p:cNvPr id="17" name="Text 9"/>
+          <p:cNvSpPr/>
+          <p:nvPr/>
+        </p:nvSpPr>
+        <p:spPr>
+          <a:xfrm>
+            <a:off x="7680960" y="5669280"/>
+            <a:ext cx="3840480" cy="457200"/>
+          </a:xfrm>
+          <a:prstGeom prst="rect">
+            <a:avLst/>
+          </a:prstGeom>
+          <a:solidFill>
+            <a:srgbClr val="FFFFFF">
+              <a:alpha val="80000"/>
+            </a:srgbClr>
+          </a:solidFill>
+          <a:ln/>
+        </p:spPr>
+        <p:txBody>
+          <a:bodyPr wrap="square" rtlCol="0" anchor="ctr"/>
+          <a:lstStyle/>
+          <a:p>
+            <a:pPr marL="0" indent="0" algn="ctr">
+              <a:buNone/>
+            </a:pPr>
+            <a:r>
+              <a:rPr lang="en-US" sz="1400" dirty="0">
+                <a:hlinkClick r:id="rId5"/>
+              </a:rPr>
+              <a:t>Here</a:t>
+            </a:r>
+            <a:endParaRPr lang="en-US" sz="1400" dirty="0"/>
+          </a:p>
+        </p:txBody>
+      </p:sp>
+      <p:sp>
+        <p:nvSpPr>
+          <p:cNvPr id="18" name="Text 10"/>
+          <p:cNvSpPr/>
+          <p:nvPr/>
+        </p:nvSpPr>
+        <p:spPr>
+          <a:xfrm>
+            <a:off x="0" y="6492240"/>
+            <a:ext cx="12161520" cy="320040"/>
+          </a:xfrm>
+          <a:prstGeom prst="rect">
+            <a:avLst/>
+          </a:prstGeom>
+          <a:noFill/>
+          <a:ln/>
+        </p:spPr>
+        <p:txBody>
+          <a:bodyPr wrap="square" rtlCol="0" anchor="ctr"/>
+          <a:lstStyle/>
+          <a:p>
+            <a:pPr marL="0" indent="0" algn="ctr">
+              <a:buNone/>
+            </a:pPr>
+            <a:r>
+              <a:rPr lang="en-US" sz="1000" dirty="0">
+                <a:solidFill>
+                  <a:srgbClr val="94A3B8"/>
+                </a:solidFill>
+                <a:latin typeface="Calibri" pitchFamily="34" charset="0"/>
+                <a:ea typeface="Calibri" pitchFamily="34" charset="-122"/>
+                <a:cs typeface="Calibri" pitchFamily="34" charset="-120"/>
+              </a:rPr>
+              <a:t>Built with Streamlit  ·  Plotly  ·  Python</a:t>
+            </a:r>
+            <a:endParaRPr lang="en-US" sz="1000" dirty="0"/>
+          </a:p>
+        </p:txBody>
+      </p:sp>
+    </p:spTree>
+  </p:cSld>
+  <p:clrMapOvr>
+    <a:masterClrMapping/>
+  </p:clrMapOvr>
+</p:sld>
+</file>
+
 <file path=ppt/slides/slide2.xml><?xml version="1.0" encoding="utf-8"?>
+<p:sld xmlns:a="http://schemas.openxmlformats.org/drawingml/2006/main" xmlns:r="http://schemas.openxmlformats.org/officeDocument/2006/relationships" xmlns:p="http://schemas.openxmlformats.org/presentationml/2006/main">
+  <p:cSld>
+    <p:spTree>
+      <p:nvGrpSpPr>
+        <p:cNvPr id="1" name=""/>
+        <p:cNvGrpSpPr/>
+        <p:nvPr/>
+      </p:nvGrpSpPr>
+      <p:grpSpPr>
+        <a:xfrm>
+          <a:off x="0" y="0"/>
+          <a:ext cx="0" cy="0"/>
+          <a:chOff x="0" y="0"/>
+          <a:chExt cx="0" cy="0"/>
+        </a:xfrm>
+      </p:grpSpPr>
+      <p:sp>
+        <p:nvSpPr>
+          <p:cNvPr id="2" name="Textfeld 1">
+            <a:extLst>
+              <a:ext uri="{FF2B5EF4-FFF2-40B4-BE49-F238E27FC236}">
+                <a16:creationId xmlns:a16="http://schemas.microsoft.com/office/drawing/2014/main" id="{E1DF5E88-C26B-F304-0C2A-B87B1F7EC324}"/>
+              </a:ext>
+            </a:extLst>
+          </p:cNvPr>
+          <p:cNvSpPr txBox="1"/>
+          <p:nvPr/>
+        </p:nvSpPr>
+        <p:spPr>
+          <a:xfrm>
+            <a:off x="1238864" y="934064"/>
+            <a:ext cx="9144001" cy="4524315"/>
+          </a:xfrm>
+          <a:prstGeom prst="rect">
+            <a:avLst/>
+          </a:prstGeom>
+          <a:noFill/>
+        </p:spPr>
+        <p:txBody>
+          <a:bodyPr wrap="square" rtlCol="0">
+            <a:spAutoFit/>
+          </a:bodyPr>
+          <a:lstStyle/>
+          <a:p>
+            <a:pPr marL="285750" indent="-285750">
+              <a:buFont typeface="Arial" panose="020B0604020202020204" pitchFamily="34" charset="0"/>
+              <a:buChar char="•"/>
+            </a:pPr>
+            <a:r>
+              <a:rPr lang="en-GB" dirty="0" err="1"/>
+              <a:t>Problemschilderung</a:t>
+            </a:r>
+            <a:endParaRPr lang="en-GB" dirty="0"/>
+          </a:p>
+          <a:p>
+            <a:pPr marL="742950" lvl="1" indent="-285750">
+              <a:buFont typeface="Arial" panose="020B0604020202020204" pitchFamily="34" charset="0"/>
+              <a:buChar char="•"/>
+            </a:pPr>
+            <a:r>
+              <a:rPr lang="en-GB" dirty="0"/>
+              <a:t>Von </a:t>
+            </a:r>
+            <a:r>
+              <a:rPr lang="en-GB" dirty="0" err="1"/>
+              <a:t>Firma</a:t>
+            </a:r>
+            <a:r>
+              <a:rPr lang="en-GB" dirty="0"/>
+              <a:t> </a:t>
+            </a:r>
+            <a:r>
+              <a:rPr lang="en-GB" dirty="0" err="1"/>
+              <a:t>x,y</a:t>
+            </a:r>
+            <a:r>
+              <a:rPr lang="en-GB" dirty="0"/>
+              <a:t> </a:t>
+            </a:r>
+            <a:r>
+              <a:rPr lang="en-GB" dirty="0" err="1"/>
+              <a:t>beauftragt</a:t>
+            </a:r>
+            <a:r>
+              <a:rPr lang="en-GB" dirty="0"/>
+              <a:t> </a:t>
+            </a:r>
+          </a:p>
+          <a:p>
+            <a:pPr marL="742950" lvl="1" indent="-285750">
+              <a:buFont typeface="Arial" panose="020B0604020202020204" pitchFamily="34" charset="0"/>
+              <a:buChar char="•"/>
+            </a:pPr>
+            <a:r>
+              <a:rPr lang="en-GB" dirty="0"/>
+              <a:t>Personas </a:t>
+            </a:r>
+            <a:r>
+              <a:rPr lang="en-GB" dirty="0" err="1"/>
+              <a:t>mit</a:t>
+            </a:r>
+            <a:r>
+              <a:rPr lang="en-GB" dirty="0"/>
+              <a:t> </a:t>
+            </a:r>
+            <a:r>
+              <a:rPr lang="en-GB" dirty="0" err="1"/>
+              <a:t>ihren</a:t>
+            </a:r>
+            <a:r>
+              <a:rPr lang="en-GB" dirty="0"/>
+              <a:t> Pain – </a:t>
+            </a:r>
+            <a:r>
+              <a:rPr lang="en-GB" dirty="0" err="1"/>
+              <a:t>Punkte</a:t>
+            </a:r>
+            <a:endParaRPr lang="en-GB" dirty="0"/>
+          </a:p>
+          <a:p>
+            <a:pPr marL="742950" lvl="1" indent="-285750">
+              <a:buFont typeface="Arial" panose="020B0604020202020204" pitchFamily="34" charset="0"/>
+              <a:buChar char="•"/>
+            </a:pPr>
+            <a:r>
+              <a:rPr lang="en-GB" dirty="0"/>
+              <a:t>--&gt; </a:t>
+            </a:r>
+            <a:r>
+              <a:rPr lang="en-GB" dirty="0" err="1"/>
+              <a:t>Folien</a:t>
+            </a:r>
+            <a:r>
+              <a:rPr lang="en-GB" dirty="0"/>
+              <a:t> 2 und 3</a:t>
+            </a:r>
+          </a:p>
+          <a:p>
+            <a:pPr marL="742950" lvl="1" indent="-285750">
+              <a:buFont typeface="Arial" panose="020B0604020202020204" pitchFamily="34" charset="0"/>
+              <a:buChar char="•"/>
+            </a:pPr>
+            <a:endParaRPr lang="en-GB" dirty="0"/>
+          </a:p>
+          <a:p>
+            <a:pPr marL="285750" indent="-285750">
+              <a:buFont typeface="Arial" panose="020B0604020202020204" pitchFamily="34" charset="0"/>
+              <a:buChar char="•"/>
+            </a:pPr>
+            <a:r>
+              <a:rPr lang="en-GB" dirty="0" err="1"/>
+              <a:t>Lösungsvorschlag</a:t>
+            </a:r>
+            <a:r>
+              <a:rPr lang="en-GB" dirty="0"/>
+              <a:t> (Folie 4)</a:t>
+            </a:r>
+          </a:p>
+          <a:p>
+            <a:pPr marL="285750" indent="-285750">
+              <a:buFont typeface="Arial" panose="020B0604020202020204" pitchFamily="34" charset="0"/>
+              <a:buChar char="•"/>
+            </a:pPr>
+            <a:endParaRPr lang="en-GB" dirty="0"/>
+          </a:p>
+          <a:p>
+            <a:pPr marL="285750" indent="-285750">
+              <a:buFont typeface="Arial" panose="020B0604020202020204" pitchFamily="34" charset="0"/>
+              <a:buChar char="•"/>
+            </a:pPr>
+            <a:endParaRPr lang="en-GB" dirty="0"/>
+          </a:p>
+          <a:p>
+            <a:pPr marL="285750" indent="-285750">
+              <a:buFont typeface="Arial" panose="020B0604020202020204" pitchFamily="34" charset="0"/>
+              <a:buChar char="•"/>
+            </a:pPr>
+            <a:endParaRPr lang="en-GB" dirty="0"/>
+          </a:p>
+          <a:p>
+            <a:pPr marL="285750" indent="-285750">
+              <a:buFont typeface="Arial" panose="020B0604020202020204" pitchFamily="34" charset="0"/>
+              <a:buChar char="•"/>
+            </a:pPr>
+            <a:r>
+              <a:rPr lang="en-GB" dirty="0"/>
+              <a:t>Ajna + Domenik (Dashboard) 5min</a:t>
+            </a:r>
+          </a:p>
+          <a:p>
+            <a:pPr marL="285750" indent="-285750">
+              <a:buFont typeface="Arial" panose="020B0604020202020204" pitchFamily="34" charset="0"/>
+              <a:buChar char="•"/>
+            </a:pPr>
+            <a:r>
+              <a:rPr lang="en-GB" dirty="0"/>
+              <a:t>Dario (The </a:t>
+            </a:r>
+            <a:r>
+              <a:rPr lang="en-GB" dirty="0" err="1"/>
+              <a:t>Challenge+Persones,Last-word</a:t>
+            </a:r>
+            <a:r>
+              <a:rPr lang="en-GB" dirty="0"/>
+              <a:t>) 2.5min</a:t>
+            </a:r>
+          </a:p>
+          <a:p>
+            <a:pPr marL="285750" indent="-285750">
+              <a:buFont typeface="Arial" panose="020B0604020202020204" pitchFamily="34" charset="0"/>
+              <a:buChar char="•"/>
+            </a:pPr>
+            <a:r>
+              <a:rPr lang="en-GB" dirty="0"/>
+              <a:t>Mica (</a:t>
+            </a:r>
+            <a:r>
+              <a:rPr lang="en-GB" dirty="0" err="1"/>
+              <a:t>Lösung</a:t>
+            </a:r>
+            <a:r>
+              <a:rPr lang="en-GB" dirty="0"/>
+              <a:t> – Visual Choices) 2.5min</a:t>
+            </a:r>
+          </a:p>
+          <a:p>
+            <a:pPr marL="285750" indent="-285750">
+              <a:buFont typeface="Arial" panose="020B0604020202020204" pitchFamily="34" charset="0"/>
+              <a:buChar char="•"/>
+            </a:pPr>
+            <a:endParaRPr lang="en-GB" dirty="0"/>
+          </a:p>
+          <a:p>
+            <a:pPr marL="285750" indent="-285750">
+              <a:buFont typeface="Arial" panose="020B0604020202020204" pitchFamily="34" charset="0"/>
+              <a:buChar char="•"/>
+            </a:pPr>
+            <a:endParaRPr lang="en-GB" dirty="0"/>
+          </a:p>
+          <a:p>
+            <a:pPr marL="285750" indent="-285750">
+              <a:buFont typeface="Arial" panose="020B0604020202020204" pitchFamily="34" charset="0"/>
+              <a:buChar char="•"/>
+            </a:pPr>
+            <a:endParaRPr lang="en-GB" dirty="0"/>
+          </a:p>
+          <a:p>
+            <a:pPr marL="285750" indent="-285750">
+              <a:buFont typeface="Arial" panose="020B0604020202020204" pitchFamily="34" charset="0"/>
+              <a:buChar char="•"/>
+            </a:pPr>
+            <a:endParaRPr lang="en-GB" dirty="0"/>
+          </a:p>
+        </p:txBody>
+      </p:sp>
+    </p:spTree>
+    <p:extLst>
+      <p:ext uri="{BB962C8B-B14F-4D97-AF65-F5344CB8AC3E}">
+        <p14:creationId xmlns:p14="http://schemas.microsoft.com/office/powerpoint/2010/main" val="866845022"/>
+      </p:ext>
+    </p:extLst>
+  </p:cSld>
+  <p:clrMapOvr>
+    <a:masterClrMapping/>
+  </p:clrMapOvr>
+</p:sld>
+</file>
+
+<file path=ppt/slides/slide3.xml><?xml version="1.0" encoding="utf-8"?>
 <p:sld xmlns:a="http://schemas.openxmlformats.org/drawingml/2006/main" xmlns:r="http://schemas.openxmlformats.org/officeDocument/2006/relationships" xmlns:p="http://schemas.openxmlformats.org/presentationml/2006/main">
   <p:cSld name="Slide 2">
     <p:bg>
@@ -2579,7 +3550,7 @@
 </p:sld>
 </file>
 
-<file path=ppt/slides/slide3.xml><?xml version="1.0" encoding="utf-8"?>
+<file path=ppt/slides/slide4.xml><?xml version="1.0" encoding="utf-8"?>
 <p:sld xmlns:a="http://schemas.openxmlformats.org/drawingml/2006/main" xmlns:r="http://schemas.openxmlformats.org/officeDocument/2006/relationships" xmlns:p="http://schemas.openxmlformats.org/presentationml/2006/main">
   <p:cSld name="Slide Personas">
     <p:bg>
@@ -3020,7 +3991,7 @@
 </p:sld>
 </file>
 
-<file path=ppt/slides/slide4.xml><?xml version="1.0" encoding="utf-8"?>
+<file path=ppt/slides/slide5.xml><?xml version="1.0" encoding="utf-8"?>
 <p:sld xmlns:a="http://schemas.openxmlformats.org/drawingml/2006/main" xmlns:r="http://schemas.openxmlformats.org/officeDocument/2006/relationships" xmlns:p="http://schemas.openxmlformats.org/presentationml/2006/main">
   <p:cSld name="Slide 3">
     <p:bg>
@@ -3951,3095 +4922,7 @@
 </p:sld>
 </file>
 
-<file path=ppt/slides/slide5.xml><?xml version="1.0" encoding="utf-8"?>
-<p:sld xmlns:a="http://schemas.openxmlformats.org/drawingml/2006/main" xmlns:r="http://schemas.openxmlformats.org/officeDocument/2006/relationships" xmlns:p="http://schemas.openxmlformats.org/presentationml/2006/main">
-  <p:cSld name="Slide 4">
-    <p:bg>
-      <p:bgPr>
-        <a:solidFill>
-          <a:srgbClr val="0F1923"/>
-        </a:solidFill>
-        <a:effectLst/>
-      </p:bgPr>
-    </p:bg>
-    <p:spTree>
-      <p:nvGrpSpPr>
-        <p:cNvPr id="1" name=""/>
-        <p:cNvGrpSpPr/>
-        <p:nvPr/>
-      </p:nvGrpSpPr>
-      <p:grpSpPr>
-        <a:xfrm>
-          <a:off x="0" y="0"/>
-          <a:ext cx="0" cy="0"/>
-          <a:chOff x="0" y="0"/>
-          <a:chExt cx="0" cy="0"/>
-        </a:xfrm>
-      </p:grpSpPr>
-      <p:sp>
-        <p:nvSpPr>
-          <p:cNvPr id="2" name="Text 0"/>
-          <p:cNvSpPr/>
-          <p:nvPr/>
-        </p:nvSpPr>
-        <p:spPr>
-          <a:xfrm>
-            <a:off x="457200" y="274320"/>
-            <a:ext cx="10972800" cy="365760"/>
-          </a:xfrm>
-          <a:prstGeom prst="rect">
-            <a:avLst/>
-          </a:prstGeom>
-          <a:noFill/>
-          <a:ln/>
-        </p:spPr>
-        <p:txBody>
-          <a:bodyPr wrap="square" rtlCol="0" anchor="ctr"/>
-          <a:lstStyle/>
-          <a:p>
-            <a:pPr marL="0" indent="0">
-              <a:buNone/>
-            </a:pPr>
-            <a:r>
-              <a:rPr lang="en-US" sz="1000" b="1" kern="0" spc="300" dirty="0">
-                <a:solidFill>
-                  <a:srgbClr val="0D9488"/>
-                </a:solidFill>
-                <a:latin typeface="Calibri" pitchFamily="34" charset="0"/>
-                <a:ea typeface="Calibri" pitchFamily="34" charset="-122"/>
-                <a:cs typeface="Calibri" pitchFamily="34" charset="-120"/>
-              </a:rPr>
-              <a:t>04  —  BUDGET COMPLIANCE</a:t>
-            </a:r>
-            <a:endParaRPr lang="en-US" sz="1000" dirty="0"/>
-          </a:p>
-        </p:txBody>
-      </p:sp>
-      <p:sp>
-        <p:nvSpPr>
-          <p:cNvPr id="3" name="Text 1"/>
-          <p:cNvSpPr/>
-          <p:nvPr/>
-        </p:nvSpPr>
-        <p:spPr>
-          <a:xfrm>
-            <a:off x="457200" y="640080"/>
-            <a:ext cx="8229600" cy="731520"/>
-          </a:xfrm>
-          <a:prstGeom prst="rect">
-            <a:avLst/>
-          </a:prstGeom>
-          <a:noFill/>
-          <a:ln/>
-        </p:spPr>
-        <p:txBody>
-          <a:bodyPr wrap="square" rtlCol="0" anchor="ctr"/>
-          <a:lstStyle/>
-          <a:p>
-            <a:pPr marL="0" indent="0">
-              <a:buNone/>
-            </a:pPr>
-            <a:r>
-              <a:rPr lang="en-US" sz="3800" b="1" dirty="0">
-                <a:solidFill>
-                  <a:srgbClr val="FFFFFF"/>
-                </a:solidFill>
-                <a:latin typeface="Calibri" pitchFamily="34" charset="0"/>
-                <a:ea typeface="Calibri" pitchFamily="34" charset="-122"/>
-                <a:cs typeface="Calibri" pitchFamily="34" charset="-120"/>
-              </a:rPr>
-              <a:t>Know Your Numbers Instantly</a:t>
-            </a:r>
-            <a:endParaRPr lang="en-US" sz="3800" dirty="0"/>
-          </a:p>
-        </p:txBody>
-      </p:sp>
-      <p:sp>
-        <p:nvSpPr>
-          <p:cNvPr id="4" name="Shape 2"/>
-          <p:cNvSpPr/>
-          <p:nvPr/>
-        </p:nvSpPr>
-        <p:spPr>
-          <a:xfrm>
-            <a:off x="457200" y="1508760"/>
-            <a:ext cx="2606040" cy="1508760"/>
-          </a:xfrm>
-          <a:prstGeom prst="rect">
-            <a:avLst/>
-          </a:prstGeom>
-          <a:solidFill>
-            <a:srgbClr val="192535"/>
-          </a:solidFill>
-          <a:ln/>
-          <a:effectLst>
-            <a:outerShdw blurRad="152400" dist="38100" dir="8100000" algn="bl" rotWithShape="0">
-              <a:srgbClr val="000000">
-                <a:alpha val="25000"/>
-              </a:srgbClr>
-            </a:outerShdw>
-          </a:effectLst>
-        </p:spPr>
-        <p:txBody>
-          <a:bodyPr/>
-          <a:lstStyle/>
-          <a:p>
-            <a:endParaRPr/>
-          </a:p>
-        </p:txBody>
-      </p:sp>
-      <p:sp>
-        <p:nvSpPr>
-          <p:cNvPr id="5" name="Shape 3"/>
-          <p:cNvSpPr/>
-          <p:nvPr/>
-        </p:nvSpPr>
-        <p:spPr>
-          <a:xfrm>
-            <a:off x="457200" y="1508760"/>
-            <a:ext cx="2606040" cy="64008"/>
-          </a:xfrm>
-          <a:prstGeom prst="rect">
-            <a:avLst/>
-          </a:prstGeom>
-          <a:solidFill>
-            <a:srgbClr val="EF4444"/>
-          </a:solidFill>
-          <a:ln/>
-        </p:spPr>
-        <p:txBody>
-          <a:bodyPr/>
-          <a:lstStyle/>
-          <a:p>
-            <a:endParaRPr/>
-          </a:p>
-        </p:txBody>
-      </p:sp>
-      <p:sp>
-        <p:nvSpPr>
-          <p:cNvPr id="6" name="Text 4"/>
-          <p:cNvSpPr/>
-          <p:nvPr/>
-        </p:nvSpPr>
-        <p:spPr>
-          <a:xfrm>
-            <a:off x="457200" y="1664208"/>
-            <a:ext cx="2606040" cy="658368"/>
-          </a:xfrm>
-          <a:prstGeom prst="rect">
-            <a:avLst/>
-          </a:prstGeom>
-          <a:noFill/>
-          <a:ln/>
-        </p:spPr>
-        <p:txBody>
-          <a:bodyPr wrap="square" rtlCol="0" anchor="ctr"/>
-          <a:lstStyle/>
-          <a:p>
-            <a:pPr marL="0" indent="0" algn="ctr">
-              <a:buNone/>
-            </a:pPr>
-            <a:r>
-              <a:rPr lang="en-US" sz="3000" b="1" dirty="0">
-                <a:solidFill>
-                  <a:srgbClr val="EF4444"/>
-                </a:solidFill>
-                <a:latin typeface="Calibri" pitchFamily="34" charset="0"/>
-                <a:ea typeface="Calibri" pitchFamily="34" charset="-122"/>
-                <a:cs typeface="Calibri" pitchFamily="34" charset="-120"/>
-              </a:rPr>
-              <a:t>847 t</a:t>
-            </a:r>
-            <a:endParaRPr lang="en-US" sz="3000" dirty="0"/>
-          </a:p>
-        </p:txBody>
-      </p:sp>
-      <p:sp>
-        <p:nvSpPr>
-          <p:cNvPr id="7" name="Text 5"/>
-          <p:cNvSpPr/>
-          <p:nvPr/>
-        </p:nvSpPr>
-        <p:spPr>
-          <a:xfrm>
-            <a:off x="457200" y="2286000"/>
-            <a:ext cx="2606040" cy="320040"/>
-          </a:xfrm>
-          <a:prstGeom prst="rect">
-            <a:avLst/>
-          </a:prstGeom>
-          <a:noFill/>
-          <a:ln/>
-        </p:spPr>
-        <p:txBody>
-          <a:bodyPr wrap="square" rtlCol="0" anchor="ctr"/>
-          <a:lstStyle/>
-          <a:p>
-            <a:pPr marL="0" indent="0" algn="ctr">
-              <a:buNone/>
-            </a:pPr>
-            <a:r>
-              <a:rPr lang="en-US" sz="1100" dirty="0">
-                <a:solidFill>
-                  <a:srgbClr val="94A3B8"/>
-                </a:solidFill>
-                <a:latin typeface="Calibri" pitchFamily="34" charset="0"/>
-                <a:ea typeface="Calibri" pitchFamily="34" charset="-122"/>
-                <a:cs typeface="Calibri" pitchFamily="34" charset="-120"/>
-              </a:rPr>
-              <a:t>Total CO₂</a:t>
-            </a:r>
-            <a:endParaRPr lang="en-US" sz="1100" dirty="0"/>
-          </a:p>
-        </p:txBody>
-      </p:sp>
-      <p:sp>
-        <p:nvSpPr>
-          <p:cNvPr id="8" name="Text 6"/>
-          <p:cNvSpPr/>
-          <p:nvPr/>
-        </p:nvSpPr>
-        <p:spPr>
-          <a:xfrm>
-            <a:off x="457200" y="2578608"/>
-            <a:ext cx="2606040" cy="274320"/>
-          </a:xfrm>
-          <a:prstGeom prst="rect">
-            <a:avLst/>
-          </a:prstGeom>
-          <a:noFill/>
-          <a:ln/>
-        </p:spPr>
-        <p:txBody>
-          <a:bodyPr wrap="square" rtlCol="0" anchor="ctr"/>
-          <a:lstStyle/>
-          <a:p>
-            <a:pPr marL="0" indent="0" algn="ctr">
-              <a:buNone/>
-            </a:pPr>
-            <a:r>
-              <a:rPr lang="en-US" sz="1000" dirty="0">
-                <a:solidFill>
-                  <a:srgbClr val="E2E8F0"/>
-                </a:solidFill>
-                <a:latin typeface="Calibri" pitchFamily="34" charset="0"/>
-                <a:ea typeface="Calibri" pitchFamily="34" charset="-122"/>
-                <a:cs typeface="Calibri" pitchFamily="34" charset="-120"/>
-              </a:rPr>
-              <a:t>+12% vs budget</a:t>
-            </a:r>
-            <a:endParaRPr lang="en-US" sz="1000" dirty="0"/>
-          </a:p>
-        </p:txBody>
-      </p:sp>
-      <p:sp>
-        <p:nvSpPr>
-          <p:cNvPr id="9" name="Shape 7"/>
-          <p:cNvSpPr/>
-          <p:nvPr/>
-        </p:nvSpPr>
-        <p:spPr>
-          <a:xfrm>
-            <a:off x="3246120" y="1508760"/>
-            <a:ext cx="2606040" cy="1508760"/>
-          </a:xfrm>
-          <a:prstGeom prst="rect">
-            <a:avLst/>
-          </a:prstGeom>
-          <a:solidFill>
-            <a:srgbClr val="192535"/>
-          </a:solidFill>
-          <a:ln/>
-          <a:effectLst>
-            <a:outerShdw blurRad="152400" dist="38100" dir="8100000" algn="bl" rotWithShape="0">
-              <a:srgbClr val="000000">
-                <a:alpha val="25000"/>
-              </a:srgbClr>
-            </a:outerShdw>
-          </a:effectLst>
-        </p:spPr>
-        <p:txBody>
-          <a:bodyPr/>
-          <a:lstStyle/>
-          <a:p>
-            <a:endParaRPr/>
-          </a:p>
-        </p:txBody>
-      </p:sp>
-      <p:sp>
-        <p:nvSpPr>
-          <p:cNvPr id="10" name="Shape 8"/>
-          <p:cNvSpPr/>
-          <p:nvPr/>
-        </p:nvSpPr>
-        <p:spPr>
-          <a:xfrm>
-            <a:off x="3246120" y="1508760"/>
-            <a:ext cx="2606040" cy="64008"/>
-          </a:xfrm>
-          <a:prstGeom prst="rect">
-            <a:avLst/>
-          </a:prstGeom>
-          <a:solidFill>
-            <a:srgbClr val="EF4444"/>
-          </a:solidFill>
-          <a:ln/>
-        </p:spPr>
-        <p:txBody>
-          <a:bodyPr/>
-          <a:lstStyle/>
-          <a:p>
-            <a:endParaRPr/>
-          </a:p>
-        </p:txBody>
-      </p:sp>
-      <p:sp>
-        <p:nvSpPr>
-          <p:cNvPr id="11" name="Text 9"/>
-          <p:cNvSpPr/>
-          <p:nvPr/>
-        </p:nvSpPr>
-        <p:spPr>
-          <a:xfrm>
-            <a:off x="3246120" y="1664208"/>
-            <a:ext cx="2606040" cy="658368"/>
-          </a:xfrm>
-          <a:prstGeom prst="rect">
-            <a:avLst/>
-          </a:prstGeom>
-          <a:noFill/>
-          <a:ln/>
-        </p:spPr>
-        <p:txBody>
-          <a:bodyPr wrap="square" rtlCol="0" anchor="ctr"/>
-          <a:lstStyle/>
-          <a:p>
-            <a:pPr marL="0" indent="0" algn="ctr">
-              <a:buNone/>
-            </a:pPr>
-            <a:r>
-              <a:rPr lang="en-US" sz="3000" b="1" dirty="0">
-                <a:solidFill>
-                  <a:srgbClr val="EF4444"/>
-                </a:solidFill>
-                <a:latin typeface="Calibri" pitchFamily="34" charset="0"/>
-                <a:ea typeface="Calibri" pitchFamily="34" charset="-122"/>
-                <a:cs typeface="Calibri" pitchFamily="34" charset="-120"/>
-              </a:rPr>
-              <a:t>112%</a:t>
-            </a:r>
-            <a:endParaRPr lang="en-US" sz="3000" dirty="0"/>
-          </a:p>
-        </p:txBody>
-      </p:sp>
-      <p:sp>
-        <p:nvSpPr>
-          <p:cNvPr id="12" name="Text 10"/>
-          <p:cNvSpPr/>
-          <p:nvPr/>
-        </p:nvSpPr>
-        <p:spPr>
-          <a:xfrm>
-            <a:off x="3246120" y="2286000"/>
-            <a:ext cx="2606040" cy="320040"/>
-          </a:xfrm>
-          <a:prstGeom prst="rect">
-            <a:avLst/>
-          </a:prstGeom>
-          <a:noFill/>
-          <a:ln/>
-        </p:spPr>
-        <p:txBody>
-          <a:bodyPr wrap="square" rtlCol="0" anchor="ctr"/>
-          <a:lstStyle/>
-          <a:p>
-            <a:pPr marL="0" indent="0" algn="ctr">
-              <a:buNone/>
-            </a:pPr>
-            <a:r>
-              <a:rPr lang="en-US" sz="1100" dirty="0">
-                <a:solidFill>
-                  <a:srgbClr val="94A3B8"/>
-                </a:solidFill>
-                <a:latin typeface="Calibri" pitchFamily="34" charset="0"/>
-                <a:ea typeface="Calibri" pitchFamily="34" charset="-122"/>
-                <a:cs typeface="Calibri" pitchFamily="34" charset="-120"/>
-              </a:rPr>
-              <a:t>Budget Used</a:t>
-            </a:r>
-            <a:endParaRPr lang="en-US" sz="1100" dirty="0"/>
-          </a:p>
-        </p:txBody>
-      </p:sp>
-      <p:sp>
-        <p:nvSpPr>
-          <p:cNvPr id="13" name="Text 11"/>
-          <p:cNvSpPr/>
-          <p:nvPr/>
-        </p:nvSpPr>
-        <p:spPr>
-          <a:xfrm>
-            <a:off x="3246120" y="2578608"/>
-            <a:ext cx="2606040" cy="274320"/>
-          </a:xfrm>
-          <a:prstGeom prst="rect">
-            <a:avLst/>
-          </a:prstGeom>
-          <a:noFill/>
-          <a:ln/>
-        </p:spPr>
-        <p:txBody>
-          <a:bodyPr wrap="square" rtlCol="0" anchor="ctr"/>
-          <a:lstStyle/>
-          <a:p>
-            <a:pPr marL="0" indent="0" algn="ctr">
-              <a:buNone/>
-            </a:pPr>
-            <a:r>
-              <a:rPr lang="en-US" sz="1000" dirty="0">
-                <a:solidFill>
-                  <a:srgbClr val="E2E8F0"/>
-                </a:solidFill>
-                <a:latin typeface="Calibri" pitchFamily="34" charset="0"/>
-                <a:ea typeface="Calibri" pitchFamily="34" charset="-122"/>
-                <a:cs typeface="Calibri" pitchFamily="34" charset="-120"/>
-              </a:rPr>
-              <a:t>Combined BUs</a:t>
-            </a:r>
-            <a:endParaRPr lang="en-US" sz="1000" dirty="0"/>
-          </a:p>
-        </p:txBody>
-      </p:sp>
-      <p:sp>
-        <p:nvSpPr>
-          <p:cNvPr id="14" name="Shape 12"/>
-          <p:cNvSpPr/>
-          <p:nvPr/>
-        </p:nvSpPr>
-        <p:spPr>
-          <a:xfrm>
-            <a:off x="6035040" y="1508760"/>
-            <a:ext cx="2606040" cy="1508760"/>
-          </a:xfrm>
-          <a:prstGeom prst="rect">
-            <a:avLst/>
-          </a:prstGeom>
-          <a:solidFill>
-            <a:srgbClr val="192535"/>
-          </a:solidFill>
-          <a:ln/>
-          <a:effectLst>
-            <a:outerShdw blurRad="152400" dist="38100" dir="8100000" algn="bl" rotWithShape="0">
-              <a:srgbClr val="000000">
-                <a:alpha val="25000"/>
-              </a:srgbClr>
-            </a:outerShdw>
-          </a:effectLst>
-        </p:spPr>
-        <p:txBody>
-          <a:bodyPr/>
-          <a:lstStyle/>
-          <a:p>
-            <a:endParaRPr/>
-          </a:p>
-        </p:txBody>
-      </p:sp>
-      <p:sp>
-        <p:nvSpPr>
-          <p:cNvPr id="15" name="Shape 13"/>
-          <p:cNvSpPr/>
-          <p:nvPr/>
-        </p:nvSpPr>
-        <p:spPr>
-          <a:xfrm>
-            <a:off x="6035040" y="1508760"/>
-            <a:ext cx="2606040" cy="64008"/>
-          </a:xfrm>
-          <a:prstGeom prst="rect">
-            <a:avLst/>
-          </a:prstGeom>
-          <a:solidFill>
-            <a:srgbClr val="10B981"/>
-          </a:solidFill>
-          <a:ln/>
-        </p:spPr>
-        <p:txBody>
-          <a:bodyPr/>
-          <a:lstStyle/>
-          <a:p>
-            <a:endParaRPr/>
-          </a:p>
-        </p:txBody>
-      </p:sp>
-      <p:sp>
-        <p:nvSpPr>
-          <p:cNvPr id="16" name="Text 14"/>
-          <p:cNvSpPr/>
-          <p:nvPr/>
-        </p:nvSpPr>
-        <p:spPr>
-          <a:xfrm>
-            <a:off x="6035040" y="1664208"/>
-            <a:ext cx="2606040" cy="658368"/>
-          </a:xfrm>
-          <a:prstGeom prst="rect">
-            <a:avLst/>
-          </a:prstGeom>
-          <a:noFill/>
-          <a:ln/>
-        </p:spPr>
-        <p:txBody>
-          <a:bodyPr wrap="square" rtlCol="0" anchor="ctr"/>
-          <a:lstStyle/>
-          <a:p>
-            <a:pPr marL="0" indent="0" algn="ctr">
-              <a:buNone/>
-            </a:pPr>
-            <a:r>
-              <a:rPr lang="en-US" sz="3000" b="1" dirty="0">
-                <a:solidFill>
-                  <a:srgbClr val="10B981"/>
-                </a:solidFill>
-                <a:latin typeface="Calibri" pitchFamily="34" charset="0"/>
-                <a:ea typeface="Calibri" pitchFamily="34" charset="-122"/>
-                <a:cs typeface="Calibri" pitchFamily="34" charset="-120"/>
-              </a:rPr>
-              <a:t>−143 t</a:t>
-            </a:r>
-            <a:endParaRPr lang="en-US" sz="3000" dirty="0"/>
-          </a:p>
-        </p:txBody>
-      </p:sp>
-      <p:sp>
-        <p:nvSpPr>
-          <p:cNvPr id="17" name="Text 15"/>
-          <p:cNvSpPr/>
-          <p:nvPr/>
-        </p:nvSpPr>
-        <p:spPr>
-          <a:xfrm>
-            <a:off x="6035040" y="2286000"/>
-            <a:ext cx="2606040" cy="320040"/>
-          </a:xfrm>
-          <a:prstGeom prst="rect">
-            <a:avLst/>
-          </a:prstGeom>
-          <a:noFill/>
-          <a:ln/>
-        </p:spPr>
-        <p:txBody>
-          <a:bodyPr wrap="square" rtlCol="0" anchor="ctr"/>
-          <a:lstStyle/>
-          <a:p>
-            <a:pPr marL="0" indent="0" algn="ctr">
-              <a:buNone/>
-            </a:pPr>
-            <a:r>
-              <a:rPr lang="en-US" sz="1100" dirty="0">
-                <a:solidFill>
-                  <a:srgbClr val="94A3B8"/>
-                </a:solidFill>
-                <a:latin typeface="Calibri" pitchFamily="34" charset="0"/>
-                <a:ea typeface="Calibri" pitchFamily="34" charset="-122"/>
-                <a:cs typeface="Calibri" pitchFamily="34" charset="-120"/>
-              </a:rPr>
-              <a:t>Saving Potential</a:t>
-            </a:r>
-            <a:endParaRPr lang="en-US" sz="1100" dirty="0"/>
-          </a:p>
-        </p:txBody>
-      </p:sp>
-      <p:sp>
-        <p:nvSpPr>
-          <p:cNvPr id="18" name="Text 16"/>
-          <p:cNvSpPr/>
-          <p:nvPr/>
-        </p:nvSpPr>
-        <p:spPr>
-          <a:xfrm>
-            <a:off x="6035040" y="2578608"/>
-            <a:ext cx="2606040" cy="274320"/>
-          </a:xfrm>
-          <a:prstGeom prst="rect">
-            <a:avLst/>
-          </a:prstGeom>
-          <a:noFill/>
-          <a:ln/>
-        </p:spPr>
-        <p:txBody>
-          <a:bodyPr wrap="square" rtlCol="0" anchor="ctr"/>
-          <a:lstStyle/>
-          <a:p>
-            <a:pPr marL="0" indent="0" algn="ctr">
-              <a:buNone/>
-            </a:pPr>
-            <a:r>
-              <a:rPr lang="en-US" sz="1000" dirty="0">
-                <a:solidFill>
-                  <a:srgbClr val="E2E8F0"/>
-                </a:solidFill>
-                <a:latin typeface="Calibri" pitchFamily="34" charset="0"/>
-                <a:ea typeface="Calibri" pitchFamily="34" charset="-122"/>
-                <a:cs typeface="Calibri" pitchFamily="34" charset="-120"/>
-              </a:rPr>
-              <a:t>via mode shift</a:t>
-            </a:r>
-            <a:endParaRPr lang="en-US" sz="1000" dirty="0"/>
-          </a:p>
-        </p:txBody>
-      </p:sp>
-      <p:sp>
-        <p:nvSpPr>
-          <p:cNvPr id="19" name="Shape 17"/>
-          <p:cNvSpPr/>
-          <p:nvPr/>
-        </p:nvSpPr>
-        <p:spPr>
-          <a:xfrm>
-            <a:off x="8823960" y="1508760"/>
-            <a:ext cx="2606040" cy="1508760"/>
-          </a:xfrm>
-          <a:prstGeom prst="rect">
-            <a:avLst/>
-          </a:prstGeom>
-          <a:solidFill>
-            <a:srgbClr val="192535"/>
-          </a:solidFill>
-          <a:ln/>
-          <a:effectLst>
-            <a:outerShdw blurRad="152400" dist="38100" dir="8100000" algn="bl" rotWithShape="0">
-              <a:srgbClr val="000000">
-                <a:alpha val="25000"/>
-              </a:srgbClr>
-            </a:outerShdw>
-          </a:effectLst>
-        </p:spPr>
-        <p:txBody>
-          <a:bodyPr/>
-          <a:lstStyle/>
-          <a:p>
-            <a:endParaRPr/>
-          </a:p>
-        </p:txBody>
-      </p:sp>
-      <p:sp>
-        <p:nvSpPr>
-          <p:cNvPr id="20" name="Shape 18"/>
-          <p:cNvSpPr/>
-          <p:nvPr/>
-        </p:nvSpPr>
-        <p:spPr>
-          <a:xfrm>
-            <a:off x="8823960" y="1508760"/>
-            <a:ext cx="2606040" cy="64008"/>
-          </a:xfrm>
-          <a:prstGeom prst="rect">
-            <a:avLst/>
-          </a:prstGeom>
-          <a:solidFill>
-            <a:srgbClr val="0D9488"/>
-          </a:solidFill>
-          <a:ln/>
-        </p:spPr>
-        <p:txBody>
-          <a:bodyPr/>
-          <a:lstStyle/>
-          <a:p>
-            <a:endParaRPr/>
-          </a:p>
-        </p:txBody>
-      </p:sp>
-      <p:sp>
-        <p:nvSpPr>
-          <p:cNvPr id="21" name="Text 19"/>
-          <p:cNvSpPr/>
-          <p:nvPr/>
-        </p:nvSpPr>
-        <p:spPr>
-          <a:xfrm>
-            <a:off x="8823960" y="1664208"/>
-            <a:ext cx="2606040" cy="658368"/>
-          </a:xfrm>
-          <a:prstGeom prst="rect">
-            <a:avLst/>
-          </a:prstGeom>
-          <a:noFill/>
-          <a:ln/>
-        </p:spPr>
-        <p:txBody>
-          <a:bodyPr wrap="square" rtlCol="0" anchor="ctr"/>
-          <a:lstStyle/>
-          <a:p>
-            <a:pPr marL="0" indent="0" algn="ctr">
-              <a:buNone/>
-            </a:pPr>
-            <a:r>
-              <a:rPr lang="en-US" sz="3000" b="1" dirty="0">
-                <a:solidFill>
-                  <a:srgbClr val="0D9488"/>
-                </a:solidFill>
-                <a:latin typeface="Calibri" pitchFamily="34" charset="0"/>
-                <a:ea typeface="Calibri" pitchFamily="34" charset="-122"/>
-                <a:cs typeface="Calibri" pitchFamily="34" charset="-120"/>
-              </a:rPr>
-              <a:t>1,118</a:t>
-            </a:r>
-            <a:endParaRPr lang="en-US" sz="3000" dirty="0"/>
-          </a:p>
-        </p:txBody>
-      </p:sp>
-      <p:sp>
-        <p:nvSpPr>
-          <p:cNvPr id="22" name="Text 20"/>
-          <p:cNvSpPr/>
-          <p:nvPr/>
-        </p:nvSpPr>
-        <p:spPr>
-          <a:xfrm>
-            <a:off x="8823960" y="2286000"/>
-            <a:ext cx="2606040" cy="320040"/>
-          </a:xfrm>
-          <a:prstGeom prst="rect">
-            <a:avLst/>
-          </a:prstGeom>
-          <a:noFill/>
-          <a:ln/>
-        </p:spPr>
-        <p:txBody>
-          <a:bodyPr wrap="square" rtlCol="0" anchor="ctr"/>
-          <a:lstStyle/>
-          <a:p>
-            <a:pPr marL="0" indent="0" algn="ctr">
-              <a:buNone/>
-            </a:pPr>
-            <a:r>
-              <a:rPr lang="en-US" sz="1100" dirty="0">
-                <a:solidFill>
-                  <a:srgbClr val="94A3B8"/>
-                </a:solidFill>
-                <a:latin typeface="Calibri" pitchFamily="34" charset="0"/>
-                <a:ea typeface="Calibri" pitchFamily="34" charset="-122"/>
-                <a:cs typeface="Calibri" pitchFamily="34" charset="-120"/>
-              </a:rPr>
-              <a:t>Trips Analysed</a:t>
-            </a:r>
-            <a:endParaRPr lang="en-US" sz="1100" dirty="0"/>
-          </a:p>
-        </p:txBody>
-      </p:sp>
-      <p:sp>
-        <p:nvSpPr>
-          <p:cNvPr id="23" name="Text 21"/>
-          <p:cNvSpPr/>
-          <p:nvPr/>
-        </p:nvSpPr>
-        <p:spPr>
-          <a:xfrm>
-            <a:off x="8823960" y="2578608"/>
-            <a:ext cx="2606040" cy="274320"/>
-          </a:xfrm>
-          <a:prstGeom prst="rect">
-            <a:avLst/>
-          </a:prstGeom>
-          <a:noFill/>
-          <a:ln/>
-        </p:spPr>
-        <p:txBody>
-          <a:bodyPr wrap="square" rtlCol="0" anchor="ctr"/>
-          <a:lstStyle/>
-          <a:p>
-            <a:pPr marL="0" indent="0" algn="ctr">
-              <a:buNone/>
-            </a:pPr>
-            <a:r>
-              <a:rPr lang="en-US" sz="1000" dirty="0">
-                <a:solidFill>
-                  <a:srgbClr val="E2E8F0"/>
-                </a:solidFill>
-                <a:latin typeface="Calibri" pitchFamily="34" charset="0"/>
-                <a:ea typeface="Calibri" pitchFamily="34" charset="-122"/>
-                <a:cs typeface="Calibri" pitchFamily="34" charset="-120"/>
-              </a:rPr>
-              <a:t>avg 758 kg/trip</a:t>
-            </a:r>
-            <a:endParaRPr lang="en-US" sz="1000" dirty="0"/>
-          </a:p>
-        </p:txBody>
-      </p:sp>
-      <p:sp>
-        <p:nvSpPr>
-          <p:cNvPr id="100" name="GaugeBg_BU1"/>
-          <p:cNvSpPr/>
-          <p:nvPr/>
-        </p:nvSpPr>
-        <p:spPr>
-          <a:xfrm>
-            <a:off x="882396" y="3276120"/>
-            <a:ext cx="1984247" cy="1984247"/>
-          </a:xfrm>
-          <a:prstGeom prst="arc">
-            <a:avLst>
-              <a:gd name="adj1" fmla="val 10800000"/>
-              <a:gd name="adj2" fmla="val 21600000"/>
-            </a:avLst>
-          </a:prstGeom>
-          <a:solidFill>
-            <a:srgbClr val="2A3A4A"/>
-          </a:solidFill>
-          <a:ln w="180000">
-            <a:solidFill>
-              <a:srgbClr val="2A3A4A"/>
-            </a:solidFill>
-          </a:ln>
-        </p:spPr>
-        <p:txBody>
-          <a:bodyPr/>
-          <a:lstStyle/>
-          <a:p>
-            <a:endParaRPr/>
-          </a:p>
-        </p:txBody>
-      </p:sp>
-      <p:sp>
-        <p:nvSpPr>
-          <p:cNvPr id="101" name="GaugeFg_BU1"/>
-          <p:cNvSpPr/>
-          <p:nvPr/>
-        </p:nvSpPr>
-        <p:spPr>
-          <a:xfrm>
-            <a:off x="882396" y="3276120"/>
-            <a:ext cx="1984247" cy="1984247"/>
-          </a:xfrm>
-          <a:prstGeom prst="arc">
-            <a:avLst>
-              <a:gd name="adj1" fmla="val 10800000"/>
-              <a:gd name="adj2" fmla="val 21600000"/>
-            </a:avLst>
-          </a:prstGeom>
-          <a:solidFill>
-            <a:srgbClr val="EF4444"/>
-          </a:solidFill>
-          <a:ln w="180000">
-            <a:solidFill>
-              <a:srgbClr val="EF4444"/>
-            </a:solidFill>
-          </a:ln>
-        </p:spPr>
-        <p:txBody>
-          <a:bodyPr/>
-          <a:lstStyle/>
-          <a:p>
-            <a:endParaRPr/>
-          </a:p>
-        </p:txBody>
-      </p:sp>
-      <p:sp>
-        <p:nvSpPr>
-          <p:cNvPr id="102" name="GaugeHole_BU1"/>
-          <p:cNvSpPr/>
-          <p:nvPr/>
-        </p:nvSpPr>
-        <p:spPr>
-          <a:xfrm>
-            <a:off x="1299088" y="3692812"/>
-            <a:ext cx="1150863" cy="1150863"/>
-          </a:xfrm>
-          <a:prstGeom prst="ellipse">
-            <a:avLst/>
-          </a:prstGeom>
-          <a:solidFill>
-            <a:srgbClr val="0F1923"/>
-          </a:solidFill>
-          <a:ln w="0">
-            <a:noFill/>
-          </a:ln>
-        </p:spPr>
-        <p:txBody>
-          <a:bodyPr/>
-          <a:lstStyle/>
-          <a:p>
-            <a:endParaRPr/>
-          </a:p>
-        </p:txBody>
-      </p:sp>
-      <p:sp>
-        <p:nvSpPr>
-          <p:cNvPr id="103" name="GaugeLabel_BU1"/>
-          <p:cNvSpPr/>
-          <p:nvPr/>
-        </p:nvSpPr>
-        <p:spPr>
-          <a:xfrm>
-            <a:off x="457200" y="3772181"/>
-            <a:ext cx="2834640" cy="436534"/>
-          </a:xfrm>
-          <a:prstGeom prst="rect">
-            <a:avLst/>
-          </a:prstGeom>
-          <a:noFill/>
-          <a:ln/>
-        </p:spPr>
-        <p:txBody>
-          <a:bodyPr wrap="square" rtlCol="0" anchor="ctr"/>
-          <a:lstStyle/>
-          <a:p>
-            <a:pPr marL="0" indent="0" algn="ctr">
-              <a:buNone/>
-            </a:pPr>
-            <a:r>
-              <a:rPr lang="en-US" sz="2200" b="1" dirty="0">
-                <a:solidFill>
-                  <a:srgbClr val="EF4444"/>
-                </a:solidFill>
-                <a:latin typeface="Calibri" pitchFamily="34" charset="0"/>
-              </a:rPr>
-              <a:t>106%</a:t>
-            </a:r>
-          </a:p>
-        </p:txBody>
-      </p:sp>
-      <p:sp>
-        <p:nvSpPr>
-          <p:cNvPr id="104" name="GaugeName_BU1"/>
-          <p:cNvSpPr/>
-          <p:nvPr/>
-        </p:nvSpPr>
-        <p:spPr>
-          <a:xfrm>
-            <a:off x="457200" y="4208716"/>
-            <a:ext cx="2834640" cy="357164"/>
-          </a:xfrm>
-          <a:prstGeom prst="rect">
-            <a:avLst/>
-          </a:prstGeom>
-          <a:noFill/>
-          <a:ln/>
-        </p:spPr>
-        <p:txBody>
-          <a:bodyPr wrap="square" rtlCol="0" anchor="ctr"/>
-          <a:lstStyle/>
-          <a:p>
-            <a:pPr marL="0" indent="0" algn="ctr">
-              <a:buNone/>
-            </a:pPr>
-            <a:r>
-              <a:rPr lang="en-US" sz="1300" b="1" dirty="0">
-                <a:solidFill>
-                  <a:srgbClr val="2563EB"/>
-                </a:solidFill>
-                <a:latin typeface="Calibri" pitchFamily="34" charset="0"/>
-              </a:rPr>
-              <a:t>BU1</a:t>
-            </a:r>
-            <a:r>
-              <a:rPr lang="en-US" sz="1100" dirty="0">
-                <a:solidFill>
-                  <a:srgbClr val="94A3B8"/>
-                </a:solidFill>
-                <a:latin typeface="Calibri" pitchFamily="34" charset="0"/>
-              </a:rPr>
-              <a:t>  190 t / 180 t</a:t>
-            </a:r>
-          </a:p>
-        </p:txBody>
-      </p:sp>
-      <p:sp>
-        <p:nvSpPr>
-          <p:cNvPr id="105" name="GaugeStatus_BU1"/>
-          <p:cNvSpPr/>
-          <p:nvPr/>
-        </p:nvSpPr>
-        <p:spPr>
-          <a:xfrm>
-            <a:off x="465704" y="4466667"/>
-            <a:ext cx="2834640" cy="317479"/>
-          </a:xfrm>
-          <a:prstGeom prst="rect">
-            <a:avLst/>
-          </a:prstGeom>
-          <a:noFill/>
-          <a:ln/>
-        </p:spPr>
-        <p:txBody>
-          <a:bodyPr wrap="square" rtlCol="0" anchor="ctr"/>
-          <a:lstStyle/>
-          <a:p>
-            <a:pPr marL="0" indent="0" algn="ctr">
-              <a:buNone/>
-            </a:pPr>
-            <a:r>
-              <a:rPr lang="en-US" sz="1100" b="1" dirty="0">
-                <a:solidFill>
-                  <a:srgbClr val="EF4444"/>
-                </a:solidFill>
-                <a:latin typeface="Calibri" pitchFamily="34" charset="0"/>
-              </a:rPr>
-              <a:t>▲ 10 t over</a:t>
-            </a:r>
-          </a:p>
-        </p:txBody>
-      </p:sp>
-      <p:sp>
-        <p:nvSpPr>
-          <p:cNvPr id="106" name="GaugeBg_BU2"/>
-          <p:cNvSpPr/>
-          <p:nvPr/>
-        </p:nvSpPr>
-        <p:spPr>
-          <a:xfrm>
-            <a:off x="3717036" y="3276120"/>
-            <a:ext cx="1984247" cy="1984247"/>
-          </a:xfrm>
-          <a:prstGeom prst="arc">
-            <a:avLst>
-              <a:gd name="adj1" fmla="val 10800000"/>
-              <a:gd name="adj2" fmla="val 21600000"/>
-            </a:avLst>
-          </a:prstGeom>
-          <a:solidFill>
-            <a:srgbClr val="2A3A4A"/>
-          </a:solidFill>
-          <a:ln w="180000">
-            <a:solidFill>
-              <a:srgbClr val="2A3A4A"/>
-            </a:solidFill>
-          </a:ln>
-        </p:spPr>
-        <p:txBody>
-          <a:bodyPr/>
-          <a:lstStyle/>
-          <a:p>
-            <a:endParaRPr/>
-          </a:p>
-        </p:txBody>
-      </p:sp>
-      <p:sp>
-        <p:nvSpPr>
-          <p:cNvPr id="107" name="GaugeFg_BU2"/>
-          <p:cNvSpPr/>
-          <p:nvPr/>
-        </p:nvSpPr>
-        <p:spPr>
-          <a:xfrm>
-            <a:off x="3717036" y="3276120"/>
-            <a:ext cx="1984247" cy="1984247"/>
-          </a:xfrm>
-          <a:prstGeom prst="arc">
-            <a:avLst>
-              <a:gd name="adj1" fmla="val 10800000"/>
-              <a:gd name="adj2" fmla="val 18900000"/>
-            </a:avLst>
-          </a:prstGeom>
-          <a:solidFill>
-            <a:srgbClr val="10B981"/>
-          </a:solidFill>
-          <a:ln w="180000">
-            <a:solidFill>
-              <a:srgbClr val="10B981"/>
-            </a:solidFill>
-          </a:ln>
-        </p:spPr>
-        <p:txBody>
-          <a:bodyPr/>
-          <a:lstStyle/>
-          <a:p>
-            <a:endParaRPr/>
-          </a:p>
-        </p:txBody>
-      </p:sp>
-      <p:sp>
-        <p:nvSpPr>
-          <p:cNvPr id="108" name="GaugeHole_BU2"/>
-          <p:cNvSpPr/>
-          <p:nvPr/>
-        </p:nvSpPr>
-        <p:spPr>
-          <a:xfrm>
-            <a:off x="4133728" y="3692812"/>
-            <a:ext cx="1150863" cy="1150863"/>
-          </a:xfrm>
-          <a:prstGeom prst="ellipse">
-            <a:avLst/>
-          </a:prstGeom>
-          <a:solidFill>
-            <a:srgbClr val="0F1923"/>
-          </a:solidFill>
-          <a:ln w="0">
-            <a:noFill/>
-          </a:ln>
-        </p:spPr>
-        <p:txBody>
-          <a:bodyPr/>
-          <a:lstStyle/>
-          <a:p>
-            <a:endParaRPr/>
-          </a:p>
-        </p:txBody>
-      </p:sp>
-      <p:sp>
-        <p:nvSpPr>
-          <p:cNvPr id="109" name="GaugeLabel_BU2"/>
-          <p:cNvSpPr/>
-          <p:nvPr/>
-        </p:nvSpPr>
-        <p:spPr>
-          <a:xfrm>
-            <a:off x="3291840" y="3772181"/>
-            <a:ext cx="2834640" cy="436534"/>
-          </a:xfrm>
-          <a:prstGeom prst="rect">
-            <a:avLst/>
-          </a:prstGeom>
-          <a:noFill/>
-          <a:ln/>
-        </p:spPr>
-        <p:txBody>
-          <a:bodyPr wrap="square" rtlCol="0" anchor="ctr"/>
-          <a:lstStyle/>
-          <a:p>
-            <a:pPr marL="0" indent="0" algn="ctr">
-              <a:buNone/>
-            </a:pPr>
-            <a:r>
-              <a:rPr lang="en-US" sz="2200" b="1" dirty="0">
-                <a:solidFill>
-                  <a:srgbClr val="10B981"/>
-                </a:solidFill>
-                <a:latin typeface="Calibri" pitchFamily="34" charset="0"/>
-              </a:rPr>
-              <a:t>75%</a:t>
-            </a:r>
-          </a:p>
-        </p:txBody>
-      </p:sp>
-      <p:sp>
-        <p:nvSpPr>
-          <p:cNvPr id="110" name="GaugeName_BU2"/>
-          <p:cNvSpPr/>
-          <p:nvPr/>
-        </p:nvSpPr>
-        <p:spPr>
-          <a:xfrm>
-            <a:off x="3291840" y="4208716"/>
-            <a:ext cx="2834640" cy="357164"/>
-          </a:xfrm>
-          <a:prstGeom prst="rect">
-            <a:avLst/>
-          </a:prstGeom>
-          <a:noFill/>
-          <a:ln/>
-        </p:spPr>
-        <p:txBody>
-          <a:bodyPr wrap="square" rtlCol="0" anchor="ctr"/>
-          <a:lstStyle/>
-          <a:p>
-            <a:pPr marL="0" indent="0" algn="ctr">
-              <a:buNone/>
-            </a:pPr>
-            <a:r>
-              <a:rPr lang="en-US" sz="1300" b="1" dirty="0">
-                <a:solidFill>
-                  <a:srgbClr val="7C3AED"/>
-                </a:solidFill>
-                <a:latin typeface="Calibri" pitchFamily="34" charset="0"/>
-              </a:rPr>
-              <a:t>BU2</a:t>
-            </a:r>
-            <a:r>
-              <a:rPr lang="en-US" sz="1100" dirty="0">
-                <a:solidFill>
-                  <a:srgbClr val="94A3B8"/>
-                </a:solidFill>
-                <a:latin typeface="Calibri" pitchFamily="34" charset="0"/>
-              </a:rPr>
-              <a:t>  150 t / 200 t</a:t>
-            </a:r>
-          </a:p>
-        </p:txBody>
-      </p:sp>
-      <p:sp>
-        <p:nvSpPr>
-          <p:cNvPr id="111" name="GaugeStatus_BU2"/>
-          <p:cNvSpPr/>
-          <p:nvPr/>
-        </p:nvSpPr>
-        <p:spPr>
-          <a:xfrm>
-            <a:off x="3332988" y="4499312"/>
-            <a:ext cx="2834640" cy="317479"/>
-          </a:xfrm>
-          <a:prstGeom prst="rect">
-            <a:avLst/>
-          </a:prstGeom>
-          <a:noFill/>
-          <a:ln/>
-        </p:spPr>
-        <p:txBody>
-          <a:bodyPr wrap="square" rtlCol="0" anchor="ctr"/>
-          <a:lstStyle/>
-          <a:p>
-            <a:pPr marL="0" indent="0" algn="ctr">
-              <a:buNone/>
-            </a:pPr>
-            <a:r>
-              <a:rPr lang="en-US" sz="1100" b="1" dirty="0">
-                <a:solidFill>
-                  <a:srgbClr val="10B981"/>
-                </a:solidFill>
-                <a:latin typeface="Calibri" pitchFamily="34" charset="0"/>
-              </a:rPr>
-              <a:t>✓ 50 t left</a:t>
-            </a:r>
-          </a:p>
-        </p:txBody>
-      </p:sp>
-      <p:sp>
-        <p:nvSpPr>
-          <p:cNvPr id="112" name="GaugeBg_BU3"/>
-          <p:cNvSpPr/>
-          <p:nvPr/>
-        </p:nvSpPr>
-        <p:spPr>
-          <a:xfrm>
-            <a:off x="882396" y="4876320"/>
-            <a:ext cx="1984247" cy="1984247"/>
-          </a:xfrm>
-          <a:prstGeom prst="arc">
-            <a:avLst>
-              <a:gd name="adj1" fmla="val 10800000"/>
-              <a:gd name="adj2" fmla="val 21600000"/>
-            </a:avLst>
-          </a:prstGeom>
-          <a:solidFill>
-            <a:srgbClr val="2A3A4A"/>
-          </a:solidFill>
-          <a:ln w="180000">
-            <a:solidFill>
-              <a:srgbClr val="2A3A4A"/>
-            </a:solidFill>
-          </a:ln>
-        </p:spPr>
-        <p:txBody>
-          <a:bodyPr/>
-          <a:lstStyle/>
-          <a:p>
-            <a:endParaRPr/>
-          </a:p>
-        </p:txBody>
-      </p:sp>
-      <p:sp>
-        <p:nvSpPr>
-          <p:cNvPr id="113" name="GaugeFg_BU3"/>
-          <p:cNvSpPr/>
-          <p:nvPr/>
-        </p:nvSpPr>
-        <p:spPr>
-          <a:xfrm>
-            <a:off x="882396" y="4876320"/>
-            <a:ext cx="1984247" cy="1984247"/>
-          </a:xfrm>
-          <a:prstGeom prst="arc">
-            <a:avLst>
-              <a:gd name="adj1" fmla="val 10800000"/>
-              <a:gd name="adj2" fmla="val 21600000"/>
-            </a:avLst>
-          </a:prstGeom>
-          <a:solidFill>
-            <a:srgbClr val="EF4444"/>
-          </a:solidFill>
-          <a:ln w="180000">
-            <a:solidFill>
-              <a:srgbClr val="EF4444"/>
-            </a:solidFill>
-          </a:ln>
-        </p:spPr>
-        <p:txBody>
-          <a:bodyPr/>
-          <a:lstStyle/>
-          <a:p>
-            <a:endParaRPr/>
-          </a:p>
-        </p:txBody>
-      </p:sp>
-      <p:sp>
-        <p:nvSpPr>
-          <p:cNvPr id="114" name="GaugeHole_BU3"/>
-          <p:cNvSpPr/>
-          <p:nvPr/>
-        </p:nvSpPr>
-        <p:spPr>
-          <a:xfrm>
-            <a:off x="1299088" y="5293012"/>
-            <a:ext cx="1150863" cy="1150863"/>
-          </a:xfrm>
-          <a:prstGeom prst="ellipse">
-            <a:avLst/>
-          </a:prstGeom>
-          <a:solidFill>
-            <a:srgbClr val="0F1923"/>
-          </a:solidFill>
-          <a:ln w="0">
-            <a:noFill/>
-          </a:ln>
-        </p:spPr>
-        <p:txBody>
-          <a:bodyPr/>
-          <a:lstStyle/>
-          <a:p>
-            <a:endParaRPr/>
-          </a:p>
-        </p:txBody>
-      </p:sp>
-      <p:sp>
-        <p:nvSpPr>
-          <p:cNvPr id="115" name="GaugeLabel_BU3"/>
-          <p:cNvSpPr/>
-          <p:nvPr/>
-        </p:nvSpPr>
-        <p:spPr>
-          <a:xfrm>
-            <a:off x="457200" y="5372381"/>
-            <a:ext cx="2834640" cy="436534"/>
-          </a:xfrm>
-          <a:prstGeom prst="rect">
-            <a:avLst/>
-          </a:prstGeom>
-          <a:noFill/>
-          <a:ln/>
-        </p:spPr>
-        <p:txBody>
-          <a:bodyPr wrap="square" rtlCol="0" anchor="ctr"/>
-          <a:lstStyle/>
-          <a:p>
-            <a:pPr marL="0" indent="0" algn="ctr">
-              <a:buNone/>
-            </a:pPr>
-            <a:r>
-              <a:rPr lang="en-US" sz="2200" b="1" dirty="0">
-                <a:solidFill>
-                  <a:srgbClr val="EF4444"/>
-                </a:solidFill>
-                <a:latin typeface="Calibri" pitchFamily="34" charset="0"/>
-              </a:rPr>
-              <a:t>142%</a:t>
-            </a:r>
-          </a:p>
-        </p:txBody>
-      </p:sp>
-      <p:sp>
-        <p:nvSpPr>
-          <p:cNvPr id="116" name="GaugeName_BU3"/>
-          <p:cNvSpPr/>
-          <p:nvPr/>
-        </p:nvSpPr>
-        <p:spPr>
-          <a:xfrm>
-            <a:off x="457200" y="5808916"/>
-            <a:ext cx="2834640" cy="357164"/>
-          </a:xfrm>
-          <a:prstGeom prst="rect">
-            <a:avLst/>
-          </a:prstGeom>
-          <a:noFill/>
-          <a:ln/>
-        </p:spPr>
-        <p:txBody>
-          <a:bodyPr wrap="square" rtlCol="0" anchor="ctr"/>
-          <a:lstStyle/>
-          <a:p>
-            <a:pPr marL="0" indent="0" algn="ctr">
-              <a:buNone/>
-            </a:pPr>
-            <a:r>
-              <a:rPr lang="en-US" sz="1300" b="1" dirty="0">
-                <a:solidFill>
-                  <a:srgbClr val="0891B2"/>
-                </a:solidFill>
-                <a:latin typeface="Calibri" pitchFamily="34" charset="0"/>
-              </a:rPr>
-              <a:t>BU3</a:t>
-            </a:r>
-            <a:r>
-              <a:rPr lang="en-US" sz="1100" dirty="0">
-                <a:solidFill>
-                  <a:srgbClr val="94A3B8"/>
-                </a:solidFill>
-                <a:latin typeface="Calibri" pitchFamily="34" charset="0"/>
-              </a:rPr>
-              <a:t>  249 t / 175 t</a:t>
-            </a:r>
-          </a:p>
-        </p:txBody>
-      </p:sp>
-      <p:sp>
-        <p:nvSpPr>
-          <p:cNvPr id="117" name="GaugeStatus_BU3"/>
-          <p:cNvSpPr/>
-          <p:nvPr/>
-        </p:nvSpPr>
-        <p:spPr>
-          <a:xfrm>
-            <a:off x="457200" y="6166080"/>
-            <a:ext cx="2834640" cy="317479"/>
-          </a:xfrm>
-          <a:prstGeom prst="rect">
-            <a:avLst/>
-          </a:prstGeom>
-          <a:noFill/>
-          <a:ln/>
-        </p:spPr>
-        <p:txBody>
-          <a:bodyPr wrap="square" rtlCol="0" anchor="ctr"/>
-          <a:lstStyle/>
-          <a:p>
-            <a:pPr marL="0" indent="0" algn="ctr">
-              <a:buNone/>
-            </a:pPr>
-            <a:r>
-              <a:rPr lang="en-US" sz="1100" b="1" dirty="0">
-                <a:solidFill>
-                  <a:srgbClr val="EF4444"/>
-                </a:solidFill>
-                <a:latin typeface="Calibri" pitchFamily="34" charset="0"/>
-              </a:rPr>
-              <a:t>▲ 74 t over</a:t>
-            </a:r>
-          </a:p>
-        </p:txBody>
-      </p:sp>
-      <p:sp>
-        <p:nvSpPr>
-          <p:cNvPr id="118" name="GaugeBg_BU4"/>
-          <p:cNvSpPr/>
-          <p:nvPr/>
-        </p:nvSpPr>
-        <p:spPr>
-          <a:xfrm>
-            <a:off x="3717036" y="4876320"/>
-            <a:ext cx="1984247" cy="1984247"/>
-          </a:xfrm>
-          <a:prstGeom prst="arc">
-            <a:avLst>
-              <a:gd name="adj1" fmla="val 10800000"/>
-              <a:gd name="adj2" fmla="val 21600000"/>
-            </a:avLst>
-          </a:prstGeom>
-          <a:solidFill>
-            <a:srgbClr val="2A3A4A"/>
-          </a:solidFill>
-          <a:ln w="180000">
-            <a:solidFill>
-              <a:srgbClr val="2A3A4A"/>
-            </a:solidFill>
-          </a:ln>
-        </p:spPr>
-        <p:txBody>
-          <a:bodyPr/>
-          <a:lstStyle/>
-          <a:p>
-            <a:endParaRPr/>
-          </a:p>
-        </p:txBody>
-      </p:sp>
-      <p:sp>
-        <p:nvSpPr>
-          <p:cNvPr id="119" name="GaugeFg_BU4"/>
-          <p:cNvSpPr/>
-          <p:nvPr/>
-        </p:nvSpPr>
-        <p:spPr>
-          <a:xfrm>
-            <a:off x="3717036" y="4876320"/>
-            <a:ext cx="1984247" cy="1984247"/>
-          </a:xfrm>
-          <a:prstGeom prst="arc">
-            <a:avLst>
-              <a:gd name="adj1" fmla="val 10800000"/>
-              <a:gd name="adj2" fmla="val 21372631"/>
-            </a:avLst>
-          </a:prstGeom>
-          <a:solidFill>
-            <a:srgbClr val="F59E0B"/>
-          </a:solidFill>
-          <a:ln w="180000">
-            <a:solidFill>
-              <a:srgbClr val="F59E0B"/>
-            </a:solidFill>
-          </a:ln>
-        </p:spPr>
-        <p:txBody>
-          <a:bodyPr/>
-          <a:lstStyle/>
-          <a:p>
-            <a:endParaRPr/>
-          </a:p>
-        </p:txBody>
-      </p:sp>
-      <p:sp>
-        <p:nvSpPr>
-          <p:cNvPr id="120" name="GaugeHole_BU4"/>
-          <p:cNvSpPr/>
-          <p:nvPr/>
-        </p:nvSpPr>
-        <p:spPr>
-          <a:xfrm>
-            <a:off x="4133728" y="5293012"/>
-            <a:ext cx="1150863" cy="1150863"/>
-          </a:xfrm>
-          <a:prstGeom prst="ellipse">
-            <a:avLst/>
-          </a:prstGeom>
-          <a:solidFill>
-            <a:srgbClr val="0F1923"/>
-          </a:solidFill>
-          <a:ln w="0">
-            <a:noFill/>
-          </a:ln>
-        </p:spPr>
-        <p:txBody>
-          <a:bodyPr/>
-          <a:lstStyle/>
-          <a:p>
-            <a:endParaRPr/>
-          </a:p>
-        </p:txBody>
-      </p:sp>
-      <p:sp>
-        <p:nvSpPr>
-          <p:cNvPr id="121" name="GaugeLabel_BU4"/>
-          <p:cNvSpPr/>
-          <p:nvPr/>
-        </p:nvSpPr>
-        <p:spPr>
-          <a:xfrm>
-            <a:off x="3291840" y="5372381"/>
-            <a:ext cx="2834640" cy="436534"/>
-          </a:xfrm>
-          <a:prstGeom prst="rect">
-            <a:avLst/>
-          </a:prstGeom>
-          <a:noFill/>
-          <a:ln/>
-        </p:spPr>
-        <p:txBody>
-          <a:bodyPr wrap="square" rtlCol="0" anchor="ctr"/>
-          <a:lstStyle/>
-          <a:p>
-            <a:pPr marL="0" indent="0" algn="ctr">
-              <a:buNone/>
-            </a:pPr>
-            <a:r>
-              <a:rPr lang="en-US" sz="2200" b="1" dirty="0">
-                <a:solidFill>
-                  <a:srgbClr val="F59E0B"/>
-                </a:solidFill>
-                <a:latin typeface="Calibri" pitchFamily="34" charset="0"/>
-              </a:rPr>
-              <a:t>98%</a:t>
-            </a:r>
-          </a:p>
-        </p:txBody>
-      </p:sp>
-      <p:sp>
-        <p:nvSpPr>
-          <p:cNvPr id="122" name="GaugeName_BU4"/>
-          <p:cNvSpPr/>
-          <p:nvPr/>
-        </p:nvSpPr>
-        <p:spPr>
-          <a:xfrm>
-            <a:off x="3291840" y="5808916"/>
-            <a:ext cx="2834640" cy="357164"/>
-          </a:xfrm>
-          <a:prstGeom prst="rect">
-            <a:avLst/>
-          </a:prstGeom>
-          <a:noFill/>
-          <a:ln/>
-        </p:spPr>
-        <p:txBody>
-          <a:bodyPr wrap="square" rtlCol="0" anchor="ctr"/>
-          <a:lstStyle/>
-          <a:p>
-            <a:pPr marL="0" indent="0" algn="ctr">
-              <a:buNone/>
-            </a:pPr>
-            <a:r>
-              <a:rPr lang="en-US" sz="1300" b="1" dirty="0">
-                <a:solidFill>
-                  <a:srgbClr val="DB2777"/>
-                </a:solidFill>
-                <a:latin typeface="Calibri" pitchFamily="34" charset="0"/>
-              </a:rPr>
-              <a:t>BU4</a:t>
-            </a:r>
-            <a:r>
-              <a:rPr lang="en-US" sz="1100" dirty="0">
-                <a:solidFill>
-                  <a:srgbClr val="94A3B8"/>
-                </a:solidFill>
-                <a:latin typeface="Calibri" pitchFamily="34" charset="0"/>
-              </a:rPr>
-              <a:t>  186 t / 190 t</a:t>
-            </a:r>
-          </a:p>
-        </p:txBody>
-      </p:sp>
-      <p:sp>
-        <p:nvSpPr>
-          <p:cNvPr id="123" name="GaugeStatus_BU4"/>
-          <p:cNvSpPr/>
-          <p:nvPr/>
-        </p:nvSpPr>
-        <p:spPr>
-          <a:xfrm>
-            <a:off x="3291840" y="6166080"/>
-            <a:ext cx="2834640" cy="317479"/>
-          </a:xfrm>
-          <a:prstGeom prst="rect">
-            <a:avLst/>
-          </a:prstGeom>
-          <a:noFill/>
-          <a:ln/>
-        </p:spPr>
-        <p:txBody>
-          <a:bodyPr wrap="square" rtlCol="0" anchor="ctr"/>
-          <a:lstStyle/>
-          <a:p>
-            <a:pPr marL="0" indent="0" algn="ctr">
-              <a:buNone/>
-            </a:pPr>
-            <a:r>
-              <a:rPr lang="en-US" sz="1100" b="1" dirty="0">
-                <a:solidFill>
-                  <a:srgbClr val="F59E0B"/>
-                </a:solidFill>
-                <a:latin typeface="Calibri" pitchFamily="34" charset="0"/>
-              </a:rPr>
-              <a:t>~ 4 t left</a:t>
-            </a:r>
-          </a:p>
-        </p:txBody>
-      </p:sp>
-      <p:sp>
-        <p:nvSpPr>
-          <p:cNvPr id="25" name="Text 22"/>
-          <p:cNvSpPr/>
-          <p:nvPr/>
-        </p:nvSpPr>
-        <p:spPr>
-          <a:xfrm>
-            <a:off x="6492240" y="3246120"/>
-            <a:ext cx="5212080" cy="411480"/>
-          </a:xfrm>
-          <a:prstGeom prst="rect">
-            <a:avLst/>
-          </a:prstGeom>
-          <a:noFill/>
-          <a:ln/>
-        </p:spPr>
-        <p:txBody>
-          <a:bodyPr wrap="square" rtlCol="0" anchor="ctr"/>
-          <a:lstStyle/>
-          <a:p>
-            <a:pPr marL="0" indent="0">
-              <a:buNone/>
-            </a:pPr>
-            <a:r>
-              <a:rPr lang="en-US" sz="1400" b="1" dirty="0">
-                <a:solidFill>
-                  <a:srgbClr val="FFFFFF"/>
-                </a:solidFill>
-                <a:latin typeface="Calibri" pitchFamily="34" charset="0"/>
-                <a:ea typeface="Calibri" pitchFamily="34" charset="-122"/>
-                <a:cs typeface="Calibri" pitchFamily="34" charset="-120"/>
-              </a:rPr>
-              <a:t>BU Snapshot</a:t>
-            </a:r>
-            <a:endParaRPr lang="en-US" sz="1400" dirty="0"/>
-          </a:p>
-        </p:txBody>
-      </p:sp>
-      <p:sp>
-        <p:nvSpPr>
-          <p:cNvPr id="26" name="Shape 23"/>
-          <p:cNvSpPr/>
-          <p:nvPr/>
-        </p:nvSpPr>
-        <p:spPr>
-          <a:xfrm>
-            <a:off x="6492240" y="3794760"/>
-            <a:ext cx="5212080" cy="566928"/>
-          </a:xfrm>
-          <a:prstGeom prst="rect">
-            <a:avLst/>
-          </a:prstGeom>
-          <a:solidFill>
-            <a:srgbClr val="192535"/>
-          </a:solidFill>
-          <a:ln/>
-          <a:effectLst>
-            <a:outerShdw blurRad="152400" dist="38100" dir="8100000" algn="bl" rotWithShape="0">
-              <a:srgbClr val="000000">
-                <a:alpha val="25000"/>
-              </a:srgbClr>
-            </a:outerShdw>
-          </a:effectLst>
-        </p:spPr>
-        <p:txBody>
-          <a:bodyPr/>
-          <a:lstStyle/>
-          <a:p>
-            <a:endParaRPr/>
-          </a:p>
-        </p:txBody>
-      </p:sp>
-      <p:sp>
-        <p:nvSpPr>
-          <p:cNvPr id="27" name="Shape 24"/>
-          <p:cNvSpPr/>
-          <p:nvPr/>
-        </p:nvSpPr>
-        <p:spPr>
-          <a:xfrm>
-            <a:off x="6492240" y="3794760"/>
-            <a:ext cx="54864" cy="566928"/>
-          </a:xfrm>
-          <a:prstGeom prst="rect">
-            <a:avLst/>
-          </a:prstGeom>
-          <a:solidFill>
-            <a:srgbClr val="EF4444"/>
-          </a:solidFill>
-          <a:ln/>
-        </p:spPr>
-        <p:txBody>
-          <a:bodyPr/>
-          <a:lstStyle/>
-          <a:p>
-            <a:endParaRPr/>
-          </a:p>
-        </p:txBody>
-      </p:sp>
-      <p:sp>
-        <p:nvSpPr>
-          <p:cNvPr id="28" name="Text 25"/>
-          <p:cNvSpPr/>
-          <p:nvPr/>
-        </p:nvSpPr>
-        <p:spPr>
-          <a:xfrm>
-            <a:off x="6629400" y="3867912"/>
-            <a:ext cx="640080" cy="411480"/>
-          </a:xfrm>
-          <a:prstGeom prst="rect">
-            <a:avLst/>
-          </a:prstGeom>
-          <a:noFill/>
-          <a:ln/>
-        </p:spPr>
-        <p:txBody>
-          <a:bodyPr wrap="square" lIns="0" tIns="0" rIns="0" bIns="0" rtlCol="0" anchor="ctr"/>
-          <a:lstStyle/>
-          <a:p>
-            <a:pPr marL="0" indent="0">
-              <a:buNone/>
-            </a:pPr>
-            <a:r>
-              <a:rPr lang="en-US" sz="1400" b="1" dirty="0">
-                <a:solidFill>
-                  <a:srgbClr val="FFFFFF"/>
-                </a:solidFill>
-                <a:latin typeface="Calibri" pitchFamily="34" charset="0"/>
-                <a:ea typeface="Calibri" pitchFamily="34" charset="-122"/>
-                <a:cs typeface="Calibri" pitchFamily="34" charset="-120"/>
-              </a:rPr>
-              <a:t>BU1</a:t>
-            </a:r>
-            <a:endParaRPr lang="en-US" sz="1400" dirty="0"/>
-          </a:p>
-        </p:txBody>
-      </p:sp>
-      <p:sp>
-        <p:nvSpPr>
-          <p:cNvPr id="29" name="Text 26"/>
-          <p:cNvSpPr/>
-          <p:nvPr/>
-        </p:nvSpPr>
-        <p:spPr>
-          <a:xfrm>
-            <a:off x="7269480" y="3886200"/>
-            <a:ext cx="4206240" cy="365760"/>
-          </a:xfrm>
-          <a:prstGeom prst="rect">
-            <a:avLst/>
-          </a:prstGeom>
-          <a:noFill/>
-          <a:ln/>
-        </p:spPr>
-        <p:txBody>
-          <a:bodyPr wrap="square" lIns="0" tIns="0" rIns="0" bIns="0" rtlCol="0" anchor="ctr"/>
-          <a:lstStyle/>
-          <a:p>
-            <a:pPr marL="0" indent="0">
-              <a:buNone/>
-            </a:pPr>
-            <a:r>
-              <a:rPr lang="en-US" sz="1100" dirty="0">
-                <a:solidFill>
-                  <a:srgbClr val="E2E8F0"/>
-                </a:solidFill>
-                <a:latin typeface="Calibri" pitchFamily="34" charset="0"/>
-                <a:ea typeface="Calibri" pitchFamily="34" charset="-122"/>
-                <a:cs typeface="Calibri" pitchFamily="34" charset="-120"/>
-              </a:rPr>
-              <a:t>Actual: 190 t  ·  Optimised: 162 t  ·  Budget: 180 t</a:t>
-            </a:r>
-            <a:endParaRPr lang="en-US" sz="1100" dirty="0"/>
-          </a:p>
-        </p:txBody>
-      </p:sp>
-      <p:sp>
-        <p:nvSpPr>
-          <p:cNvPr id="30" name="Text 27"/>
-          <p:cNvSpPr/>
-          <p:nvPr/>
-        </p:nvSpPr>
-        <p:spPr>
-          <a:xfrm>
-            <a:off x="9509760" y="3886200"/>
-            <a:ext cx="2011680" cy="365760"/>
-          </a:xfrm>
-          <a:prstGeom prst="rect">
-            <a:avLst/>
-          </a:prstGeom>
-          <a:noFill/>
-          <a:ln/>
-        </p:spPr>
-        <p:txBody>
-          <a:bodyPr wrap="square" lIns="0" tIns="0" rIns="0" bIns="0" rtlCol="0" anchor="ctr"/>
-          <a:lstStyle/>
-          <a:p>
-            <a:pPr marL="0" indent="0" algn="r">
-              <a:buNone/>
-            </a:pPr>
-            <a:r>
-              <a:rPr lang="en-US" sz="1100" b="1" dirty="0">
-                <a:solidFill>
-                  <a:srgbClr val="EF4444"/>
-                </a:solidFill>
-                <a:latin typeface="Calibri" pitchFamily="34" charset="0"/>
-                <a:ea typeface="Calibri" pitchFamily="34" charset="-122"/>
-                <a:cs typeface="Calibri" pitchFamily="34" charset="-120"/>
-              </a:rPr>
-              <a:t>▲ 10 t over</a:t>
-            </a:r>
-            <a:endParaRPr lang="en-US" sz="1100" dirty="0"/>
-          </a:p>
-        </p:txBody>
-      </p:sp>
-      <p:sp>
-        <p:nvSpPr>
-          <p:cNvPr id="31" name="Shape 28"/>
-          <p:cNvSpPr/>
-          <p:nvPr/>
-        </p:nvSpPr>
-        <p:spPr>
-          <a:xfrm>
-            <a:off x="6492240" y="4453128"/>
-            <a:ext cx="5212080" cy="566928"/>
-          </a:xfrm>
-          <a:prstGeom prst="rect">
-            <a:avLst/>
-          </a:prstGeom>
-          <a:solidFill>
-            <a:srgbClr val="192535"/>
-          </a:solidFill>
-          <a:ln/>
-          <a:effectLst>
-            <a:outerShdw blurRad="152400" dist="38100" dir="8100000" algn="bl" rotWithShape="0">
-              <a:srgbClr val="000000">
-                <a:alpha val="25000"/>
-              </a:srgbClr>
-            </a:outerShdw>
-          </a:effectLst>
-        </p:spPr>
-        <p:txBody>
-          <a:bodyPr/>
-          <a:lstStyle/>
-          <a:p>
-            <a:endParaRPr/>
-          </a:p>
-        </p:txBody>
-      </p:sp>
-      <p:sp>
-        <p:nvSpPr>
-          <p:cNvPr id="32" name="Shape 29"/>
-          <p:cNvSpPr/>
-          <p:nvPr/>
-        </p:nvSpPr>
-        <p:spPr>
-          <a:xfrm>
-            <a:off x="6492240" y="4453128"/>
-            <a:ext cx="54864" cy="566928"/>
-          </a:xfrm>
-          <a:prstGeom prst="rect">
-            <a:avLst/>
-          </a:prstGeom>
-          <a:solidFill>
-            <a:srgbClr val="10B981"/>
-          </a:solidFill>
-          <a:ln/>
-        </p:spPr>
-        <p:txBody>
-          <a:bodyPr/>
-          <a:lstStyle/>
-          <a:p>
-            <a:endParaRPr/>
-          </a:p>
-        </p:txBody>
-      </p:sp>
-      <p:sp>
-        <p:nvSpPr>
-          <p:cNvPr id="33" name="Text 30"/>
-          <p:cNvSpPr/>
-          <p:nvPr/>
-        </p:nvSpPr>
-        <p:spPr>
-          <a:xfrm>
-            <a:off x="6629400" y="4526280"/>
-            <a:ext cx="640080" cy="411480"/>
-          </a:xfrm>
-          <a:prstGeom prst="rect">
-            <a:avLst/>
-          </a:prstGeom>
-          <a:noFill/>
-          <a:ln/>
-        </p:spPr>
-        <p:txBody>
-          <a:bodyPr wrap="square" lIns="0" tIns="0" rIns="0" bIns="0" rtlCol="0" anchor="ctr"/>
-          <a:lstStyle/>
-          <a:p>
-            <a:pPr marL="0" indent="0">
-              <a:buNone/>
-            </a:pPr>
-            <a:r>
-              <a:rPr lang="en-US" sz="1400" b="1" dirty="0">
-                <a:solidFill>
-                  <a:srgbClr val="FFFFFF"/>
-                </a:solidFill>
-                <a:latin typeface="Calibri" pitchFamily="34" charset="0"/>
-                <a:ea typeface="Calibri" pitchFamily="34" charset="-122"/>
-                <a:cs typeface="Calibri" pitchFamily="34" charset="-120"/>
-              </a:rPr>
-              <a:t>BU2</a:t>
-            </a:r>
-            <a:endParaRPr lang="en-US" sz="1400" dirty="0"/>
-          </a:p>
-        </p:txBody>
-      </p:sp>
-      <p:sp>
-        <p:nvSpPr>
-          <p:cNvPr id="34" name="Text 31"/>
-          <p:cNvSpPr/>
-          <p:nvPr/>
-        </p:nvSpPr>
-        <p:spPr>
-          <a:xfrm>
-            <a:off x="7269480" y="4544568"/>
-            <a:ext cx="4206240" cy="365760"/>
-          </a:xfrm>
-          <a:prstGeom prst="rect">
-            <a:avLst/>
-          </a:prstGeom>
-          <a:noFill/>
-          <a:ln/>
-        </p:spPr>
-        <p:txBody>
-          <a:bodyPr wrap="square" lIns="0" tIns="0" rIns="0" bIns="0" rtlCol="0" anchor="ctr"/>
-          <a:lstStyle/>
-          <a:p>
-            <a:pPr marL="0" indent="0">
-              <a:buNone/>
-            </a:pPr>
-            <a:r>
-              <a:rPr lang="en-US" sz="1100" dirty="0">
-                <a:solidFill>
-                  <a:srgbClr val="E2E8F0"/>
-                </a:solidFill>
-                <a:latin typeface="Calibri" pitchFamily="34" charset="0"/>
-                <a:ea typeface="Calibri" pitchFamily="34" charset="-122"/>
-                <a:cs typeface="Calibri" pitchFamily="34" charset="-120"/>
-              </a:rPr>
-              <a:t>Actual: 150 t  ·  Optimised: 134 t  ·  Budget: 200 t</a:t>
-            </a:r>
-            <a:endParaRPr lang="en-US" sz="1100" dirty="0"/>
-          </a:p>
-        </p:txBody>
-      </p:sp>
-      <p:sp>
-        <p:nvSpPr>
-          <p:cNvPr id="35" name="Text 32"/>
-          <p:cNvSpPr/>
-          <p:nvPr/>
-        </p:nvSpPr>
-        <p:spPr>
-          <a:xfrm>
-            <a:off x="9509760" y="4544568"/>
-            <a:ext cx="2011680" cy="365760"/>
-          </a:xfrm>
-          <a:prstGeom prst="rect">
-            <a:avLst/>
-          </a:prstGeom>
-          <a:noFill/>
-          <a:ln/>
-        </p:spPr>
-        <p:txBody>
-          <a:bodyPr wrap="square" lIns="0" tIns="0" rIns="0" bIns="0" rtlCol="0" anchor="ctr"/>
-          <a:lstStyle/>
-          <a:p>
-            <a:pPr marL="0" indent="0" algn="r">
-              <a:buNone/>
-            </a:pPr>
-            <a:r>
-              <a:rPr lang="en-US" sz="1100" b="1" dirty="0">
-                <a:solidFill>
-                  <a:srgbClr val="10B981"/>
-                </a:solidFill>
-                <a:latin typeface="Calibri" pitchFamily="34" charset="0"/>
-                <a:ea typeface="Calibri" pitchFamily="34" charset="-122"/>
-                <a:cs typeface="Calibri" pitchFamily="34" charset="-120"/>
-              </a:rPr>
-              <a:t>✓ 50 t left</a:t>
-            </a:r>
-            <a:endParaRPr lang="en-US" sz="1100" dirty="0"/>
-          </a:p>
-        </p:txBody>
-      </p:sp>
-      <p:sp>
-        <p:nvSpPr>
-          <p:cNvPr id="36" name="Shape 33"/>
-          <p:cNvSpPr/>
-          <p:nvPr/>
-        </p:nvSpPr>
-        <p:spPr>
-          <a:xfrm>
-            <a:off x="6492240" y="5111496"/>
-            <a:ext cx="5212080" cy="566928"/>
-          </a:xfrm>
-          <a:prstGeom prst="rect">
-            <a:avLst/>
-          </a:prstGeom>
-          <a:solidFill>
-            <a:srgbClr val="192535"/>
-          </a:solidFill>
-          <a:ln/>
-          <a:effectLst>
-            <a:outerShdw blurRad="152400" dist="38100" dir="8100000" algn="bl" rotWithShape="0">
-              <a:srgbClr val="000000">
-                <a:alpha val="25000"/>
-              </a:srgbClr>
-            </a:outerShdw>
-          </a:effectLst>
-        </p:spPr>
-        <p:txBody>
-          <a:bodyPr/>
-          <a:lstStyle/>
-          <a:p>
-            <a:endParaRPr/>
-          </a:p>
-        </p:txBody>
-      </p:sp>
-      <p:sp>
-        <p:nvSpPr>
-          <p:cNvPr id="37" name="Shape 34"/>
-          <p:cNvSpPr/>
-          <p:nvPr/>
-        </p:nvSpPr>
-        <p:spPr>
-          <a:xfrm>
-            <a:off x="6492240" y="5111496"/>
-            <a:ext cx="54864" cy="566928"/>
-          </a:xfrm>
-          <a:prstGeom prst="rect">
-            <a:avLst/>
-          </a:prstGeom>
-          <a:solidFill>
-            <a:srgbClr val="EF4444"/>
-          </a:solidFill>
-          <a:ln/>
-        </p:spPr>
-        <p:txBody>
-          <a:bodyPr/>
-          <a:lstStyle/>
-          <a:p>
-            <a:endParaRPr/>
-          </a:p>
-        </p:txBody>
-      </p:sp>
-      <p:sp>
-        <p:nvSpPr>
-          <p:cNvPr id="38" name="Text 35"/>
-          <p:cNvSpPr/>
-          <p:nvPr/>
-        </p:nvSpPr>
-        <p:spPr>
-          <a:xfrm>
-            <a:off x="6629400" y="5184648"/>
-            <a:ext cx="640080" cy="411480"/>
-          </a:xfrm>
-          <a:prstGeom prst="rect">
-            <a:avLst/>
-          </a:prstGeom>
-          <a:noFill/>
-          <a:ln/>
-        </p:spPr>
-        <p:txBody>
-          <a:bodyPr wrap="square" lIns="0" tIns="0" rIns="0" bIns="0" rtlCol="0" anchor="ctr"/>
-          <a:lstStyle/>
-          <a:p>
-            <a:pPr marL="0" indent="0">
-              <a:buNone/>
-            </a:pPr>
-            <a:r>
-              <a:rPr lang="en-US" sz="1400" b="1" dirty="0">
-                <a:solidFill>
-                  <a:srgbClr val="FFFFFF"/>
-                </a:solidFill>
-                <a:latin typeface="Calibri" pitchFamily="34" charset="0"/>
-                <a:ea typeface="Calibri" pitchFamily="34" charset="-122"/>
-                <a:cs typeface="Calibri" pitchFamily="34" charset="-120"/>
-              </a:rPr>
-              <a:t>BU3</a:t>
-            </a:r>
-            <a:endParaRPr lang="en-US" sz="1400" dirty="0"/>
-          </a:p>
-        </p:txBody>
-      </p:sp>
-      <p:sp>
-        <p:nvSpPr>
-          <p:cNvPr id="39" name="Text 36"/>
-          <p:cNvSpPr/>
-          <p:nvPr/>
-        </p:nvSpPr>
-        <p:spPr>
-          <a:xfrm>
-            <a:off x="7269480" y="5202936"/>
-            <a:ext cx="4206240" cy="365760"/>
-          </a:xfrm>
-          <a:prstGeom prst="rect">
-            <a:avLst/>
-          </a:prstGeom>
-          <a:noFill/>
-          <a:ln/>
-        </p:spPr>
-        <p:txBody>
-          <a:bodyPr wrap="square" lIns="0" tIns="0" rIns="0" bIns="0" rtlCol="0" anchor="ctr"/>
-          <a:lstStyle/>
-          <a:p>
-            <a:pPr marL="0" indent="0">
-              <a:buNone/>
-            </a:pPr>
-            <a:r>
-              <a:rPr lang="en-US" sz="1100" dirty="0">
-                <a:solidFill>
-                  <a:srgbClr val="E2E8F0"/>
-                </a:solidFill>
-                <a:latin typeface="Calibri" pitchFamily="34" charset="0"/>
-                <a:ea typeface="Calibri" pitchFamily="34" charset="-122"/>
-                <a:cs typeface="Calibri" pitchFamily="34" charset="-120"/>
-              </a:rPr>
-              <a:t>Actual: 249 t  ·  Optimised: 198 t  ·  Budget: 175 t</a:t>
-            </a:r>
-            <a:endParaRPr lang="en-US" sz="1100" dirty="0"/>
-          </a:p>
-        </p:txBody>
-      </p:sp>
-      <p:sp>
-        <p:nvSpPr>
-          <p:cNvPr id="40" name="Text 37"/>
-          <p:cNvSpPr/>
-          <p:nvPr/>
-        </p:nvSpPr>
-        <p:spPr>
-          <a:xfrm>
-            <a:off x="9509760" y="5202936"/>
-            <a:ext cx="2011680" cy="365760"/>
-          </a:xfrm>
-          <a:prstGeom prst="rect">
-            <a:avLst/>
-          </a:prstGeom>
-          <a:noFill/>
-          <a:ln/>
-        </p:spPr>
-        <p:txBody>
-          <a:bodyPr wrap="square" lIns="0" tIns="0" rIns="0" bIns="0" rtlCol="0" anchor="ctr"/>
-          <a:lstStyle/>
-          <a:p>
-            <a:pPr marL="0" indent="0" algn="r">
-              <a:buNone/>
-            </a:pPr>
-            <a:r>
-              <a:rPr lang="en-US" sz="1100" b="1" dirty="0">
-                <a:solidFill>
-                  <a:srgbClr val="EF4444"/>
-                </a:solidFill>
-                <a:latin typeface="Calibri" pitchFamily="34" charset="0"/>
-                <a:ea typeface="Calibri" pitchFamily="34" charset="-122"/>
-                <a:cs typeface="Calibri" pitchFamily="34" charset="-120"/>
-              </a:rPr>
-              <a:t>▲ 74 t over</a:t>
-            </a:r>
-            <a:endParaRPr lang="en-US" sz="1100" dirty="0"/>
-          </a:p>
-        </p:txBody>
-      </p:sp>
-      <p:sp>
-        <p:nvSpPr>
-          <p:cNvPr id="41" name="Shape 38"/>
-          <p:cNvSpPr/>
-          <p:nvPr/>
-        </p:nvSpPr>
-        <p:spPr>
-          <a:xfrm>
-            <a:off x="6492240" y="5769864"/>
-            <a:ext cx="5212080" cy="566928"/>
-          </a:xfrm>
-          <a:prstGeom prst="rect">
-            <a:avLst/>
-          </a:prstGeom>
-          <a:solidFill>
-            <a:srgbClr val="192535"/>
-          </a:solidFill>
-          <a:ln/>
-          <a:effectLst>
-            <a:outerShdw blurRad="152400" dist="38100" dir="8100000" algn="bl" rotWithShape="0">
-              <a:srgbClr val="000000">
-                <a:alpha val="25000"/>
-              </a:srgbClr>
-            </a:outerShdw>
-          </a:effectLst>
-        </p:spPr>
-        <p:txBody>
-          <a:bodyPr/>
-          <a:lstStyle/>
-          <a:p>
-            <a:endParaRPr/>
-          </a:p>
-        </p:txBody>
-      </p:sp>
-      <p:sp>
-        <p:nvSpPr>
-          <p:cNvPr id="42" name="Shape 39"/>
-          <p:cNvSpPr/>
-          <p:nvPr/>
-        </p:nvSpPr>
-        <p:spPr>
-          <a:xfrm>
-            <a:off x="6492240" y="5769864"/>
-            <a:ext cx="54864" cy="566928"/>
-          </a:xfrm>
-          <a:prstGeom prst="rect">
-            <a:avLst/>
-          </a:prstGeom>
-          <a:solidFill>
-            <a:srgbClr val="10B981"/>
-          </a:solidFill>
-          <a:ln/>
-        </p:spPr>
-        <p:txBody>
-          <a:bodyPr/>
-          <a:lstStyle/>
-          <a:p>
-            <a:endParaRPr/>
-          </a:p>
-        </p:txBody>
-      </p:sp>
-      <p:sp>
-        <p:nvSpPr>
-          <p:cNvPr id="43" name="Text 40"/>
-          <p:cNvSpPr/>
-          <p:nvPr/>
-        </p:nvSpPr>
-        <p:spPr>
-          <a:xfrm>
-            <a:off x="6629400" y="5843016"/>
-            <a:ext cx="640080" cy="411480"/>
-          </a:xfrm>
-          <a:prstGeom prst="rect">
-            <a:avLst/>
-          </a:prstGeom>
-          <a:noFill/>
-          <a:ln/>
-        </p:spPr>
-        <p:txBody>
-          <a:bodyPr wrap="square" lIns="0" tIns="0" rIns="0" bIns="0" rtlCol="0" anchor="ctr"/>
-          <a:lstStyle/>
-          <a:p>
-            <a:pPr marL="0" indent="0">
-              <a:buNone/>
-            </a:pPr>
-            <a:r>
-              <a:rPr lang="en-US" sz="1400" b="1" dirty="0">
-                <a:solidFill>
-                  <a:srgbClr val="FFFFFF"/>
-                </a:solidFill>
-                <a:latin typeface="Calibri" pitchFamily="34" charset="0"/>
-                <a:ea typeface="Calibri" pitchFamily="34" charset="-122"/>
-                <a:cs typeface="Calibri" pitchFamily="34" charset="-120"/>
-              </a:rPr>
-              <a:t>BU4</a:t>
-            </a:r>
-            <a:endParaRPr lang="en-US" sz="1400" dirty="0"/>
-          </a:p>
-        </p:txBody>
-      </p:sp>
-      <p:sp>
-        <p:nvSpPr>
-          <p:cNvPr id="44" name="Text 41"/>
-          <p:cNvSpPr/>
-          <p:nvPr/>
-        </p:nvSpPr>
-        <p:spPr>
-          <a:xfrm>
-            <a:off x="7269480" y="5861304"/>
-            <a:ext cx="4206240" cy="365760"/>
-          </a:xfrm>
-          <a:prstGeom prst="rect">
-            <a:avLst/>
-          </a:prstGeom>
-          <a:noFill/>
-          <a:ln/>
-        </p:spPr>
-        <p:txBody>
-          <a:bodyPr wrap="square" lIns="0" tIns="0" rIns="0" bIns="0" rtlCol="0" anchor="ctr"/>
-          <a:lstStyle/>
-          <a:p>
-            <a:pPr marL="0" indent="0">
-              <a:buNone/>
-            </a:pPr>
-            <a:r>
-              <a:rPr lang="en-US" sz="1100" dirty="0">
-                <a:solidFill>
-                  <a:srgbClr val="E2E8F0"/>
-                </a:solidFill>
-                <a:latin typeface="Calibri" pitchFamily="34" charset="0"/>
-                <a:ea typeface="Calibri" pitchFamily="34" charset="-122"/>
-                <a:cs typeface="Calibri" pitchFamily="34" charset="-120"/>
-              </a:rPr>
-              <a:t>Actual: 186 t  ·  Optimised: 168 t  ·  Budget: 190 t</a:t>
-            </a:r>
-            <a:endParaRPr lang="en-US" sz="1100" dirty="0"/>
-          </a:p>
-        </p:txBody>
-      </p:sp>
-      <p:sp>
-        <p:nvSpPr>
-          <p:cNvPr id="45" name="Text 42"/>
-          <p:cNvSpPr/>
-          <p:nvPr/>
-        </p:nvSpPr>
-        <p:spPr>
-          <a:xfrm>
-            <a:off x="9509760" y="5861304"/>
-            <a:ext cx="2011680" cy="365760"/>
-          </a:xfrm>
-          <a:prstGeom prst="rect">
-            <a:avLst/>
-          </a:prstGeom>
-          <a:noFill/>
-          <a:ln/>
-        </p:spPr>
-        <p:txBody>
-          <a:bodyPr wrap="square" lIns="0" tIns="0" rIns="0" bIns="0" rtlCol="0" anchor="ctr"/>
-          <a:lstStyle/>
-          <a:p>
-            <a:pPr marL="0" indent="0" algn="r">
-              <a:buNone/>
-            </a:pPr>
-            <a:r>
-              <a:rPr lang="en-US" sz="1100" b="1" dirty="0">
-                <a:solidFill>
-                  <a:srgbClr val="10B981"/>
-                </a:solidFill>
-                <a:latin typeface="Calibri" pitchFamily="34" charset="0"/>
-                <a:ea typeface="Calibri" pitchFamily="34" charset="-122"/>
-                <a:cs typeface="Calibri" pitchFamily="34" charset="-120"/>
-              </a:rPr>
-              <a:t>✓ 4 t left</a:t>
-            </a:r>
-            <a:endParaRPr lang="en-US" sz="1100" dirty="0"/>
-          </a:p>
-        </p:txBody>
-      </p:sp>
-    </p:spTree>
-  </p:cSld>
-  <p:clrMapOvr>
-    <a:masterClrMapping/>
-  </p:clrMapOvr>
-</p:sld>
-</file>
-
 <file path=ppt/slides/slide6.xml><?xml version="1.0" encoding="utf-8"?>
-<p:sld xmlns:a="http://schemas.openxmlformats.org/drawingml/2006/main" xmlns:r="http://schemas.openxmlformats.org/officeDocument/2006/relationships" xmlns:p="http://schemas.openxmlformats.org/presentationml/2006/main">
-  <p:cSld name="Slide Design Rationale">
-    <p:bg>
-      <p:bgPr>
-        <a:solidFill>
-          <a:srgbClr val="0F1923"/>
-        </a:solidFill>
-        <a:effectLst/>
-      </p:bgPr>
-    </p:bg>
-    <p:spTree>
-      <p:nvGrpSpPr>
-        <p:cNvPr id="1" name=""/>
-        <p:cNvGrpSpPr/>
-        <p:nvPr/>
-      </p:nvGrpSpPr>
-      <p:grpSpPr>
-        <a:xfrm>
-          <a:off x="0" y="0"/>
-          <a:ext cx="0" cy="0"/>
-          <a:chOff x="0" y="0"/>
-          <a:chExt cx="0" cy="0"/>
-        </a:xfrm>
-      </p:grpSpPr>
-      <p:sp>
-        <p:nvSpPr>
-          <p:cNvPr id="2" name="Text 0"/>
-          <p:cNvSpPr/>
-          <p:nvPr/>
-        </p:nvSpPr>
-        <p:spPr>
-          <a:xfrm>
-            <a:off x="457200" y="274320"/>
-            <a:ext cx="10972800" cy="365760"/>
-          </a:xfrm>
-          <a:prstGeom prst="rect">
-            <a:avLst/>
-          </a:prstGeom>
-          <a:noFill/>
-          <a:ln/>
-        </p:spPr>
-        <p:txBody>
-          <a:bodyPr wrap="square" rtlCol="0" anchor="ctr"/>
-          <a:lstStyle/>
-          <a:p>
-            <a:pPr marL="0" indent="0">
-              <a:buNone/>
-            </a:pPr>
-            <a:r>
-              <a:rPr lang="en-US" sz="1000" b="1" kern="0" spc="300" dirty="0">
-                <a:solidFill>
-                  <a:srgbClr val="0D9488"/>
-                </a:solidFill>
-                <a:latin typeface="Calibri" pitchFamily="34" charset="0"/>
-              </a:rPr>
-              <a:t>05  —  DESIGN </a:t>
-            </a:r>
-          </a:p>
-        </p:txBody>
-      </p:sp>
-      <p:sp>
-        <p:nvSpPr>
-          <p:cNvPr id="3" name="Text 1"/>
-          <p:cNvSpPr/>
-          <p:nvPr/>
-        </p:nvSpPr>
-        <p:spPr>
-          <a:xfrm>
-            <a:off x="457200" y="640080"/>
-            <a:ext cx="10972800" cy="822960"/>
-          </a:xfrm>
-          <a:prstGeom prst="rect">
-            <a:avLst/>
-          </a:prstGeom>
-          <a:noFill/>
-          <a:ln/>
-        </p:spPr>
-        <p:txBody>
-          <a:bodyPr wrap="square" rtlCol="0" anchor="ctr"/>
-          <a:lstStyle/>
-          <a:p>
-            <a:pPr marL="0" indent="0">
-              <a:buNone/>
-            </a:pPr>
-            <a:r>
-              <a:rPr lang="en-US" sz="4000" b="1" dirty="0">
-                <a:solidFill>
-                  <a:srgbClr val="FFFFFF"/>
-                </a:solidFill>
-                <a:latin typeface="Calibri" pitchFamily="34" charset="0"/>
-              </a:rPr>
-              <a:t>Why These Visual Choices?</a:t>
-            </a:r>
-          </a:p>
-        </p:txBody>
-      </p:sp>
-      <p:sp>
-        <p:nvSpPr>
-          <p:cNvPr id="4" name="Card1"/>
-          <p:cNvSpPr/>
-          <p:nvPr/>
-        </p:nvSpPr>
-        <p:spPr>
-          <a:xfrm>
-            <a:off x="457200" y="1645920"/>
-            <a:ext cx="2651760" cy="3657600"/>
-          </a:xfrm>
-          <a:prstGeom prst="rect">
-            <a:avLst/>
-          </a:prstGeom>
-          <a:solidFill>
-            <a:srgbClr val="192535"/>
-          </a:solidFill>
-          <a:ln/>
-          <a:effectLst>
-            <a:outerShdw blurRad="152400" dist="38100" dir="8100000" algn="bl" rotWithShape="0">
-              <a:srgbClr val="000000">
-                <a:alpha val="25000"/>
-              </a:srgbClr>
-            </a:outerShdw>
-          </a:effectLst>
-        </p:spPr>
-        <p:txBody>
-          <a:bodyPr/>
-          <a:lstStyle/>
-          <a:p>
-            <a:endParaRPr/>
-          </a:p>
-        </p:txBody>
-      </p:sp>
-      <p:sp>
-        <p:nvSpPr>
-          <p:cNvPr id="5" name="Bar1"/>
-          <p:cNvSpPr/>
-          <p:nvPr/>
-        </p:nvSpPr>
-        <p:spPr>
-          <a:xfrm>
-            <a:off x="457200" y="1645920"/>
-            <a:ext cx="54864" cy="3657600"/>
-          </a:xfrm>
-          <a:prstGeom prst="rect">
-            <a:avLst/>
-          </a:prstGeom>
-          <a:solidFill>
-            <a:srgbClr val="EF4444"/>
-          </a:solidFill>
-          <a:ln/>
-        </p:spPr>
-        <p:txBody>
-          <a:bodyPr/>
-          <a:lstStyle/>
-          <a:p>
-            <a:endParaRPr/>
-          </a:p>
-        </p:txBody>
-      </p:sp>
-      <p:sp>
-        <p:nvSpPr>
-          <p:cNvPr id="6" name="TextC1"/>
-          <p:cNvSpPr/>
-          <p:nvPr/>
-        </p:nvSpPr>
-        <p:spPr>
-          <a:xfrm>
-            <a:off x="640080" y="1737360"/>
-            <a:ext cx="2377440" cy="3474720"/>
-          </a:xfrm>
-          <a:prstGeom prst="rect">
-            <a:avLst/>
-          </a:prstGeom>
-          <a:noFill/>
-          <a:ln/>
-        </p:spPr>
-        <p:txBody>
-          <a:bodyPr wrap="square" rtlCol="0" anchor="t"/>
-          <a:lstStyle/>
-          <a:p>
-            <a:pPr marL="0" indent="0">
-              <a:lnSpc>
-                <a:spcPts val="2400"/>
-              </a:lnSpc>
-              <a:buNone/>
-            </a:pPr>
-            <a:r>
-              <a:rPr lang="en-US" sz="1600" b="1" dirty="0">
-                <a:solidFill>
-                  <a:srgbClr val="FFFFFF"/>
-                </a:solidFill>
-                <a:latin typeface="Calibri" pitchFamily="34" charset="0"/>
-              </a:rPr>
-              <a:t>Gauges</a:t>
-            </a:r>
-          </a:p>
-          <a:p>
-            <a:pPr marL="0" indent="0">
-              <a:lnSpc>
-                <a:spcPts val="2400"/>
-              </a:lnSpc>
-              <a:buNone/>
-            </a:pPr>
-            <a:r>
-              <a:rPr lang="en-US" sz="1200" dirty="0">
-                <a:solidFill>
-                  <a:srgbClr val="94A3B8"/>
-                </a:solidFill>
-                <a:latin typeface="Calibri" pitchFamily="34" charset="0"/>
-              </a:rPr>
-              <a:t>Encode status (under / approaching / over) at a glance, no numbers needed to detect overruns.</a:t>
-            </a:r>
-          </a:p>
-          <a:p>
-            <a:pPr marL="0" indent="0">
-              <a:lnSpc>
-                <a:spcPts val="2400"/>
-              </a:lnSpc>
-              <a:buNone/>
-            </a:pPr>
-            <a:r>
-              <a:rPr lang="en-US" sz="1200" b="1" dirty="0">
-                <a:solidFill>
-                  <a:srgbClr val="EF4444"/>
-                </a:solidFill>
-                <a:latin typeface="Calibri" pitchFamily="34" charset="0"/>
-              </a:rPr>
-              <a:t>Red = over budget</a:t>
-            </a:r>
-          </a:p>
-          <a:p>
-            <a:pPr marL="0" indent="0">
-              <a:lnSpc>
-                <a:spcPts val="2400"/>
-              </a:lnSpc>
-              <a:buNone/>
-            </a:pPr>
-            <a:r>
-              <a:rPr lang="en-US" sz="1200" b="1" dirty="0">
-                <a:solidFill>
-                  <a:srgbClr val="F59E0B"/>
-                </a:solidFill>
-                <a:latin typeface="Calibri" pitchFamily="34" charset="0"/>
-              </a:rPr>
-              <a:t>Amber = approaching</a:t>
-            </a:r>
-          </a:p>
-          <a:p>
-            <a:pPr marL="0" indent="0">
-              <a:lnSpc>
-                <a:spcPts val="2400"/>
-              </a:lnSpc>
-              <a:buNone/>
-            </a:pPr>
-            <a:r>
-              <a:rPr lang="en-US" sz="1200" b="1" dirty="0">
-                <a:solidFill>
-                  <a:srgbClr val="10B981"/>
-                </a:solidFill>
-                <a:latin typeface="Calibri" pitchFamily="34" charset="0"/>
-              </a:rPr>
-              <a:t>Green = on track</a:t>
-            </a:r>
-          </a:p>
-        </p:txBody>
-      </p:sp>
-      <p:sp>
-        <p:nvSpPr>
-          <p:cNvPr id="7" name="Card2"/>
-          <p:cNvSpPr/>
-          <p:nvPr/>
-        </p:nvSpPr>
-        <p:spPr>
-          <a:xfrm>
-            <a:off x="3383280" y="1645920"/>
-            <a:ext cx="2651760" cy="3657600"/>
-          </a:xfrm>
-          <a:prstGeom prst="rect">
-            <a:avLst/>
-          </a:prstGeom>
-          <a:solidFill>
-            <a:srgbClr val="192535"/>
-          </a:solidFill>
-          <a:ln/>
-          <a:effectLst>
-            <a:outerShdw blurRad="152400" dist="38100" dir="8100000" algn="bl" rotWithShape="0">
-              <a:srgbClr val="000000">
-                <a:alpha val="25000"/>
-              </a:srgbClr>
-            </a:outerShdw>
-          </a:effectLst>
-        </p:spPr>
-        <p:txBody>
-          <a:bodyPr/>
-          <a:lstStyle/>
-          <a:p>
-            <a:endParaRPr/>
-          </a:p>
-        </p:txBody>
-      </p:sp>
-      <p:sp>
-        <p:nvSpPr>
-          <p:cNvPr id="8" name="Bar2"/>
-          <p:cNvSpPr/>
-          <p:nvPr/>
-        </p:nvSpPr>
-        <p:spPr>
-          <a:xfrm>
-            <a:off x="3383280" y="1645920"/>
-            <a:ext cx="54864" cy="3657600"/>
-          </a:xfrm>
-          <a:prstGeom prst="rect">
-            <a:avLst/>
-          </a:prstGeom>
-          <a:solidFill>
-            <a:srgbClr val="0D9488"/>
-          </a:solidFill>
-          <a:ln/>
-        </p:spPr>
-        <p:txBody>
-          <a:bodyPr/>
-          <a:lstStyle/>
-          <a:p>
-            <a:endParaRPr/>
-          </a:p>
-        </p:txBody>
-      </p:sp>
-      <p:sp>
-        <p:nvSpPr>
-          <p:cNvPr id="9" name="TextC2"/>
-          <p:cNvSpPr/>
-          <p:nvPr/>
-        </p:nvSpPr>
-        <p:spPr>
-          <a:xfrm>
-            <a:off x="3566160" y="1737360"/>
-            <a:ext cx="2377440" cy="3474720"/>
-          </a:xfrm>
-          <a:prstGeom prst="rect">
-            <a:avLst/>
-          </a:prstGeom>
-          <a:noFill/>
-          <a:ln/>
-        </p:spPr>
-        <p:txBody>
-          <a:bodyPr wrap="square" rtlCol="0" anchor="t"/>
-          <a:lstStyle/>
-          <a:p>
-            <a:pPr marL="0" indent="0">
-              <a:lnSpc>
-                <a:spcPts val="2400"/>
-              </a:lnSpc>
-              <a:buNone/>
-            </a:pPr>
-            <a:r>
-              <a:rPr lang="en-US" sz="1600" b="1" dirty="0">
-                <a:solidFill>
-                  <a:srgbClr val="FFFFFF"/>
-                </a:solidFill>
-                <a:latin typeface="Calibri" pitchFamily="34" charset="0"/>
-              </a:rPr>
-              <a:t>Connection Map</a:t>
-            </a:r>
-          </a:p>
-          <a:p>
-            <a:pPr marL="0" indent="0">
-              <a:lnSpc>
-                <a:spcPts val="2400"/>
-              </a:lnSpc>
-              <a:buNone/>
-            </a:pPr>
-            <a:r>
-              <a:rPr lang="en-US" sz="1200" dirty="0">
-                <a:solidFill>
-                  <a:srgbClr val="94A3B8"/>
-                </a:solidFill>
-                <a:latin typeface="Calibri" pitchFamily="34" charset="0"/>
-              </a:rPr>
-              <a:t>Shows geographic concentration of emissions. Line thickness = CO₂ volume. Color = transport mode.</a:t>
-            </a:r>
-          </a:p>
-          <a:p>
-            <a:pPr marL="0" indent="0">
-              <a:lnSpc>
-                <a:spcPts val="2400"/>
-              </a:lnSpc>
-              <a:buNone/>
-            </a:pPr>
-            <a:r>
-              <a:rPr lang="en-US" sz="1200" dirty="0">
-                <a:solidFill>
-                  <a:srgbClr val="E2E8F0"/>
-                </a:solidFill>
-                <a:latin typeface="Calibri" pitchFamily="34" charset="0"/>
-              </a:rPr>
-              <a:t>Answers: Where do we fly most? Which routes drive the most CO₂?</a:t>
-            </a:r>
-          </a:p>
-        </p:txBody>
-      </p:sp>
-      <p:sp>
-        <p:nvSpPr>
-          <p:cNvPr id="10" name="Card3"/>
-          <p:cNvSpPr/>
-          <p:nvPr/>
-        </p:nvSpPr>
-        <p:spPr>
-          <a:xfrm>
-            <a:off x="6309360" y="1645920"/>
-            <a:ext cx="2651760" cy="3657600"/>
-          </a:xfrm>
-          <a:prstGeom prst="rect">
-            <a:avLst/>
-          </a:prstGeom>
-          <a:solidFill>
-            <a:srgbClr val="192535"/>
-          </a:solidFill>
-          <a:ln/>
-          <a:effectLst>
-            <a:outerShdw blurRad="152400" dist="38100" dir="8100000" algn="bl" rotWithShape="0">
-              <a:srgbClr val="000000">
-                <a:alpha val="25000"/>
-              </a:srgbClr>
-            </a:outerShdw>
-          </a:effectLst>
-        </p:spPr>
-        <p:txBody>
-          <a:bodyPr/>
-          <a:lstStyle/>
-          <a:p>
-            <a:endParaRPr/>
-          </a:p>
-        </p:txBody>
-      </p:sp>
-      <p:sp>
-        <p:nvSpPr>
-          <p:cNvPr id="11" name="Bar3"/>
-          <p:cNvSpPr/>
-          <p:nvPr/>
-        </p:nvSpPr>
-        <p:spPr>
-          <a:xfrm>
-            <a:off x="6309360" y="1645920"/>
-            <a:ext cx="54864" cy="3657600"/>
-          </a:xfrm>
-          <a:prstGeom prst="rect">
-            <a:avLst/>
-          </a:prstGeom>
-          <a:solidFill>
-            <a:srgbClr val="2563EB"/>
-          </a:solidFill>
-          <a:ln/>
-        </p:spPr>
-        <p:txBody>
-          <a:bodyPr/>
-          <a:lstStyle/>
-          <a:p>
-            <a:endParaRPr/>
-          </a:p>
-        </p:txBody>
-      </p:sp>
-      <p:sp>
-        <p:nvSpPr>
-          <p:cNvPr id="12" name="TextC3"/>
-          <p:cNvSpPr/>
-          <p:nvPr/>
-        </p:nvSpPr>
-        <p:spPr>
-          <a:xfrm>
-            <a:off x="6492240" y="1737360"/>
-            <a:ext cx="2377440" cy="3474720"/>
-          </a:xfrm>
-          <a:prstGeom prst="rect">
-            <a:avLst/>
-          </a:prstGeom>
-          <a:noFill/>
-          <a:ln/>
-        </p:spPr>
-        <p:txBody>
-          <a:bodyPr wrap="square" rtlCol="0" anchor="t"/>
-          <a:lstStyle/>
-          <a:p>
-            <a:pPr marL="0" indent="0">
-              <a:lnSpc>
-                <a:spcPts val="2400"/>
-              </a:lnSpc>
-              <a:buNone/>
-            </a:pPr>
-            <a:r>
-              <a:rPr lang="en-US" sz="1600" b="1" dirty="0">
-                <a:solidFill>
-                  <a:srgbClr val="FFFFFF"/>
-                </a:solidFill>
-                <a:latin typeface="Calibri" pitchFamily="34" charset="0"/>
-              </a:rPr>
-              <a:t>Ranked Table</a:t>
-            </a:r>
-          </a:p>
-          <a:p>
-            <a:pPr marL="0" indent="0">
-              <a:lnSpc>
-                <a:spcPts val="2400"/>
-              </a:lnSpc>
-              <a:buNone/>
-            </a:pPr>
-            <a:r>
-              <a:rPr lang="en-US" sz="1200" dirty="0">
-                <a:solidFill>
-                  <a:srgbClr val="94A3B8"/>
-                </a:solidFill>
-                <a:latin typeface="Calibri" pitchFamily="34" charset="0"/>
-              </a:rPr>
-              <a:t>Prioritises action: highest saving potential shown first. One row = one decision a manager can act on today.</a:t>
-            </a:r>
-          </a:p>
-          <a:p>
-            <a:pPr marL="0" indent="0">
-              <a:lnSpc>
-                <a:spcPts val="2400"/>
-              </a:lnSpc>
-              <a:buNone/>
-            </a:pPr>
-            <a:r>
-              <a:rPr lang="en-US" sz="1200" dirty="0">
-                <a:solidFill>
-                  <a:srgbClr val="E2E8F0"/>
-                </a:solidFill>
-                <a:latin typeface="Calibri" pitchFamily="34" charset="0"/>
-              </a:rPr>
-              <a:t>Consistent BU color palette carried across all charts for zero re-learning.</a:t>
-            </a:r>
-          </a:p>
-        </p:txBody>
-      </p:sp>
-      <p:sp>
-        <p:nvSpPr>
-          <p:cNvPr id="13" name="Card4"/>
-          <p:cNvSpPr/>
-          <p:nvPr/>
-        </p:nvSpPr>
-        <p:spPr>
-          <a:xfrm>
-            <a:off x="9235440" y="1645920"/>
-            <a:ext cx="2194560" cy="3657600"/>
-          </a:xfrm>
-          <a:prstGeom prst="rect">
-            <a:avLst/>
-          </a:prstGeom>
-          <a:solidFill>
-            <a:srgbClr val="192535"/>
-          </a:solidFill>
-          <a:ln/>
-          <a:effectLst>
-            <a:outerShdw blurRad="152400" dist="38100" dir="8100000" algn="bl" rotWithShape="0">
-              <a:srgbClr val="000000">
-                <a:alpha val="25000"/>
-              </a:srgbClr>
-            </a:outerShdw>
-          </a:effectLst>
-        </p:spPr>
-        <p:txBody>
-          <a:bodyPr/>
-          <a:lstStyle/>
-          <a:p>
-            <a:endParaRPr/>
-          </a:p>
-        </p:txBody>
-      </p:sp>
-      <p:sp>
-        <p:nvSpPr>
-          <p:cNvPr id="14" name="Bar4"/>
-          <p:cNvSpPr/>
-          <p:nvPr/>
-        </p:nvSpPr>
-        <p:spPr>
-          <a:xfrm>
-            <a:off x="9235440" y="1645920"/>
-            <a:ext cx="54864" cy="3657600"/>
-          </a:xfrm>
-          <a:prstGeom prst="rect">
-            <a:avLst/>
-          </a:prstGeom>
-          <a:solidFill>
-            <a:srgbClr val="10B981"/>
-          </a:solidFill>
-          <a:ln/>
-        </p:spPr>
-        <p:txBody>
-          <a:bodyPr/>
-          <a:lstStyle/>
-          <a:p>
-            <a:endParaRPr/>
-          </a:p>
-        </p:txBody>
-      </p:sp>
-      <p:sp>
-        <p:nvSpPr>
-          <p:cNvPr id="15" name="TextC4"/>
-          <p:cNvSpPr/>
-          <p:nvPr/>
-        </p:nvSpPr>
-        <p:spPr>
-          <a:xfrm>
-            <a:off x="9418320" y="1737360"/>
-            <a:ext cx="1920240" cy="3474720"/>
-          </a:xfrm>
-          <a:prstGeom prst="rect">
-            <a:avLst/>
-          </a:prstGeom>
-          <a:noFill/>
-          <a:ln/>
-        </p:spPr>
-        <p:txBody>
-          <a:bodyPr wrap="square" rtlCol="0" anchor="t"/>
-          <a:lstStyle/>
-          <a:p>
-            <a:pPr marL="0" indent="0">
-              <a:lnSpc>
-                <a:spcPts val="2400"/>
-              </a:lnSpc>
-              <a:buNone/>
-            </a:pPr>
-            <a:r>
-              <a:rPr lang="en-US" sz="1600" b="1" dirty="0">
-                <a:solidFill>
-                  <a:srgbClr val="FFFFFF"/>
-                </a:solidFill>
-                <a:latin typeface="Calibri" pitchFamily="34" charset="0"/>
-              </a:rPr>
-              <a:t>Narrative Flow</a:t>
-            </a:r>
-          </a:p>
-          <a:p>
-            <a:pPr marL="0" indent="0">
-              <a:lnSpc>
-                <a:spcPts val="2400"/>
-              </a:lnSpc>
-              <a:buNone/>
-            </a:pPr>
-            <a:r>
-              <a:rPr lang="en-US" sz="1200" dirty="0">
-                <a:solidFill>
-                  <a:srgbClr val="94A3B8"/>
-                </a:solidFill>
-                <a:latin typeface="Calibri" pitchFamily="34" charset="0"/>
-              </a:rPr>
-              <a:t>Overview → BU detail → Geography → Action. Each section answers one question before handing off to the next.</a:t>
-            </a:r>
-          </a:p>
-        </p:txBody>
-      </p:sp>
-    </p:spTree>
-  </p:cSld>
-  <p:clrMapOvr>
-    <a:masterClrMapping/>
-  </p:clrMapOvr>
-</p:sld>
-</file>
-
-<file path=ppt/slides/slide7.xml><?xml version="1.0" encoding="utf-8"?>
 <p:sld xmlns:a="http://schemas.openxmlformats.org/drawingml/2006/main" xmlns:r="http://schemas.openxmlformats.org/officeDocument/2006/relationships" xmlns:p="http://schemas.openxmlformats.org/presentationml/2006/main">
   <p:cSld name="Slide 5">
     <p:bg>
@@ -7097,7 +4980,7 @@
                 <a:ea typeface="Calibri" pitchFamily="34" charset="-122"/>
                 <a:cs typeface="Calibri" pitchFamily="34" charset="-120"/>
               </a:rPr>
-              <a:t>06  —  Workflow</a:t>
+              <a:t>04  —  Workflow</a:t>
             </a:r>
             <a:endParaRPr lang="en-US" sz="1000" dirty="0"/>
           </a:p>
@@ -10570,8 +8453,3124 @@
 </p:sld>
 </file>
 
+<file path=ppt/slides/slide7.xml><?xml version="1.0" encoding="utf-8"?>
+<p:sld xmlns:a="http://schemas.openxmlformats.org/drawingml/2006/main" xmlns:r="http://schemas.openxmlformats.org/officeDocument/2006/relationships" xmlns:p="http://schemas.openxmlformats.org/presentationml/2006/main" show="0">
+  <p:cSld name="Slide 4">
+    <p:bg>
+      <p:bgPr>
+        <a:solidFill>
+          <a:srgbClr val="0F1923"/>
+        </a:solidFill>
+        <a:effectLst/>
+      </p:bgPr>
+    </p:bg>
+    <p:spTree>
+      <p:nvGrpSpPr>
+        <p:cNvPr id="1" name=""/>
+        <p:cNvGrpSpPr/>
+        <p:nvPr/>
+      </p:nvGrpSpPr>
+      <p:grpSpPr>
+        <a:xfrm>
+          <a:off x="0" y="0"/>
+          <a:ext cx="0" cy="0"/>
+          <a:chOff x="0" y="0"/>
+          <a:chExt cx="0" cy="0"/>
+        </a:xfrm>
+      </p:grpSpPr>
+      <p:sp>
+        <p:nvSpPr>
+          <p:cNvPr id="2" name="Text 0"/>
+          <p:cNvSpPr/>
+          <p:nvPr/>
+        </p:nvSpPr>
+        <p:spPr>
+          <a:xfrm>
+            <a:off x="457200" y="274320"/>
+            <a:ext cx="10972800" cy="365760"/>
+          </a:xfrm>
+          <a:prstGeom prst="rect">
+            <a:avLst/>
+          </a:prstGeom>
+          <a:noFill/>
+          <a:ln/>
+        </p:spPr>
+        <p:txBody>
+          <a:bodyPr wrap="square" rtlCol="0" anchor="ctr"/>
+          <a:lstStyle/>
+          <a:p>
+            <a:pPr marL="0" indent="0">
+              <a:buNone/>
+            </a:pPr>
+            <a:r>
+              <a:rPr lang="en-US" sz="1000" b="1" kern="0" spc="300" dirty="0">
+                <a:solidFill>
+                  <a:srgbClr val="0D9488"/>
+                </a:solidFill>
+                <a:latin typeface="Calibri" pitchFamily="34" charset="0"/>
+                <a:ea typeface="Calibri" pitchFamily="34" charset="-122"/>
+                <a:cs typeface="Calibri" pitchFamily="34" charset="-120"/>
+              </a:rPr>
+              <a:t>04  —  BUDGET COMPLIANCE</a:t>
+            </a:r>
+            <a:endParaRPr lang="en-US" sz="1000" dirty="0"/>
+          </a:p>
+        </p:txBody>
+      </p:sp>
+      <p:sp>
+        <p:nvSpPr>
+          <p:cNvPr id="3" name="Text 1"/>
+          <p:cNvSpPr/>
+          <p:nvPr/>
+        </p:nvSpPr>
+        <p:spPr>
+          <a:xfrm>
+            <a:off x="457200" y="640080"/>
+            <a:ext cx="8229600" cy="731520"/>
+          </a:xfrm>
+          <a:prstGeom prst="rect">
+            <a:avLst/>
+          </a:prstGeom>
+          <a:noFill/>
+          <a:ln/>
+        </p:spPr>
+        <p:txBody>
+          <a:bodyPr wrap="square" rtlCol="0" anchor="ctr"/>
+          <a:lstStyle/>
+          <a:p>
+            <a:pPr marL="0" indent="0">
+              <a:buNone/>
+            </a:pPr>
+            <a:r>
+              <a:rPr lang="en-US" sz="3800" b="1" dirty="0">
+                <a:solidFill>
+                  <a:srgbClr val="FFFFFF"/>
+                </a:solidFill>
+                <a:latin typeface="Calibri" pitchFamily="34" charset="0"/>
+                <a:ea typeface="Calibri" pitchFamily="34" charset="-122"/>
+                <a:cs typeface="Calibri" pitchFamily="34" charset="-120"/>
+              </a:rPr>
+              <a:t>Know Your Numbers Instantly</a:t>
+            </a:r>
+            <a:endParaRPr lang="en-US" sz="3800" dirty="0"/>
+          </a:p>
+        </p:txBody>
+      </p:sp>
+      <p:sp>
+        <p:nvSpPr>
+          <p:cNvPr id="4" name="Shape 2"/>
+          <p:cNvSpPr/>
+          <p:nvPr/>
+        </p:nvSpPr>
+        <p:spPr>
+          <a:xfrm>
+            <a:off x="457200" y="1508760"/>
+            <a:ext cx="2606040" cy="1508760"/>
+          </a:xfrm>
+          <a:prstGeom prst="rect">
+            <a:avLst/>
+          </a:prstGeom>
+          <a:solidFill>
+            <a:srgbClr val="192535"/>
+          </a:solidFill>
+          <a:ln/>
+          <a:effectLst>
+            <a:outerShdw blurRad="152400" dist="38100" dir="8100000" algn="bl" rotWithShape="0">
+              <a:srgbClr val="000000">
+                <a:alpha val="25000"/>
+              </a:srgbClr>
+            </a:outerShdw>
+          </a:effectLst>
+        </p:spPr>
+        <p:txBody>
+          <a:bodyPr/>
+          <a:lstStyle/>
+          <a:p>
+            <a:endParaRPr/>
+          </a:p>
+        </p:txBody>
+      </p:sp>
+      <p:sp>
+        <p:nvSpPr>
+          <p:cNvPr id="5" name="Shape 3"/>
+          <p:cNvSpPr/>
+          <p:nvPr/>
+        </p:nvSpPr>
+        <p:spPr>
+          <a:xfrm>
+            <a:off x="457200" y="1508760"/>
+            <a:ext cx="2606040" cy="64008"/>
+          </a:xfrm>
+          <a:prstGeom prst="rect">
+            <a:avLst/>
+          </a:prstGeom>
+          <a:solidFill>
+            <a:srgbClr val="EF4444"/>
+          </a:solidFill>
+          <a:ln/>
+        </p:spPr>
+        <p:txBody>
+          <a:bodyPr/>
+          <a:lstStyle/>
+          <a:p>
+            <a:endParaRPr/>
+          </a:p>
+        </p:txBody>
+      </p:sp>
+      <p:sp>
+        <p:nvSpPr>
+          <p:cNvPr id="6" name="Text 4"/>
+          <p:cNvSpPr/>
+          <p:nvPr/>
+        </p:nvSpPr>
+        <p:spPr>
+          <a:xfrm>
+            <a:off x="457200" y="1664208"/>
+            <a:ext cx="2606040" cy="658368"/>
+          </a:xfrm>
+          <a:prstGeom prst="rect">
+            <a:avLst/>
+          </a:prstGeom>
+          <a:noFill/>
+          <a:ln/>
+        </p:spPr>
+        <p:txBody>
+          <a:bodyPr wrap="square" rtlCol="0" anchor="ctr"/>
+          <a:lstStyle/>
+          <a:p>
+            <a:pPr marL="0" indent="0" algn="ctr">
+              <a:buNone/>
+            </a:pPr>
+            <a:r>
+              <a:rPr lang="en-US" sz="3000" b="1" dirty="0">
+                <a:solidFill>
+                  <a:srgbClr val="EF4444"/>
+                </a:solidFill>
+                <a:latin typeface="Calibri" pitchFamily="34" charset="0"/>
+                <a:ea typeface="Calibri" pitchFamily="34" charset="-122"/>
+                <a:cs typeface="Calibri" pitchFamily="34" charset="-120"/>
+              </a:rPr>
+              <a:t>847 t</a:t>
+            </a:r>
+            <a:endParaRPr lang="en-US" sz="3000" dirty="0"/>
+          </a:p>
+        </p:txBody>
+      </p:sp>
+      <p:sp>
+        <p:nvSpPr>
+          <p:cNvPr id="7" name="Text 5"/>
+          <p:cNvSpPr/>
+          <p:nvPr/>
+        </p:nvSpPr>
+        <p:spPr>
+          <a:xfrm>
+            <a:off x="457200" y="2286000"/>
+            <a:ext cx="2606040" cy="320040"/>
+          </a:xfrm>
+          <a:prstGeom prst="rect">
+            <a:avLst/>
+          </a:prstGeom>
+          <a:noFill/>
+          <a:ln/>
+        </p:spPr>
+        <p:txBody>
+          <a:bodyPr wrap="square" rtlCol="0" anchor="ctr"/>
+          <a:lstStyle/>
+          <a:p>
+            <a:pPr marL="0" indent="0" algn="ctr">
+              <a:buNone/>
+            </a:pPr>
+            <a:r>
+              <a:rPr lang="en-US" sz="1100" dirty="0">
+                <a:solidFill>
+                  <a:srgbClr val="94A3B8"/>
+                </a:solidFill>
+                <a:latin typeface="Calibri" pitchFamily="34" charset="0"/>
+                <a:ea typeface="Calibri" pitchFamily="34" charset="-122"/>
+                <a:cs typeface="Calibri" pitchFamily="34" charset="-120"/>
+              </a:rPr>
+              <a:t>Total CO₂</a:t>
+            </a:r>
+            <a:endParaRPr lang="en-US" sz="1100" dirty="0"/>
+          </a:p>
+        </p:txBody>
+      </p:sp>
+      <p:sp>
+        <p:nvSpPr>
+          <p:cNvPr id="8" name="Text 6"/>
+          <p:cNvSpPr/>
+          <p:nvPr/>
+        </p:nvSpPr>
+        <p:spPr>
+          <a:xfrm>
+            <a:off x="457200" y="2578608"/>
+            <a:ext cx="2606040" cy="274320"/>
+          </a:xfrm>
+          <a:prstGeom prst="rect">
+            <a:avLst/>
+          </a:prstGeom>
+          <a:noFill/>
+          <a:ln/>
+        </p:spPr>
+        <p:txBody>
+          <a:bodyPr wrap="square" rtlCol="0" anchor="ctr"/>
+          <a:lstStyle/>
+          <a:p>
+            <a:pPr marL="0" indent="0" algn="ctr">
+              <a:buNone/>
+            </a:pPr>
+            <a:r>
+              <a:rPr lang="en-US" sz="1000" dirty="0">
+                <a:solidFill>
+                  <a:srgbClr val="E2E8F0"/>
+                </a:solidFill>
+                <a:latin typeface="Calibri" pitchFamily="34" charset="0"/>
+                <a:ea typeface="Calibri" pitchFamily="34" charset="-122"/>
+                <a:cs typeface="Calibri" pitchFamily="34" charset="-120"/>
+              </a:rPr>
+              <a:t>+12% vs budget</a:t>
+            </a:r>
+            <a:endParaRPr lang="en-US" sz="1000" dirty="0"/>
+          </a:p>
+        </p:txBody>
+      </p:sp>
+      <p:sp>
+        <p:nvSpPr>
+          <p:cNvPr id="9" name="Shape 7"/>
+          <p:cNvSpPr/>
+          <p:nvPr/>
+        </p:nvSpPr>
+        <p:spPr>
+          <a:xfrm>
+            <a:off x="3246120" y="1508760"/>
+            <a:ext cx="2606040" cy="1508760"/>
+          </a:xfrm>
+          <a:prstGeom prst="rect">
+            <a:avLst/>
+          </a:prstGeom>
+          <a:solidFill>
+            <a:srgbClr val="192535"/>
+          </a:solidFill>
+          <a:ln/>
+          <a:effectLst>
+            <a:outerShdw blurRad="152400" dist="38100" dir="8100000" algn="bl" rotWithShape="0">
+              <a:srgbClr val="000000">
+                <a:alpha val="25000"/>
+              </a:srgbClr>
+            </a:outerShdw>
+          </a:effectLst>
+        </p:spPr>
+        <p:txBody>
+          <a:bodyPr/>
+          <a:lstStyle/>
+          <a:p>
+            <a:endParaRPr/>
+          </a:p>
+        </p:txBody>
+      </p:sp>
+      <p:sp>
+        <p:nvSpPr>
+          <p:cNvPr id="10" name="Shape 8"/>
+          <p:cNvSpPr/>
+          <p:nvPr/>
+        </p:nvSpPr>
+        <p:spPr>
+          <a:xfrm>
+            <a:off x="3246120" y="1508760"/>
+            <a:ext cx="2606040" cy="64008"/>
+          </a:xfrm>
+          <a:prstGeom prst="rect">
+            <a:avLst/>
+          </a:prstGeom>
+          <a:solidFill>
+            <a:srgbClr val="EF4444"/>
+          </a:solidFill>
+          <a:ln/>
+        </p:spPr>
+        <p:txBody>
+          <a:bodyPr/>
+          <a:lstStyle/>
+          <a:p>
+            <a:endParaRPr/>
+          </a:p>
+        </p:txBody>
+      </p:sp>
+      <p:sp>
+        <p:nvSpPr>
+          <p:cNvPr id="11" name="Text 9"/>
+          <p:cNvSpPr/>
+          <p:nvPr/>
+        </p:nvSpPr>
+        <p:spPr>
+          <a:xfrm>
+            <a:off x="3246120" y="1664208"/>
+            <a:ext cx="2606040" cy="658368"/>
+          </a:xfrm>
+          <a:prstGeom prst="rect">
+            <a:avLst/>
+          </a:prstGeom>
+          <a:noFill/>
+          <a:ln/>
+        </p:spPr>
+        <p:txBody>
+          <a:bodyPr wrap="square" rtlCol="0" anchor="ctr"/>
+          <a:lstStyle/>
+          <a:p>
+            <a:pPr marL="0" indent="0" algn="ctr">
+              <a:buNone/>
+            </a:pPr>
+            <a:r>
+              <a:rPr lang="en-US" sz="3000" b="1" dirty="0">
+                <a:solidFill>
+                  <a:srgbClr val="EF4444"/>
+                </a:solidFill>
+                <a:latin typeface="Calibri" pitchFamily="34" charset="0"/>
+                <a:ea typeface="Calibri" pitchFamily="34" charset="-122"/>
+                <a:cs typeface="Calibri" pitchFamily="34" charset="-120"/>
+              </a:rPr>
+              <a:t>112%</a:t>
+            </a:r>
+            <a:endParaRPr lang="en-US" sz="3000" dirty="0"/>
+          </a:p>
+        </p:txBody>
+      </p:sp>
+      <p:sp>
+        <p:nvSpPr>
+          <p:cNvPr id="12" name="Text 10"/>
+          <p:cNvSpPr/>
+          <p:nvPr/>
+        </p:nvSpPr>
+        <p:spPr>
+          <a:xfrm>
+            <a:off x="3246120" y="2286000"/>
+            <a:ext cx="2606040" cy="320040"/>
+          </a:xfrm>
+          <a:prstGeom prst="rect">
+            <a:avLst/>
+          </a:prstGeom>
+          <a:noFill/>
+          <a:ln/>
+        </p:spPr>
+        <p:txBody>
+          <a:bodyPr wrap="square" rtlCol="0" anchor="ctr"/>
+          <a:lstStyle/>
+          <a:p>
+            <a:pPr marL="0" indent="0" algn="ctr">
+              <a:buNone/>
+            </a:pPr>
+            <a:r>
+              <a:rPr lang="en-US" sz="1100" dirty="0">
+                <a:solidFill>
+                  <a:srgbClr val="94A3B8"/>
+                </a:solidFill>
+                <a:latin typeface="Calibri" pitchFamily="34" charset="0"/>
+                <a:ea typeface="Calibri" pitchFamily="34" charset="-122"/>
+                <a:cs typeface="Calibri" pitchFamily="34" charset="-120"/>
+              </a:rPr>
+              <a:t>Budget Used</a:t>
+            </a:r>
+            <a:endParaRPr lang="en-US" sz="1100" dirty="0"/>
+          </a:p>
+        </p:txBody>
+      </p:sp>
+      <p:sp>
+        <p:nvSpPr>
+          <p:cNvPr id="13" name="Text 11"/>
+          <p:cNvSpPr/>
+          <p:nvPr/>
+        </p:nvSpPr>
+        <p:spPr>
+          <a:xfrm>
+            <a:off x="3246120" y="2578608"/>
+            <a:ext cx="2606040" cy="274320"/>
+          </a:xfrm>
+          <a:prstGeom prst="rect">
+            <a:avLst/>
+          </a:prstGeom>
+          <a:noFill/>
+          <a:ln/>
+        </p:spPr>
+        <p:txBody>
+          <a:bodyPr wrap="square" rtlCol="0" anchor="ctr"/>
+          <a:lstStyle/>
+          <a:p>
+            <a:pPr marL="0" indent="0" algn="ctr">
+              <a:buNone/>
+            </a:pPr>
+            <a:r>
+              <a:rPr lang="en-US" sz="1000" dirty="0">
+                <a:solidFill>
+                  <a:srgbClr val="E2E8F0"/>
+                </a:solidFill>
+                <a:latin typeface="Calibri" pitchFamily="34" charset="0"/>
+                <a:ea typeface="Calibri" pitchFamily="34" charset="-122"/>
+                <a:cs typeface="Calibri" pitchFamily="34" charset="-120"/>
+              </a:rPr>
+              <a:t>Combined BUs</a:t>
+            </a:r>
+            <a:endParaRPr lang="en-US" sz="1000" dirty="0"/>
+          </a:p>
+        </p:txBody>
+      </p:sp>
+      <p:sp>
+        <p:nvSpPr>
+          <p:cNvPr id="14" name="Shape 12"/>
+          <p:cNvSpPr/>
+          <p:nvPr/>
+        </p:nvSpPr>
+        <p:spPr>
+          <a:xfrm>
+            <a:off x="6035040" y="1508760"/>
+            <a:ext cx="2606040" cy="1508760"/>
+          </a:xfrm>
+          <a:prstGeom prst="rect">
+            <a:avLst/>
+          </a:prstGeom>
+          <a:solidFill>
+            <a:srgbClr val="192535"/>
+          </a:solidFill>
+          <a:ln/>
+          <a:effectLst>
+            <a:outerShdw blurRad="152400" dist="38100" dir="8100000" algn="bl" rotWithShape="0">
+              <a:srgbClr val="000000">
+                <a:alpha val="25000"/>
+              </a:srgbClr>
+            </a:outerShdw>
+          </a:effectLst>
+        </p:spPr>
+        <p:txBody>
+          <a:bodyPr/>
+          <a:lstStyle/>
+          <a:p>
+            <a:endParaRPr/>
+          </a:p>
+        </p:txBody>
+      </p:sp>
+      <p:sp>
+        <p:nvSpPr>
+          <p:cNvPr id="15" name="Shape 13"/>
+          <p:cNvSpPr/>
+          <p:nvPr/>
+        </p:nvSpPr>
+        <p:spPr>
+          <a:xfrm>
+            <a:off x="6035040" y="1508760"/>
+            <a:ext cx="2606040" cy="64008"/>
+          </a:xfrm>
+          <a:prstGeom prst="rect">
+            <a:avLst/>
+          </a:prstGeom>
+          <a:solidFill>
+            <a:srgbClr val="10B981"/>
+          </a:solidFill>
+          <a:ln/>
+        </p:spPr>
+        <p:txBody>
+          <a:bodyPr/>
+          <a:lstStyle/>
+          <a:p>
+            <a:endParaRPr/>
+          </a:p>
+        </p:txBody>
+      </p:sp>
+      <p:sp>
+        <p:nvSpPr>
+          <p:cNvPr id="16" name="Text 14"/>
+          <p:cNvSpPr/>
+          <p:nvPr/>
+        </p:nvSpPr>
+        <p:spPr>
+          <a:xfrm>
+            <a:off x="6035040" y="1664208"/>
+            <a:ext cx="2606040" cy="658368"/>
+          </a:xfrm>
+          <a:prstGeom prst="rect">
+            <a:avLst/>
+          </a:prstGeom>
+          <a:noFill/>
+          <a:ln/>
+        </p:spPr>
+        <p:txBody>
+          <a:bodyPr wrap="square" rtlCol="0" anchor="ctr"/>
+          <a:lstStyle/>
+          <a:p>
+            <a:pPr marL="0" indent="0" algn="ctr">
+              <a:buNone/>
+            </a:pPr>
+            <a:r>
+              <a:rPr lang="en-US" sz="3000" b="1" dirty="0">
+                <a:solidFill>
+                  <a:srgbClr val="10B981"/>
+                </a:solidFill>
+                <a:latin typeface="Calibri" pitchFamily="34" charset="0"/>
+                <a:ea typeface="Calibri" pitchFamily="34" charset="-122"/>
+                <a:cs typeface="Calibri" pitchFamily="34" charset="-120"/>
+              </a:rPr>
+              <a:t>−143 t</a:t>
+            </a:r>
+            <a:endParaRPr lang="en-US" sz="3000" dirty="0"/>
+          </a:p>
+        </p:txBody>
+      </p:sp>
+      <p:sp>
+        <p:nvSpPr>
+          <p:cNvPr id="17" name="Text 15"/>
+          <p:cNvSpPr/>
+          <p:nvPr/>
+        </p:nvSpPr>
+        <p:spPr>
+          <a:xfrm>
+            <a:off x="6035040" y="2286000"/>
+            <a:ext cx="2606040" cy="320040"/>
+          </a:xfrm>
+          <a:prstGeom prst="rect">
+            <a:avLst/>
+          </a:prstGeom>
+          <a:noFill/>
+          <a:ln/>
+        </p:spPr>
+        <p:txBody>
+          <a:bodyPr wrap="square" rtlCol="0" anchor="ctr"/>
+          <a:lstStyle/>
+          <a:p>
+            <a:pPr marL="0" indent="0" algn="ctr">
+              <a:buNone/>
+            </a:pPr>
+            <a:r>
+              <a:rPr lang="en-US" sz="1100" dirty="0">
+                <a:solidFill>
+                  <a:srgbClr val="94A3B8"/>
+                </a:solidFill>
+                <a:latin typeface="Calibri" pitchFamily="34" charset="0"/>
+                <a:ea typeface="Calibri" pitchFamily="34" charset="-122"/>
+                <a:cs typeface="Calibri" pitchFamily="34" charset="-120"/>
+              </a:rPr>
+              <a:t>Saving Potential</a:t>
+            </a:r>
+            <a:endParaRPr lang="en-US" sz="1100" dirty="0"/>
+          </a:p>
+        </p:txBody>
+      </p:sp>
+      <p:sp>
+        <p:nvSpPr>
+          <p:cNvPr id="18" name="Text 16"/>
+          <p:cNvSpPr/>
+          <p:nvPr/>
+        </p:nvSpPr>
+        <p:spPr>
+          <a:xfrm>
+            <a:off x="6035040" y="2578608"/>
+            <a:ext cx="2606040" cy="274320"/>
+          </a:xfrm>
+          <a:prstGeom prst="rect">
+            <a:avLst/>
+          </a:prstGeom>
+          <a:noFill/>
+          <a:ln/>
+        </p:spPr>
+        <p:txBody>
+          <a:bodyPr wrap="square" rtlCol="0" anchor="ctr"/>
+          <a:lstStyle/>
+          <a:p>
+            <a:pPr marL="0" indent="0" algn="ctr">
+              <a:buNone/>
+            </a:pPr>
+            <a:r>
+              <a:rPr lang="en-US" sz="1000" dirty="0">
+                <a:solidFill>
+                  <a:srgbClr val="E2E8F0"/>
+                </a:solidFill>
+                <a:latin typeface="Calibri" pitchFamily="34" charset="0"/>
+                <a:ea typeface="Calibri" pitchFamily="34" charset="-122"/>
+                <a:cs typeface="Calibri" pitchFamily="34" charset="-120"/>
+              </a:rPr>
+              <a:t>via mode shift</a:t>
+            </a:r>
+            <a:endParaRPr lang="en-US" sz="1000" dirty="0"/>
+          </a:p>
+        </p:txBody>
+      </p:sp>
+      <p:sp>
+        <p:nvSpPr>
+          <p:cNvPr id="19" name="Shape 17"/>
+          <p:cNvSpPr/>
+          <p:nvPr/>
+        </p:nvSpPr>
+        <p:spPr>
+          <a:xfrm>
+            <a:off x="8823960" y="1508760"/>
+            <a:ext cx="2606040" cy="1508760"/>
+          </a:xfrm>
+          <a:prstGeom prst="rect">
+            <a:avLst/>
+          </a:prstGeom>
+          <a:solidFill>
+            <a:srgbClr val="192535"/>
+          </a:solidFill>
+          <a:ln/>
+          <a:effectLst>
+            <a:outerShdw blurRad="152400" dist="38100" dir="8100000" algn="bl" rotWithShape="0">
+              <a:srgbClr val="000000">
+                <a:alpha val="25000"/>
+              </a:srgbClr>
+            </a:outerShdw>
+          </a:effectLst>
+        </p:spPr>
+        <p:txBody>
+          <a:bodyPr/>
+          <a:lstStyle/>
+          <a:p>
+            <a:endParaRPr/>
+          </a:p>
+        </p:txBody>
+      </p:sp>
+      <p:sp>
+        <p:nvSpPr>
+          <p:cNvPr id="20" name="Shape 18"/>
+          <p:cNvSpPr/>
+          <p:nvPr/>
+        </p:nvSpPr>
+        <p:spPr>
+          <a:xfrm>
+            <a:off x="8823960" y="1508760"/>
+            <a:ext cx="2606040" cy="64008"/>
+          </a:xfrm>
+          <a:prstGeom prst="rect">
+            <a:avLst/>
+          </a:prstGeom>
+          <a:solidFill>
+            <a:srgbClr val="0D9488"/>
+          </a:solidFill>
+          <a:ln/>
+        </p:spPr>
+        <p:txBody>
+          <a:bodyPr/>
+          <a:lstStyle/>
+          <a:p>
+            <a:endParaRPr/>
+          </a:p>
+        </p:txBody>
+      </p:sp>
+      <p:sp>
+        <p:nvSpPr>
+          <p:cNvPr id="21" name="Text 19"/>
+          <p:cNvSpPr/>
+          <p:nvPr/>
+        </p:nvSpPr>
+        <p:spPr>
+          <a:xfrm>
+            <a:off x="8823960" y="1664208"/>
+            <a:ext cx="2606040" cy="658368"/>
+          </a:xfrm>
+          <a:prstGeom prst="rect">
+            <a:avLst/>
+          </a:prstGeom>
+          <a:noFill/>
+          <a:ln/>
+        </p:spPr>
+        <p:txBody>
+          <a:bodyPr wrap="square" rtlCol="0" anchor="ctr"/>
+          <a:lstStyle/>
+          <a:p>
+            <a:pPr marL="0" indent="0" algn="ctr">
+              <a:buNone/>
+            </a:pPr>
+            <a:r>
+              <a:rPr lang="en-US" sz="3000" b="1" dirty="0">
+                <a:solidFill>
+                  <a:srgbClr val="0D9488"/>
+                </a:solidFill>
+                <a:latin typeface="Calibri" pitchFamily="34" charset="0"/>
+                <a:ea typeface="Calibri" pitchFamily="34" charset="-122"/>
+                <a:cs typeface="Calibri" pitchFamily="34" charset="-120"/>
+              </a:rPr>
+              <a:t>1,118</a:t>
+            </a:r>
+            <a:endParaRPr lang="en-US" sz="3000" dirty="0"/>
+          </a:p>
+        </p:txBody>
+      </p:sp>
+      <p:sp>
+        <p:nvSpPr>
+          <p:cNvPr id="22" name="Text 20"/>
+          <p:cNvSpPr/>
+          <p:nvPr/>
+        </p:nvSpPr>
+        <p:spPr>
+          <a:xfrm>
+            <a:off x="8823960" y="2286000"/>
+            <a:ext cx="2606040" cy="320040"/>
+          </a:xfrm>
+          <a:prstGeom prst="rect">
+            <a:avLst/>
+          </a:prstGeom>
+          <a:noFill/>
+          <a:ln/>
+        </p:spPr>
+        <p:txBody>
+          <a:bodyPr wrap="square" rtlCol="0" anchor="ctr"/>
+          <a:lstStyle/>
+          <a:p>
+            <a:pPr marL="0" indent="0" algn="ctr">
+              <a:buNone/>
+            </a:pPr>
+            <a:r>
+              <a:rPr lang="en-US" sz="1100" dirty="0">
+                <a:solidFill>
+                  <a:srgbClr val="94A3B8"/>
+                </a:solidFill>
+                <a:latin typeface="Calibri" pitchFamily="34" charset="0"/>
+                <a:ea typeface="Calibri" pitchFamily="34" charset="-122"/>
+                <a:cs typeface="Calibri" pitchFamily="34" charset="-120"/>
+              </a:rPr>
+              <a:t>Trips Analysed</a:t>
+            </a:r>
+            <a:endParaRPr lang="en-US" sz="1100" dirty="0"/>
+          </a:p>
+        </p:txBody>
+      </p:sp>
+      <p:sp>
+        <p:nvSpPr>
+          <p:cNvPr id="23" name="Text 21"/>
+          <p:cNvSpPr/>
+          <p:nvPr/>
+        </p:nvSpPr>
+        <p:spPr>
+          <a:xfrm>
+            <a:off x="8823960" y="2578608"/>
+            <a:ext cx="2606040" cy="274320"/>
+          </a:xfrm>
+          <a:prstGeom prst="rect">
+            <a:avLst/>
+          </a:prstGeom>
+          <a:noFill/>
+          <a:ln/>
+        </p:spPr>
+        <p:txBody>
+          <a:bodyPr wrap="square" rtlCol="0" anchor="ctr"/>
+          <a:lstStyle/>
+          <a:p>
+            <a:pPr marL="0" indent="0" algn="ctr">
+              <a:buNone/>
+            </a:pPr>
+            <a:r>
+              <a:rPr lang="en-US" sz="1000" dirty="0">
+                <a:solidFill>
+                  <a:srgbClr val="E2E8F0"/>
+                </a:solidFill>
+                <a:latin typeface="Calibri" pitchFamily="34" charset="0"/>
+                <a:ea typeface="Calibri" pitchFamily="34" charset="-122"/>
+                <a:cs typeface="Calibri" pitchFamily="34" charset="-120"/>
+              </a:rPr>
+              <a:t>avg 758 kg/trip</a:t>
+            </a:r>
+            <a:endParaRPr lang="en-US" sz="1000" dirty="0"/>
+          </a:p>
+        </p:txBody>
+      </p:sp>
+      <p:sp>
+        <p:nvSpPr>
+          <p:cNvPr id="100" name="GaugeBg_BU1"/>
+          <p:cNvSpPr/>
+          <p:nvPr/>
+        </p:nvSpPr>
+        <p:spPr>
+          <a:xfrm>
+            <a:off x="882396" y="3276120"/>
+            <a:ext cx="1984247" cy="1984247"/>
+          </a:xfrm>
+          <a:prstGeom prst="arc">
+            <a:avLst>
+              <a:gd name="adj1" fmla="val 10800000"/>
+              <a:gd name="adj2" fmla="val 21600000"/>
+            </a:avLst>
+          </a:prstGeom>
+          <a:solidFill>
+            <a:srgbClr val="2A3A4A"/>
+          </a:solidFill>
+          <a:ln w="180000">
+            <a:solidFill>
+              <a:srgbClr val="2A3A4A"/>
+            </a:solidFill>
+          </a:ln>
+        </p:spPr>
+        <p:txBody>
+          <a:bodyPr/>
+          <a:lstStyle/>
+          <a:p>
+            <a:endParaRPr/>
+          </a:p>
+        </p:txBody>
+      </p:sp>
+      <p:sp>
+        <p:nvSpPr>
+          <p:cNvPr id="101" name="GaugeFg_BU1"/>
+          <p:cNvSpPr/>
+          <p:nvPr/>
+        </p:nvSpPr>
+        <p:spPr>
+          <a:xfrm>
+            <a:off x="882396" y="3276120"/>
+            <a:ext cx="1984247" cy="1984247"/>
+          </a:xfrm>
+          <a:prstGeom prst="arc">
+            <a:avLst>
+              <a:gd name="adj1" fmla="val 10800000"/>
+              <a:gd name="adj2" fmla="val 21600000"/>
+            </a:avLst>
+          </a:prstGeom>
+          <a:solidFill>
+            <a:srgbClr val="EF4444"/>
+          </a:solidFill>
+          <a:ln w="180000">
+            <a:solidFill>
+              <a:srgbClr val="EF4444"/>
+            </a:solidFill>
+          </a:ln>
+        </p:spPr>
+        <p:txBody>
+          <a:bodyPr/>
+          <a:lstStyle/>
+          <a:p>
+            <a:endParaRPr/>
+          </a:p>
+        </p:txBody>
+      </p:sp>
+      <p:sp>
+        <p:nvSpPr>
+          <p:cNvPr id="102" name="GaugeHole_BU1"/>
+          <p:cNvSpPr/>
+          <p:nvPr/>
+        </p:nvSpPr>
+        <p:spPr>
+          <a:xfrm>
+            <a:off x="1299088" y="3692812"/>
+            <a:ext cx="1150863" cy="1150863"/>
+          </a:xfrm>
+          <a:prstGeom prst="ellipse">
+            <a:avLst/>
+          </a:prstGeom>
+          <a:solidFill>
+            <a:srgbClr val="0F1923"/>
+          </a:solidFill>
+          <a:ln w="0">
+            <a:noFill/>
+          </a:ln>
+        </p:spPr>
+        <p:txBody>
+          <a:bodyPr/>
+          <a:lstStyle/>
+          <a:p>
+            <a:endParaRPr/>
+          </a:p>
+        </p:txBody>
+      </p:sp>
+      <p:sp>
+        <p:nvSpPr>
+          <p:cNvPr id="103" name="GaugeLabel_BU1"/>
+          <p:cNvSpPr/>
+          <p:nvPr/>
+        </p:nvSpPr>
+        <p:spPr>
+          <a:xfrm>
+            <a:off x="457200" y="3772181"/>
+            <a:ext cx="2834640" cy="436534"/>
+          </a:xfrm>
+          <a:prstGeom prst="rect">
+            <a:avLst/>
+          </a:prstGeom>
+          <a:noFill/>
+          <a:ln/>
+        </p:spPr>
+        <p:txBody>
+          <a:bodyPr wrap="square" rtlCol="0" anchor="ctr"/>
+          <a:lstStyle/>
+          <a:p>
+            <a:pPr marL="0" indent="0" algn="ctr">
+              <a:buNone/>
+            </a:pPr>
+            <a:r>
+              <a:rPr lang="en-US" sz="2200" b="1" dirty="0">
+                <a:solidFill>
+                  <a:srgbClr val="EF4444"/>
+                </a:solidFill>
+                <a:latin typeface="Calibri" pitchFamily="34" charset="0"/>
+              </a:rPr>
+              <a:t>106%</a:t>
+            </a:r>
+          </a:p>
+        </p:txBody>
+      </p:sp>
+      <p:sp>
+        <p:nvSpPr>
+          <p:cNvPr id="104" name="GaugeName_BU1"/>
+          <p:cNvSpPr/>
+          <p:nvPr/>
+        </p:nvSpPr>
+        <p:spPr>
+          <a:xfrm>
+            <a:off x="457200" y="4208716"/>
+            <a:ext cx="2834640" cy="357164"/>
+          </a:xfrm>
+          <a:prstGeom prst="rect">
+            <a:avLst/>
+          </a:prstGeom>
+          <a:noFill/>
+          <a:ln/>
+        </p:spPr>
+        <p:txBody>
+          <a:bodyPr wrap="square" rtlCol="0" anchor="ctr"/>
+          <a:lstStyle/>
+          <a:p>
+            <a:pPr marL="0" indent="0" algn="ctr">
+              <a:buNone/>
+            </a:pPr>
+            <a:r>
+              <a:rPr lang="en-US" sz="1300" b="1" dirty="0">
+                <a:solidFill>
+                  <a:srgbClr val="2563EB"/>
+                </a:solidFill>
+                <a:latin typeface="Calibri" pitchFamily="34" charset="0"/>
+              </a:rPr>
+              <a:t>BU1</a:t>
+            </a:r>
+            <a:r>
+              <a:rPr lang="en-US" sz="1100" dirty="0">
+                <a:solidFill>
+                  <a:srgbClr val="94A3B8"/>
+                </a:solidFill>
+                <a:latin typeface="Calibri" pitchFamily="34" charset="0"/>
+              </a:rPr>
+              <a:t>  190 t / 180 t</a:t>
+            </a:r>
+          </a:p>
+        </p:txBody>
+      </p:sp>
+      <p:sp>
+        <p:nvSpPr>
+          <p:cNvPr id="105" name="GaugeStatus_BU1"/>
+          <p:cNvSpPr/>
+          <p:nvPr/>
+        </p:nvSpPr>
+        <p:spPr>
+          <a:xfrm>
+            <a:off x="465704" y="4466667"/>
+            <a:ext cx="2834640" cy="317479"/>
+          </a:xfrm>
+          <a:prstGeom prst="rect">
+            <a:avLst/>
+          </a:prstGeom>
+          <a:noFill/>
+          <a:ln/>
+        </p:spPr>
+        <p:txBody>
+          <a:bodyPr wrap="square" rtlCol="0" anchor="ctr"/>
+          <a:lstStyle/>
+          <a:p>
+            <a:pPr marL="0" indent="0" algn="ctr">
+              <a:buNone/>
+            </a:pPr>
+            <a:r>
+              <a:rPr lang="en-US" sz="1100" b="1" dirty="0">
+                <a:solidFill>
+                  <a:srgbClr val="EF4444"/>
+                </a:solidFill>
+                <a:latin typeface="Calibri" pitchFamily="34" charset="0"/>
+              </a:rPr>
+              <a:t>▲ 10 t over</a:t>
+            </a:r>
+          </a:p>
+        </p:txBody>
+      </p:sp>
+      <p:sp>
+        <p:nvSpPr>
+          <p:cNvPr id="106" name="GaugeBg_BU2"/>
+          <p:cNvSpPr/>
+          <p:nvPr/>
+        </p:nvSpPr>
+        <p:spPr>
+          <a:xfrm>
+            <a:off x="3717036" y="3276120"/>
+            <a:ext cx="1984247" cy="1984247"/>
+          </a:xfrm>
+          <a:prstGeom prst="arc">
+            <a:avLst>
+              <a:gd name="adj1" fmla="val 10800000"/>
+              <a:gd name="adj2" fmla="val 21600000"/>
+            </a:avLst>
+          </a:prstGeom>
+          <a:solidFill>
+            <a:srgbClr val="2A3A4A"/>
+          </a:solidFill>
+          <a:ln w="180000">
+            <a:solidFill>
+              <a:srgbClr val="2A3A4A"/>
+            </a:solidFill>
+          </a:ln>
+        </p:spPr>
+        <p:txBody>
+          <a:bodyPr/>
+          <a:lstStyle/>
+          <a:p>
+            <a:endParaRPr/>
+          </a:p>
+        </p:txBody>
+      </p:sp>
+      <p:sp>
+        <p:nvSpPr>
+          <p:cNvPr id="107" name="GaugeFg_BU2"/>
+          <p:cNvSpPr/>
+          <p:nvPr/>
+        </p:nvSpPr>
+        <p:spPr>
+          <a:xfrm>
+            <a:off x="3717036" y="3276120"/>
+            <a:ext cx="1984247" cy="1984247"/>
+          </a:xfrm>
+          <a:prstGeom prst="arc">
+            <a:avLst>
+              <a:gd name="adj1" fmla="val 10800000"/>
+              <a:gd name="adj2" fmla="val 18900000"/>
+            </a:avLst>
+          </a:prstGeom>
+          <a:solidFill>
+            <a:srgbClr val="10B981"/>
+          </a:solidFill>
+          <a:ln w="180000">
+            <a:solidFill>
+              <a:srgbClr val="10B981"/>
+            </a:solidFill>
+          </a:ln>
+        </p:spPr>
+        <p:txBody>
+          <a:bodyPr/>
+          <a:lstStyle/>
+          <a:p>
+            <a:endParaRPr/>
+          </a:p>
+        </p:txBody>
+      </p:sp>
+      <p:sp>
+        <p:nvSpPr>
+          <p:cNvPr id="108" name="GaugeHole_BU2"/>
+          <p:cNvSpPr/>
+          <p:nvPr/>
+        </p:nvSpPr>
+        <p:spPr>
+          <a:xfrm>
+            <a:off x="4133728" y="3692812"/>
+            <a:ext cx="1150863" cy="1150863"/>
+          </a:xfrm>
+          <a:prstGeom prst="ellipse">
+            <a:avLst/>
+          </a:prstGeom>
+          <a:solidFill>
+            <a:srgbClr val="0F1923"/>
+          </a:solidFill>
+          <a:ln w="0">
+            <a:noFill/>
+          </a:ln>
+        </p:spPr>
+        <p:txBody>
+          <a:bodyPr/>
+          <a:lstStyle/>
+          <a:p>
+            <a:endParaRPr/>
+          </a:p>
+        </p:txBody>
+      </p:sp>
+      <p:sp>
+        <p:nvSpPr>
+          <p:cNvPr id="109" name="GaugeLabel_BU2"/>
+          <p:cNvSpPr/>
+          <p:nvPr/>
+        </p:nvSpPr>
+        <p:spPr>
+          <a:xfrm>
+            <a:off x="3291840" y="3772181"/>
+            <a:ext cx="2834640" cy="436534"/>
+          </a:xfrm>
+          <a:prstGeom prst="rect">
+            <a:avLst/>
+          </a:prstGeom>
+          <a:noFill/>
+          <a:ln/>
+        </p:spPr>
+        <p:txBody>
+          <a:bodyPr wrap="square" rtlCol="0" anchor="ctr"/>
+          <a:lstStyle/>
+          <a:p>
+            <a:pPr marL="0" indent="0" algn="ctr">
+              <a:buNone/>
+            </a:pPr>
+            <a:r>
+              <a:rPr lang="en-US" sz="2200" b="1" dirty="0">
+                <a:solidFill>
+                  <a:srgbClr val="10B981"/>
+                </a:solidFill>
+                <a:latin typeface="Calibri" pitchFamily="34" charset="0"/>
+              </a:rPr>
+              <a:t>75%</a:t>
+            </a:r>
+          </a:p>
+        </p:txBody>
+      </p:sp>
+      <p:sp>
+        <p:nvSpPr>
+          <p:cNvPr id="110" name="GaugeName_BU2"/>
+          <p:cNvSpPr/>
+          <p:nvPr/>
+        </p:nvSpPr>
+        <p:spPr>
+          <a:xfrm>
+            <a:off x="3291840" y="4208716"/>
+            <a:ext cx="2834640" cy="357164"/>
+          </a:xfrm>
+          <a:prstGeom prst="rect">
+            <a:avLst/>
+          </a:prstGeom>
+          <a:noFill/>
+          <a:ln/>
+        </p:spPr>
+        <p:txBody>
+          <a:bodyPr wrap="square" rtlCol="0" anchor="ctr"/>
+          <a:lstStyle/>
+          <a:p>
+            <a:pPr marL="0" indent="0" algn="ctr">
+              <a:buNone/>
+            </a:pPr>
+            <a:r>
+              <a:rPr lang="en-US" sz="1300" b="1" dirty="0">
+                <a:solidFill>
+                  <a:srgbClr val="7C3AED"/>
+                </a:solidFill>
+                <a:latin typeface="Calibri" pitchFamily="34" charset="0"/>
+              </a:rPr>
+              <a:t>BU2</a:t>
+            </a:r>
+            <a:r>
+              <a:rPr lang="en-US" sz="1100" dirty="0">
+                <a:solidFill>
+                  <a:srgbClr val="94A3B8"/>
+                </a:solidFill>
+                <a:latin typeface="Calibri" pitchFamily="34" charset="0"/>
+              </a:rPr>
+              <a:t>  150 t / 200 t</a:t>
+            </a:r>
+          </a:p>
+        </p:txBody>
+      </p:sp>
+      <p:sp>
+        <p:nvSpPr>
+          <p:cNvPr id="111" name="GaugeStatus_BU2"/>
+          <p:cNvSpPr/>
+          <p:nvPr/>
+        </p:nvSpPr>
+        <p:spPr>
+          <a:xfrm>
+            <a:off x="3332988" y="4499312"/>
+            <a:ext cx="2834640" cy="317479"/>
+          </a:xfrm>
+          <a:prstGeom prst="rect">
+            <a:avLst/>
+          </a:prstGeom>
+          <a:noFill/>
+          <a:ln/>
+        </p:spPr>
+        <p:txBody>
+          <a:bodyPr wrap="square" rtlCol="0" anchor="ctr"/>
+          <a:lstStyle/>
+          <a:p>
+            <a:pPr marL="0" indent="0" algn="ctr">
+              <a:buNone/>
+            </a:pPr>
+            <a:r>
+              <a:rPr lang="en-US" sz="1100" b="1" dirty="0">
+                <a:solidFill>
+                  <a:srgbClr val="10B981"/>
+                </a:solidFill>
+                <a:latin typeface="Calibri" pitchFamily="34" charset="0"/>
+              </a:rPr>
+              <a:t>✓ 50 t left</a:t>
+            </a:r>
+          </a:p>
+        </p:txBody>
+      </p:sp>
+      <p:sp>
+        <p:nvSpPr>
+          <p:cNvPr id="112" name="GaugeBg_BU3"/>
+          <p:cNvSpPr/>
+          <p:nvPr/>
+        </p:nvSpPr>
+        <p:spPr>
+          <a:xfrm>
+            <a:off x="882396" y="4876320"/>
+            <a:ext cx="1984247" cy="1984247"/>
+          </a:xfrm>
+          <a:prstGeom prst="arc">
+            <a:avLst>
+              <a:gd name="adj1" fmla="val 10800000"/>
+              <a:gd name="adj2" fmla="val 21600000"/>
+            </a:avLst>
+          </a:prstGeom>
+          <a:solidFill>
+            <a:srgbClr val="2A3A4A"/>
+          </a:solidFill>
+          <a:ln w="180000">
+            <a:solidFill>
+              <a:srgbClr val="2A3A4A"/>
+            </a:solidFill>
+          </a:ln>
+        </p:spPr>
+        <p:txBody>
+          <a:bodyPr/>
+          <a:lstStyle/>
+          <a:p>
+            <a:endParaRPr/>
+          </a:p>
+        </p:txBody>
+      </p:sp>
+      <p:sp>
+        <p:nvSpPr>
+          <p:cNvPr id="113" name="GaugeFg_BU3"/>
+          <p:cNvSpPr/>
+          <p:nvPr/>
+        </p:nvSpPr>
+        <p:spPr>
+          <a:xfrm>
+            <a:off x="882396" y="4876320"/>
+            <a:ext cx="1984247" cy="1984247"/>
+          </a:xfrm>
+          <a:prstGeom prst="arc">
+            <a:avLst>
+              <a:gd name="adj1" fmla="val 10800000"/>
+              <a:gd name="adj2" fmla="val 21600000"/>
+            </a:avLst>
+          </a:prstGeom>
+          <a:solidFill>
+            <a:srgbClr val="EF4444"/>
+          </a:solidFill>
+          <a:ln w="180000">
+            <a:solidFill>
+              <a:srgbClr val="EF4444"/>
+            </a:solidFill>
+          </a:ln>
+        </p:spPr>
+        <p:txBody>
+          <a:bodyPr/>
+          <a:lstStyle/>
+          <a:p>
+            <a:endParaRPr/>
+          </a:p>
+        </p:txBody>
+      </p:sp>
+      <p:sp>
+        <p:nvSpPr>
+          <p:cNvPr id="114" name="GaugeHole_BU3"/>
+          <p:cNvSpPr/>
+          <p:nvPr/>
+        </p:nvSpPr>
+        <p:spPr>
+          <a:xfrm>
+            <a:off x="1299088" y="5293012"/>
+            <a:ext cx="1150863" cy="1150863"/>
+          </a:xfrm>
+          <a:prstGeom prst="ellipse">
+            <a:avLst/>
+          </a:prstGeom>
+          <a:solidFill>
+            <a:srgbClr val="0F1923"/>
+          </a:solidFill>
+          <a:ln w="0">
+            <a:noFill/>
+          </a:ln>
+        </p:spPr>
+        <p:txBody>
+          <a:bodyPr/>
+          <a:lstStyle/>
+          <a:p>
+            <a:endParaRPr/>
+          </a:p>
+        </p:txBody>
+      </p:sp>
+      <p:sp>
+        <p:nvSpPr>
+          <p:cNvPr id="115" name="GaugeLabel_BU3"/>
+          <p:cNvSpPr/>
+          <p:nvPr/>
+        </p:nvSpPr>
+        <p:spPr>
+          <a:xfrm>
+            <a:off x="457200" y="5372381"/>
+            <a:ext cx="2834640" cy="436534"/>
+          </a:xfrm>
+          <a:prstGeom prst="rect">
+            <a:avLst/>
+          </a:prstGeom>
+          <a:noFill/>
+          <a:ln/>
+        </p:spPr>
+        <p:txBody>
+          <a:bodyPr wrap="square" rtlCol="0" anchor="ctr"/>
+          <a:lstStyle/>
+          <a:p>
+            <a:pPr marL="0" indent="0" algn="ctr">
+              <a:buNone/>
+            </a:pPr>
+            <a:r>
+              <a:rPr lang="en-US" sz="2200" b="1" dirty="0">
+                <a:solidFill>
+                  <a:srgbClr val="EF4444"/>
+                </a:solidFill>
+                <a:latin typeface="Calibri" pitchFamily="34" charset="0"/>
+              </a:rPr>
+              <a:t>142%</a:t>
+            </a:r>
+          </a:p>
+        </p:txBody>
+      </p:sp>
+      <p:sp>
+        <p:nvSpPr>
+          <p:cNvPr id="116" name="GaugeName_BU3"/>
+          <p:cNvSpPr/>
+          <p:nvPr/>
+        </p:nvSpPr>
+        <p:spPr>
+          <a:xfrm>
+            <a:off x="457200" y="5808916"/>
+            <a:ext cx="2834640" cy="357164"/>
+          </a:xfrm>
+          <a:prstGeom prst="rect">
+            <a:avLst/>
+          </a:prstGeom>
+          <a:noFill/>
+          <a:ln/>
+        </p:spPr>
+        <p:txBody>
+          <a:bodyPr wrap="square" rtlCol="0" anchor="ctr"/>
+          <a:lstStyle/>
+          <a:p>
+            <a:pPr marL="0" indent="0" algn="ctr">
+              <a:buNone/>
+            </a:pPr>
+            <a:r>
+              <a:rPr lang="en-US" sz="1300" b="1" dirty="0">
+                <a:solidFill>
+                  <a:srgbClr val="0891B2"/>
+                </a:solidFill>
+                <a:latin typeface="Calibri" pitchFamily="34" charset="0"/>
+              </a:rPr>
+              <a:t>BU3</a:t>
+            </a:r>
+            <a:r>
+              <a:rPr lang="en-US" sz="1100" dirty="0">
+                <a:solidFill>
+                  <a:srgbClr val="94A3B8"/>
+                </a:solidFill>
+                <a:latin typeface="Calibri" pitchFamily="34" charset="0"/>
+              </a:rPr>
+              <a:t>  249 t / 175 t</a:t>
+            </a:r>
+          </a:p>
+        </p:txBody>
+      </p:sp>
+      <p:sp>
+        <p:nvSpPr>
+          <p:cNvPr id="117" name="GaugeStatus_BU3"/>
+          <p:cNvSpPr/>
+          <p:nvPr/>
+        </p:nvSpPr>
+        <p:spPr>
+          <a:xfrm>
+            <a:off x="457200" y="6166080"/>
+            <a:ext cx="2834640" cy="317479"/>
+          </a:xfrm>
+          <a:prstGeom prst="rect">
+            <a:avLst/>
+          </a:prstGeom>
+          <a:noFill/>
+          <a:ln/>
+        </p:spPr>
+        <p:txBody>
+          <a:bodyPr wrap="square" rtlCol="0" anchor="ctr"/>
+          <a:lstStyle/>
+          <a:p>
+            <a:pPr marL="0" indent="0" algn="ctr">
+              <a:buNone/>
+            </a:pPr>
+            <a:r>
+              <a:rPr lang="en-US" sz="1100" b="1" dirty="0">
+                <a:solidFill>
+                  <a:srgbClr val="EF4444"/>
+                </a:solidFill>
+                <a:latin typeface="Calibri" pitchFamily="34" charset="0"/>
+              </a:rPr>
+              <a:t>▲ 74 t over</a:t>
+            </a:r>
+          </a:p>
+        </p:txBody>
+      </p:sp>
+      <p:sp>
+        <p:nvSpPr>
+          <p:cNvPr id="118" name="GaugeBg_BU4"/>
+          <p:cNvSpPr/>
+          <p:nvPr/>
+        </p:nvSpPr>
+        <p:spPr>
+          <a:xfrm>
+            <a:off x="3717036" y="4876320"/>
+            <a:ext cx="1984247" cy="1984247"/>
+          </a:xfrm>
+          <a:prstGeom prst="arc">
+            <a:avLst>
+              <a:gd name="adj1" fmla="val 10800000"/>
+              <a:gd name="adj2" fmla="val 21600000"/>
+            </a:avLst>
+          </a:prstGeom>
+          <a:solidFill>
+            <a:srgbClr val="2A3A4A"/>
+          </a:solidFill>
+          <a:ln w="180000">
+            <a:solidFill>
+              <a:srgbClr val="2A3A4A"/>
+            </a:solidFill>
+          </a:ln>
+        </p:spPr>
+        <p:txBody>
+          <a:bodyPr/>
+          <a:lstStyle/>
+          <a:p>
+            <a:endParaRPr/>
+          </a:p>
+        </p:txBody>
+      </p:sp>
+      <p:sp>
+        <p:nvSpPr>
+          <p:cNvPr id="119" name="GaugeFg_BU4"/>
+          <p:cNvSpPr/>
+          <p:nvPr/>
+        </p:nvSpPr>
+        <p:spPr>
+          <a:xfrm>
+            <a:off x="3717036" y="4876320"/>
+            <a:ext cx="1984247" cy="1984247"/>
+          </a:xfrm>
+          <a:prstGeom prst="arc">
+            <a:avLst>
+              <a:gd name="adj1" fmla="val 10800000"/>
+              <a:gd name="adj2" fmla="val 21372631"/>
+            </a:avLst>
+          </a:prstGeom>
+          <a:solidFill>
+            <a:srgbClr val="F59E0B"/>
+          </a:solidFill>
+          <a:ln w="180000">
+            <a:solidFill>
+              <a:srgbClr val="F59E0B"/>
+            </a:solidFill>
+          </a:ln>
+        </p:spPr>
+        <p:txBody>
+          <a:bodyPr/>
+          <a:lstStyle/>
+          <a:p>
+            <a:endParaRPr/>
+          </a:p>
+        </p:txBody>
+      </p:sp>
+      <p:sp>
+        <p:nvSpPr>
+          <p:cNvPr id="120" name="GaugeHole_BU4"/>
+          <p:cNvSpPr/>
+          <p:nvPr/>
+        </p:nvSpPr>
+        <p:spPr>
+          <a:xfrm>
+            <a:off x="4133728" y="5293012"/>
+            <a:ext cx="1150863" cy="1150863"/>
+          </a:xfrm>
+          <a:prstGeom prst="ellipse">
+            <a:avLst/>
+          </a:prstGeom>
+          <a:solidFill>
+            <a:srgbClr val="0F1923"/>
+          </a:solidFill>
+          <a:ln w="0">
+            <a:noFill/>
+          </a:ln>
+        </p:spPr>
+        <p:txBody>
+          <a:bodyPr/>
+          <a:lstStyle/>
+          <a:p>
+            <a:endParaRPr/>
+          </a:p>
+        </p:txBody>
+      </p:sp>
+      <p:sp>
+        <p:nvSpPr>
+          <p:cNvPr id="121" name="GaugeLabel_BU4"/>
+          <p:cNvSpPr/>
+          <p:nvPr/>
+        </p:nvSpPr>
+        <p:spPr>
+          <a:xfrm>
+            <a:off x="3291840" y="5372381"/>
+            <a:ext cx="2834640" cy="436534"/>
+          </a:xfrm>
+          <a:prstGeom prst="rect">
+            <a:avLst/>
+          </a:prstGeom>
+          <a:noFill/>
+          <a:ln/>
+        </p:spPr>
+        <p:txBody>
+          <a:bodyPr wrap="square" rtlCol="0" anchor="ctr"/>
+          <a:lstStyle/>
+          <a:p>
+            <a:pPr marL="0" indent="0" algn="ctr">
+              <a:buNone/>
+            </a:pPr>
+            <a:r>
+              <a:rPr lang="en-US" sz="2200" b="1" dirty="0">
+                <a:solidFill>
+                  <a:srgbClr val="F59E0B"/>
+                </a:solidFill>
+                <a:latin typeface="Calibri" pitchFamily="34" charset="0"/>
+              </a:rPr>
+              <a:t>98%</a:t>
+            </a:r>
+          </a:p>
+        </p:txBody>
+      </p:sp>
+      <p:sp>
+        <p:nvSpPr>
+          <p:cNvPr id="122" name="GaugeName_BU4"/>
+          <p:cNvSpPr/>
+          <p:nvPr/>
+        </p:nvSpPr>
+        <p:spPr>
+          <a:xfrm>
+            <a:off x="3291840" y="5808916"/>
+            <a:ext cx="2834640" cy="357164"/>
+          </a:xfrm>
+          <a:prstGeom prst="rect">
+            <a:avLst/>
+          </a:prstGeom>
+          <a:noFill/>
+          <a:ln/>
+        </p:spPr>
+        <p:txBody>
+          <a:bodyPr wrap="square" rtlCol="0" anchor="ctr"/>
+          <a:lstStyle/>
+          <a:p>
+            <a:pPr marL="0" indent="0" algn="ctr">
+              <a:buNone/>
+            </a:pPr>
+            <a:r>
+              <a:rPr lang="en-US" sz="1300" b="1" dirty="0">
+                <a:solidFill>
+                  <a:srgbClr val="DB2777"/>
+                </a:solidFill>
+                <a:latin typeface="Calibri" pitchFamily="34" charset="0"/>
+              </a:rPr>
+              <a:t>BU4</a:t>
+            </a:r>
+            <a:r>
+              <a:rPr lang="en-US" sz="1100" dirty="0">
+                <a:solidFill>
+                  <a:srgbClr val="94A3B8"/>
+                </a:solidFill>
+                <a:latin typeface="Calibri" pitchFamily="34" charset="0"/>
+              </a:rPr>
+              <a:t>  186 t / 190 t</a:t>
+            </a:r>
+          </a:p>
+        </p:txBody>
+      </p:sp>
+      <p:sp>
+        <p:nvSpPr>
+          <p:cNvPr id="123" name="GaugeStatus_BU4"/>
+          <p:cNvSpPr/>
+          <p:nvPr/>
+        </p:nvSpPr>
+        <p:spPr>
+          <a:xfrm>
+            <a:off x="3291840" y="6166080"/>
+            <a:ext cx="2834640" cy="317479"/>
+          </a:xfrm>
+          <a:prstGeom prst="rect">
+            <a:avLst/>
+          </a:prstGeom>
+          <a:noFill/>
+          <a:ln/>
+        </p:spPr>
+        <p:txBody>
+          <a:bodyPr wrap="square" rtlCol="0" anchor="ctr"/>
+          <a:lstStyle/>
+          <a:p>
+            <a:pPr marL="0" indent="0" algn="ctr">
+              <a:buNone/>
+            </a:pPr>
+            <a:r>
+              <a:rPr lang="en-US" sz="1100" b="1" dirty="0">
+                <a:solidFill>
+                  <a:srgbClr val="F59E0B"/>
+                </a:solidFill>
+                <a:latin typeface="Calibri" pitchFamily="34" charset="0"/>
+              </a:rPr>
+              <a:t>~ 4 t left</a:t>
+            </a:r>
+          </a:p>
+        </p:txBody>
+      </p:sp>
+      <p:sp>
+        <p:nvSpPr>
+          <p:cNvPr id="25" name="Text 22"/>
+          <p:cNvSpPr/>
+          <p:nvPr/>
+        </p:nvSpPr>
+        <p:spPr>
+          <a:xfrm>
+            <a:off x="6492240" y="3246120"/>
+            <a:ext cx="5212080" cy="411480"/>
+          </a:xfrm>
+          <a:prstGeom prst="rect">
+            <a:avLst/>
+          </a:prstGeom>
+          <a:noFill/>
+          <a:ln/>
+        </p:spPr>
+        <p:txBody>
+          <a:bodyPr wrap="square" rtlCol="0" anchor="ctr"/>
+          <a:lstStyle/>
+          <a:p>
+            <a:pPr marL="0" indent="0">
+              <a:buNone/>
+            </a:pPr>
+            <a:r>
+              <a:rPr lang="en-US" sz="1400" b="1" dirty="0">
+                <a:solidFill>
+                  <a:srgbClr val="FFFFFF"/>
+                </a:solidFill>
+                <a:latin typeface="Calibri" pitchFamily="34" charset="0"/>
+                <a:ea typeface="Calibri" pitchFamily="34" charset="-122"/>
+                <a:cs typeface="Calibri" pitchFamily="34" charset="-120"/>
+              </a:rPr>
+              <a:t>BU Snapshot</a:t>
+            </a:r>
+            <a:endParaRPr lang="en-US" sz="1400" dirty="0"/>
+          </a:p>
+        </p:txBody>
+      </p:sp>
+      <p:sp>
+        <p:nvSpPr>
+          <p:cNvPr id="26" name="Shape 23"/>
+          <p:cNvSpPr/>
+          <p:nvPr/>
+        </p:nvSpPr>
+        <p:spPr>
+          <a:xfrm>
+            <a:off x="6492240" y="3794760"/>
+            <a:ext cx="5212080" cy="566928"/>
+          </a:xfrm>
+          <a:prstGeom prst="rect">
+            <a:avLst/>
+          </a:prstGeom>
+          <a:solidFill>
+            <a:srgbClr val="192535"/>
+          </a:solidFill>
+          <a:ln/>
+          <a:effectLst>
+            <a:outerShdw blurRad="152400" dist="38100" dir="8100000" algn="bl" rotWithShape="0">
+              <a:srgbClr val="000000">
+                <a:alpha val="25000"/>
+              </a:srgbClr>
+            </a:outerShdw>
+          </a:effectLst>
+        </p:spPr>
+        <p:txBody>
+          <a:bodyPr/>
+          <a:lstStyle/>
+          <a:p>
+            <a:endParaRPr/>
+          </a:p>
+        </p:txBody>
+      </p:sp>
+      <p:sp>
+        <p:nvSpPr>
+          <p:cNvPr id="27" name="Shape 24"/>
+          <p:cNvSpPr/>
+          <p:nvPr/>
+        </p:nvSpPr>
+        <p:spPr>
+          <a:xfrm>
+            <a:off x="6492240" y="3794760"/>
+            <a:ext cx="54864" cy="566928"/>
+          </a:xfrm>
+          <a:prstGeom prst="rect">
+            <a:avLst/>
+          </a:prstGeom>
+          <a:solidFill>
+            <a:srgbClr val="EF4444"/>
+          </a:solidFill>
+          <a:ln/>
+        </p:spPr>
+        <p:txBody>
+          <a:bodyPr/>
+          <a:lstStyle/>
+          <a:p>
+            <a:endParaRPr/>
+          </a:p>
+        </p:txBody>
+      </p:sp>
+      <p:sp>
+        <p:nvSpPr>
+          <p:cNvPr id="28" name="Text 25"/>
+          <p:cNvSpPr/>
+          <p:nvPr/>
+        </p:nvSpPr>
+        <p:spPr>
+          <a:xfrm>
+            <a:off x="6629400" y="3867912"/>
+            <a:ext cx="640080" cy="411480"/>
+          </a:xfrm>
+          <a:prstGeom prst="rect">
+            <a:avLst/>
+          </a:prstGeom>
+          <a:noFill/>
+          <a:ln/>
+        </p:spPr>
+        <p:txBody>
+          <a:bodyPr wrap="square" lIns="0" tIns="0" rIns="0" bIns="0" rtlCol="0" anchor="ctr"/>
+          <a:lstStyle/>
+          <a:p>
+            <a:pPr marL="0" indent="0">
+              <a:buNone/>
+            </a:pPr>
+            <a:r>
+              <a:rPr lang="en-US" sz="1400" b="1" dirty="0">
+                <a:solidFill>
+                  <a:srgbClr val="FFFFFF"/>
+                </a:solidFill>
+                <a:latin typeface="Calibri" pitchFamily="34" charset="0"/>
+                <a:ea typeface="Calibri" pitchFamily="34" charset="-122"/>
+                <a:cs typeface="Calibri" pitchFamily="34" charset="-120"/>
+              </a:rPr>
+              <a:t>BU1</a:t>
+            </a:r>
+            <a:endParaRPr lang="en-US" sz="1400" dirty="0"/>
+          </a:p>
+        </p:txBody>
+      </p:sp>
+      <p:sp>
+        <p:nvSpPr>
+          <p:cNvPr id="29" name="Text 26"/>
+          <p:cNvSpPr/>
+          <p:nvPr/>
+        </p:nvSpPr>
+        <p:spPr>
+          <a:xfrm>
+            <a:off x="7269480" y="3886200"/>
+            <a:ext cx="4206240" cy="365760"/>
+          </a:xfrm>
+          <a:prstGeom prst="rect">
+            <a:avLst/>
+          </a:prstGeom>
+          <a:noFill/>
+          <a:ln/>
+        </p:spPr>
+        <p:txBody>
+          <a:bodyPr wrap="square" lIns="0" tIns="0" rIns="0" bIns="0" rtlCol="0" anchor="ctr"/>
+          <a:lstStyle/>
+          <a:p>
+            <a:pPr marL="0" indent="0">
+              <a:buNone/>
+            </a:pPr>
+            <a:r>
+              <a:rPr lang="en-US" sz="1100" dirty="0">
+                <a:solidFill>
+                  <a:srgbClr val="E2E8F0"/>
+                </a:solidFill>
+                <a:latin typeface="Calibri" pitchFamily="34" charset="0"/>
+                <a:ea typeface="Calibri" pitchFamily="34" charset="-122"/>
+                <a:cs typeface="Calibri" pitchFamily="34" charset="-120"/>
+              </a:rPr>
+              <a:t>Actual: 190 t  ·  Optimised: 162 t  ·  Budget: 180 t</a:t>
+            </a:r>
+            <a:endParaRPr lang="en-US" sz="1100" dirty="0"/>
+          </a:p>
+        </p:txBody>
+      </p:sp>
+      <p:sp>
+        <p:nvSpPr>
+          <p:cNvPr id="30" name="Text 27"/>
+          <p:cNvSpPr/>
+          <p:nvPr/>
+        </p:nvSpPr>
+        <p:spPr>
+          <a:xfrm>
+            <a:off x="9509760" y="3886200"/>
+            <a:ext cx="2011680" cy="365760"/>
+          </a:xfrm>
+          <a:prstGeom prst="rect">
+            <a:avLst/>
+          </a:prstGeom>
+          <a:noFill/>
+          <a:ln/>
+        </p:spPr>
+        <p:txBody>
+          <a:bodyPr wrap="square" lIns="0" tIns="0" rIns="0" bIns="0" rtlCol="0" anchor="ctr"/>
+          <a:lstStyle/>
+          <a:p>
+            <a:pPr marL="0" indent="0" algn="r">
+              <a:buNone/>
+            </a:pPr>
+            <a:r>
+              <a:rPr lang="en-US" sz="1100" b="1" dirty="0">
+                <a:solidFill>
+                  <a:srgbClr val="EF4444"/>
+                </a:solidFill>
+                <a:latin typeface="Calibri" pitchFamily="34" charset="0"/>
+                <a:ea typeface="Calibri" pitchFamily="34" charset="-122"/>
+                <a:cs typeface="Calibri" pitchFamily="34" charset="-120"/>
+              </a:rPr>
+              <a:t>▲ 10 t over</a:t>
+            </a:r>
+            <a:endParaRPr lang="en-US" sz="1100" dirty="0"/>
+          </a:p>
+        </p:txBody>
+      </p:sp>
+      <p:sp>
+        <p:nvSpPr>
+          <p:cNvPr id="31" name="Shape 28"/>
+          <p:cNvSpPr/>
+          <p:nvPr/>
+        </p:nvSpPr>
+        <p:spPr>
+          <a:xfrm>
+            <a:off x="6492240" y="4453128"/>
+            <a:ext cx="5212080" cy="566928"/>
+          </a:xfrm>
+          <a:prstGeom prst="rect">
+            <a:avLst/>
+          </a:prstGeom>
+          <a:solidFill>
+            <a:srgbClr val="192535"/>
+          </a:solidFill>
+          <a:ln/>
+          <a:effectLst>
+            <a:outerShdw blurRad="152400" dist="38100" dir="8100000" algn="bl" rotWithShape="0">
+              <a:srgbClr val="000000">
+                <a:alpha val="25000"/>
+              </a:srgbClr>
+            </a:outerShdw>
+          </a:effectLst>
+        </p:spPr>
+        <p:txBody>
+          <a:bodyPr/>
+          <a:lstStyle/>
+          <a:p>
+            <a:endParaRPr/>
+          </a:p>
+        </p:txBody>
+      </p:sp>
+      <p:sp>
+        <p:nvSpPr>
+          <p:cNvPr id="32" name="Shape 29"/>
+          <p:cNvSpPr/>
+          <p:nvPr/>
+        </p:nvSpPr>
+        <p:spPr>
+          <a:xfrm>
+            <a:off x="6492240" y="4453128"/>
+            <a:ext cx="54864" cy="566928"/>
+          </a:xfrm>
+          <a:prstGeom prst="rect">
+            <a:avLst/>
+          </a:prstGeom>
+          <a:solidFill>
+            <a:srgbClr val="10B981"/>
+          </a:solidFill>
+          <a:ln/>
+        </p:spPr>
+        <p:txBody>
+          <a:bodyPr/>
+          <a:lstStyle/>
+          <a:p>
+            <a:endParaRPr/>
+          </a:p>
+        </p:txBody>
+      </p:sp>
+      <p:sp>
+        <p:nvSpPr>
+          <p:cNvPr id="33" name="Text 30"/>
+          <p:cNvSpPr/>
+          <p:nvPr/>
+        </p:nvSpPr>
+        <p:spPr>
+          <a:xfrm>
+            <a:off x="6629400" y="4526280"/>
+            <a:ext cx="640080" cy="411480"/>
+          </a:xfrm>
+          <a:prstGeom prst="rect">
+            <a:avLst/>
+          </a:prstGeom>
+          <a:noFill/>
+          <a:ln/>
+        </p:spPr>
+        <p:txBody>
+          <a:bodyPr wrap="square" lIns="0" tIns="0" rIns="0" bIns="0" rtlCol="0" anchor="ctr"/>
+          <a:lstStyle/>
+          <a:p>
+            <a:pPr marL="0" indent="0">
+              <a:buNone/>
+            </a:pPr>
+            <a:r>
+              <a:rPr lang="en-US" sz="1400" b="1" dirty="0">
+                <a:solidFill>
+                  <a:srgbClr val="FFFFFF"/>
+                </a:solidFill>
+                <a:latin typeface="Calibri" pitchFamily="34" charset="0"/>
+                <a:ea typeface="Calibri" pitchFamily="34" charset="-122"/>
+                <a:cs typeface="Calibri" pitchFamily="34" charset="-120"/>
+              </a:rPr>
+              <a:t>BU2</a:t>
+            </a:r>
+            <a:endParaRPr lang="en-US" sz="1400" dirty="0"/>
+          </a:p>
+        </p:txBody>
+      </p:sp>
+      <p:sp>
+        <p:nvSpPr>
+          <p:cNvPr id="34" name="Text 31"/>
+          <p:cNvSpPr/>
+          <p:nvPr/>
+        </p:nvSpPr>
+        <p:spPr>
+          <a:xfrm>
+            <a:off x="7269480" y="4544568"/>
+            <a:ext cx="4206240" cy="365760"/>
+          </a:xfrm>
+          <a:prstGeom prst="rect">
+            <a:avLst/>
+          </a:prstGeom>
+          <a:noFill/>
+          <a:ln/>
+        </p:spPr>
+        <p:txBody>
+          <a:bodyPr wrap="square" lIns="0" tIns="0" rIns="0" bIns="0" rtlCol="0" anchor="ctr"/>
+          <a:lstStyle/>
+          <a:p>
+            <a:pPr marL="0" indent="0">
+              <a:buNone/>
+            </a:pPr>
+            <a:r>
+              <a:rPr lang="en-US" sz="1100" dirty="0">
+                <a:solidFill>
+                  <a:srgbClr val="E2E8F0"/>
+                </a:solidFill>
+                <a:latin typeface="Calibri" pitchFamily="34" charset="0"/>
+                <a:ea typeface="Calibri" pitchFamily="34" charset="-122"/>
+                <a:cs typeface="Calibri" pitchFamily="34" charset="-120"/>
+              </a:rPr>
+              <a:t>Actual: 150 t  ·  Optimised: 134 t  ·  Budget: 200 t</a:t>
+            </a:r>
+            <a:endParaRPr lang="en-US" sz="1100" dirty="0"/>
+          </a:p>
+        </p:txBody>
+      </p:sp>
+      <p:sp>
+        <p:nvSpPr>
+          <p:cNvPr id="35" name="Text 32"/>
+          <p:cNvSpPr/>
+          <p:nvPr/>
+        </p:nvSpPr>
+        <p:spPr>
+          <a:xfrm>
+            <a:off x="9509760" y="4544568"/>
+            <a:ext cx="2011680" cy="365760"/>
+          </a:xfrm>
+          <a:prstGeom prst="rect">
+            <a:avLst/>
+          </a:prstGeom>
+          <a:noFill/>
+          <a:ln/>
+        </p:spPr>
+        <p:txBody>
+          <a:bodyPr wrap="square" lIns="0" tIns="0" rIns="0" bIns="0" rtlCol="0" anchor="ctr"/>
+          <a:lstStyle/>
+          <a:p>
+            <a:pPr marL="0" indent="0" algn="r">
+              <a:buNone/>
+            </a:pPr>
+            <a:r>
+              <a:rPr lang="en-US" sz="1100" b="1" dirty="0">
+                <a:solidFill>
+                  <a:srgbClr val="10B981"/>
+                </a:solidFill>
+                <a:latin typeface="Calibri" pitchFamily="34" charset="0"/>
+                <a:ea typeface="Calibri" pitchFamily="34" charset="-122"/>
+                <a:cs typeface="Calibri" pitchFamily="34" charset="-120"/>
+              </a:rPr>
+              <a:t>✓ 50 t left</a:t>
+            </a:r>
+            <a:endParaRPr lang="en-US" sz="1100" dirty="0"/>
+          </a:p>
+        </p:txBody>
+      </p:sp>
+      <p:sp>
+        <p:nvSpPr>
+          <p:cNvPr id="36" name="Shape 33"/>
+          <p:cNvSpPr/>
+          <p:nvPr/>
+        </p:nvSpPr>
+        <p:spPr>
+          <a:xfrm>
+            <a:off x="6492240" y="5111496"/>
+            <a:ext cx="5212080" cy="566928"/>
+          </a:xfrm>
+          <a:prstGeom prst="rect">
+            <a:avLst/>
+          </a:prstGeom>
+          <a:solidFill>
+            <a:srgbClr val="192535"/>
+          </a:solidFill>
+          <a:ln/>
+          <a:effectLst>
+            <a:outerShdw blurRad="152400" dist="38100" dir="8100000" algn="bl" rotWithShape="0">
+              <a:srgbClr val="000000">
+                <a:alpha val="25000"/>
+              </a:srgbClr>
+            </a:outerShdw>
+          </a:effectLst>
+        </p:spPr>
+        <p:txBody>
+          <a:bodyPr/>
+          <a:lstStyle/>
+          <a:p>
+            <a:endParaRPr/>
+          </a:p>
+        </p:txBody>
+      </p:sp>
+      <p:sp>
+        <p:nvSpPr>
+          <p:cNvPr id="37" name="Shape 34"/>
+          <p:cNvSpPr/>
+          <p:nvPr/>
+        </p:nvSpPr>
+        <p:spPr>
+          <a:xfrm>
+            <a:off x="6492240" y="5111496"/>
+            <a:ext cx="54864" cy="566928"/>
+          </a:xfrm>
+          <a:prstGeom prst="rect">
+            <a:avLst/>
+          </a:prstGeom>
+          <a:solidFill>
+            <a:srgbClr val="EF4444"/>
+          </a:solidFill>
+          <a:ln/>
+        </p:spPr>
+        <p:txBody>
+          <a:bodyPr/>
+          <a:lstStyle/>
+          <a:p>
+            <a:endParaRPr/>
+          </a:p>
+        </p:txBody>
+      </p:sp>
+      <p:sp>
+        <p:nvSpPr>
+          <p:cNvPr id="38" name="Text 35"/>
+          <p:cNvSpPr/>
+          <p:nvPr/>
+        </p:nvSpPr>
+        <p:spPr>
+          <a:xfrm>
+            <a:off x="6629400" y="5184648"/>
+            <a:ext cx="640080" cy="411480"/>
+          </a:xfrm>
+          <a:prstGeom prst="rect">
+            <a:avLst/>
+          </a:prstGeom>
+          <a:noFill/>
+          <a:ln/>
+        </p:spPr>
+        <p:txBody>
+          <a:bodyPr wrap="square" lIns="0" tIns="0" rIns="0" bIns="0" rtlCol="0" anchor="ctr"/>
+          <a:lstStyle/>
+          <a:p>
+            <a:pPr marL="0" indent="0">
+              <a:buNone/>
+            </a:pPr>
+            <a:r>
+              <a:rPr lang="en-US" sz="1400" b="1" dirty="0">
+                <a:solidFill>
+                  <a:srgbClr val="FFFFFF"/>
+                </a:solidFill>
+                <a:latin typeface="Calibri" pitchFamily="34" charset="0"/>
+                <a:ea typeface="Calibri" pitchFamily="34" charset="-122"/>
+                <a:cs typeface="Calibri" pitchFamily="34" charset="-120"/>
+              </a:rPr>
+              <a:t>BU3</a:t>
+            </a:r>
+            <a:endParaRPr lang="en-US" sz="1400" dirty="0"/>
+          </a:p>
+        </p:txBody>
+      </p:sp>
+      <p:sp>
+        <p:nvSpPr>
+          <p:cNvPr id="39" name="Text 36"/>
+          <p:cNvSpPr/>
+          <p:nvPr/>
+        </p:nvSpPr>
+        <p:spPr>
+          <a:xfrm>
+            <a:off x="7269480" y="5202936"/>
+            <a:ext cx="4206240" cy="365760"/>
+          </a:xfrm>
+          <a:prstGeom prst="rect">
+            <a:avLst/>
+          </a:prstGeom>
+          <a:noFill/>
+          <a:ln/>
+        </p:spPr>
+        <p:txBody>
+          <a:bodyPr wrap="square" lIns="0" tIns="0" rIns="0" bIns="0" rtlCol="0" anchor="ctr"/>
+          <a:lstStyle/>
+          <a:p>
+            <a:pPr marL="0" indent="0">
+              <a:buNone/>
+            </a:pPr>
+            <a:r>
+              <a:rPr lang="en-US" sz="1100" dirty="0">
+                <a:solidFill>
+                  <a:srgbClr val="E2E8F0"/>
+                </a:solidFill>
+                <a:latin typeface="Calibri" pitchFamily="34" charset="0"/>
+                <a:ea typeface="Calibri" pitchFamily="34" charset="-122"/>
+                <a:cs typeface="Calibri" pitchFamily="34" charset="-120"/>
+              </a:rPr>
+              <a:t>Actual: 249 t  ·  Optimised: 198 t  ·  Budget: 175 t</a:t>
+            </a:r>
+            <a:endParaRPr lang="en-US" sz="1100" dirty="0"/>
+          </a:p>
+        </p:txBody>
+      </p:sp>
+      <p:sp>
+        <p:nvSpPr>
+          <p:cNvPr id="40" name="Text 37"/>
+          <p:cNvSpPr/>
+          <p:nvPr/>
+        </p:nvSpPr>
+        <p:spPr>
+          <a:xfrm>
+            <a:off x="9509760" y="5202936"/>
+            <a:ext cx="2011680" cy="365760"/>
+          </a:xfrm>
+          <a:prstGeom prst="rect">
+            <a:avLst/>
+          </a:prstGeom>
+          <a:noFill/>
+          <a:ln/>
+        </p:spPr>
+        <p:txBody>
+          <a:bodyPr wrap="square" lIns="0" tIns="0" rIns="0" bIns="0" rtlCol="0" anchor="ctr"/>
+          <a:lstStyle/>
+          <a:p>
+            <a:pPr marL="0" indent="0" algn="r">
+              <a:buNone/>
+            </a:pPr>
+            <a:r>
+              <a:rPr lang="en-US" sz="1100" b="1" dirty="0">
+                <a:solidFill>
+                  <a:srgbClr val="EF4444"/>
+                </a:solidFill>
+                <a:latin typeface="Calibri" pitchFamily="34" charset="0"/>
+                <a:ea typeface="Calibri" pitchFamily="34" charset="-122"/>
+                <a:cs typeface="Calibri" pitchFamily="34" charset="-120"/>
+              </a:rPr>
+              <a:t>▲ 74 t over</a:t>
+            </a:r>
+            <a:endParaRPr lang="en-US" sz="1100" dirty="0"/>
+          </a:p>
+        </p:txBody>
+      </p:sp>
+      <p:sp>
+        <p:nvSpPr>
+          <p:cNvPr id="41" name="Shape 38"/>
+          <p:cNvSpPr/>
+          <p:nvPr/>
+        </p:nvSpPr>
+        <p:spPr>
+          <a:xfrm>
+            <a:off x="6492240" y="5769864"/>
+            <a:ext cx="5212080" cy="566928"/>
+          </a:xfrm>
+          <a:prstGeom prst="rect">
+            <a:avLst/>
+          </a:prstGeom>
+          <a:solidFill>
+            <a:srgbClr val="192535"/>
+          </a:solidFill>
+          <a:ln/>
+          <a:effectLst>
+            <a:outerShdw blurRad="152400" dist="38100" dir="8100000" algn="bl" rotWithShape="0">
+              <a:srgbClr val="000000">
+                <a:alpha val="25000"/>
+              </a:srgbClr>
+            </a:outerShdw>
+          </a:effectLst>
+        </p:spPr>
+        <p:txBody>
+          <a:bodyPr/>
+          <a:lstStyle/>
+          <a:p>
+            <a:endParaRPr/>
+          </a:p>
+        </p:txBody>
+      </p:sp>
+      <p:sp>
+        <p:nvSpPr>
+          <p:cNvPr id="42" name="Shape 39"/>
+          <p:cNvSpPr/>
+          <p:nvPr/>
+        </p:nvSpPr>
+        <p:spPr>
+          <a:xfrm>
+            <a:off x="6492240" y="5769864"/>
+            <a:ext cx="54864" cy="566928"/>
+          </a:xfrm>
+          <a:prstGeom prst="rect">
+            <a:avLst/>
+          </a:prstGeom>
+          <a:solidFill>
+            <a:srgbClr val="10B981"/>
+          </a:solidFill>
+          <a:ln/>
+        </p:spPr>
+        <p:txBody>
+          <a:bodyPr/>
+          <a:lstStyle/>
+          <a:p>
+            <a:endParaRPr/>
+          </a:p>
+        </p:txBody>
+      </p:sp>
+      <p:sp>
+        <p:nvSpPr>
+          <p:cNvPr id="43" name="Text 40"/>
+          <p:cNvSpPr/>
+          <p:nvPr/>
+        </p:nvSpPr>
+        <p:spPr>
+          <a:xfrm>
+            <a:off x="6629400" y="5843016"/>
+            <a:ext cx="640080" cy="411480"/>
+          </a:xfrm>
+          <a:prstGeom prst="rect">
+            <a:avLst/>
+          </a:prstGeom>
+          <a:noFill/>
+          <a:ln/>
+        </p:spPr>
+        <p:txBody>
+          <a:bodyPr wrap="square" lIns="0" tIns="0" rIns="0" bIns="0" rtlCol="0" anchor="ctr"/>
+          <a:lstStyle/>
+          <a:p>
+            <a:pPr marL="0" indent="0">
+              <a:buNone/>
+            </a:pPr>
+            <a:r>
+              <a:rPr lang="en-US" sz="1400" b="1" dirty="0">
+                <a:solidFill>
+                  <a:srgbClr val="FFFFFF"/>
+                </a:solidFill>
+                <a:latin typeface="Calibri" pitchFamily="34" charset="0"/>
+                <a:ea typeface="Calibri" pitchFamily="34" charset="-122"/>
+                <a:cs typeface="Calibri" pitchFamily="34" charset="-120"/>
+              </a:rPr>
+              <a:t>BU4</a:t>
+            </a:r>
+            <a:endParaRPr lang="en-US" sz="1400" dirty="0"/>
+          </a:p>
+        </p:txBody>
+      </p:sp>
+      <p:sp>
+        <p:nvSpPr>
+          <p:cNvPr id="44" name="Text 41"/>
+          <p:cNvSpPr/>
+          <p:nvPr/>
+        </p:nvSpPr>
+        <p:spPr>
+          <a:xfrm>
+            <a:off x="7269480" y="5861304"/>
+            <a:ext cx="4206240" cy="365760"/>
+          </a:xfrm>
+          <a:prstGeom prst="rect">
+            <a:avLst/>
+          </a:prstGeom>
+          <a:noFill/>
+          <a:ln/>
+        </p:spPr>
+        <p:txBody>
+          <a:bodyPr wrap="square" lIns="0" tIns="0" rIns="0" bIns="0" rtlCol="0" anchor="ctr"/>
+          <a:lstStyle/>
+          <a:p>
+            <a:pPr marL="0" indent="0">
+              <a:buNone/>
+            </a:pPr>
+            <a:r>
+              <a:rPr lang="en-US" sz="1100" dirty="0">
+                <a:solidFill>
+                  <a:srgbClr val="E2E8F0"/>
+                </a:solidFill>
+                <a:latin typeface="Calibri" pitchFamily="34" charset="0"/>
+                <a:ea typeface="Calibri" pitchFamily="34" charset="-122"/>
+                <a:cs typeface="Calibri" pitchFamily="34" charset="-120"/>
+              </a:rPr>
+              <a:t>Actual: 186 t  ·  Optimised: 168 t  ·  Budget: 190 t</a:t>
+            </a:r>
+            <a:endParaRPr lang="en-US" sz="1100" dirty="0"/>
+          </a:p>
+        </p:txBody>
+      </p:sp>
+      <p:sp>
+        <p:nvSpPr>
+          <p:cNvPr id="45" name="Text 42"/>
+          <p:cNvSpPr/>
+          <p:nvPr/>
+        </p:nvSpPr>
+        <p:spPr>
+          <a:xfrm>
+            <a:off x="9509760" y="5861304"/>
+            <a:ext cx="2011680" cy="365760"/>
+          </a:xfrm>
+          <a:prstGeom prst="rect">
+            <a:avLst/>
+          </a:prstGeom>
+          <a:noFill/>
+          <a:ln/>
+        </p:spPr>
+        <p:txBody>
+          <a:bodyPr wrap="square" lIns="0" tIns="0" rIns="0" bIns="0" rtlCol="0" anchor="ctr"/>
+          <a:lstStyle/>
+          <a:p>
+            <a:pPr marL="0" indent="0" algn="r">
+              <a:buNone/>
+            </a:pPr>
+            <a:r>
+              <a:rPr lang="en-US" sz="1100" b="1" dirty="0">
+                <a:solidFill>
+                  <a:srgbClr val="10B981"/>
+                </a:solidFill>
+                <a:latin typeface="Calibri" pitchFamily="34" charset="0"/>
+                <a:ea typeface="Calibri" pitchFamily="34" charset="-122"/>
+                <a:cs typeface="Calibri" pitchFamily="34" charset="-120"/>
+              </a:rPr>
+              <a:t>✓ 4 t left</a:t>
+            </a:r>
+            <a:endParaRPr lang="en-US" sz="1100" dirty="0"/>
+          </a:p>
+        </p:txBody>
+      </p:sp>
+    </p:spTree>
+  </p:cSld>
+  <p:clrMapOvr>
+    <a:masterClrMapping/>
+  </p:clrMapOvr>
+</p:sld>
+</file>
+
 <file path=ppt/slides/slide8.xml><?xml version="1.0" encoding="utf-8"?>
 <p:sld xmlns:a="http://schemas.openxmlformats.org/drawingml/2006/main" xmlns:r="http://schemas.openxmlformats.org/officeDocument/2006/relationships" xmlns:p="http://schemas.openxmlformats.org/presentationml/2006/main">
+  <p:cSld name="Slide Design Rationale">
+    <p:bg>
+      <p:bgPr>
+        <a:solidFill>
+          <a:srgbClr val="0F1923"/>
+        </a:solidFill>
+        <a:effectLst/>
+      </p:bgPr>
+    </p:bg>
+    <p:spTree>
+      <p:nvGrpSpPr>
+        <p:cNvPr id="1" name=""/>
+        <p:cNvGrpSpPr/>
+        <p:nvPr/>
+      </p:nvGrpSpPr>
+      <p:grpSpPr>
+        <a:xfrm>
+          <a:off x="0" y="0"/>
+          <a:ext cx="0" cy="0"/>
+          <a:chOff x="0" y="0"/>
+          <a:chExt cx="0" cy="0"/>
+        </a:xfrm>
+      </p:grpSpPr>
+      <p:sp>
+        <p:nvSpPr>
+          <p:cNvPr id="2" name="Text 0"/>
+          <p:cNvSpPr/>
+          <p:nvPr/>
+        </p:nvSpPr>
+        <p:spPr>
+          <a:xfrm>
+            <a:off x="457200" y="274320"/>
+            <a:ext cx="10972800" cy="365760"/>
+          </a:xfrm>
+          <a:prstGeom prst="rect">
+            <a:avLst/>
+          </a:prstGeom>
+          <a:noFill/>
+          <a:ln/>
+        </p:spPr>
+        <p:txBody>
+          <a:bodyPr wrap="square" rtlCol="0" anchor="ctr"/>
+          <a:lstStyle/>
+          <a:p>
+            <a:pPr marL="0" indent="0">
+              <a:buNone/>
+            </a:pPr>
+            <a:r>
+              <a:rPr lang="en-US" sz="1000" b="1" kern="0" spc="300" dirty="0">
+                <a:solidFill>
+                  <a:srgbClr val="0D9488"/>
+                </a:solidFill>
+                <a:latin typeface="Calibri" pitchFamily="34" charset="0"/>
+              </a:rPr>
+              <a:t>05  —  DESIGN </a:t>
+            </a:r>
+          </a:p>
+        </p:txBody>
+      </p:sp>
+      <p:sp>
+        <p:nvSpPr>
+          <p:cNvPr id="3" name="Text 1"/>
+          <p:cNvSpPr/>
+          <p:nvPr/>
+        </p:nvSpPr>
+        <p:spPr>
+          <a:xfrm>
+            <a:off x="457200" y="640080"/>
+            <a:ext cx="10972800" cy="822960"/>
+          </a:xfrm>
+          <a:prstGeom prst="rect">
+            <a:avLst/>
+          </a:prstGeom>
+          <a:noFill/>
+          <a:ln/>
+        </p:spPr>
+        <p:txBody>
+          <a:bodyPr wrap="square" rtlCol="0" anchor="ctr"/>
+          <a:lstStyle/>
+          <a:p>
+            <a:pPr marL="0" indent="0">
+              <a:buNone/>
+            </a:pPr>
+            <a:r>
+              <a:rPr lang="en-US" sz="4000" b="1" dirty="0">
+                <a:solidFill>
+                  <a:srgbClr val="FFFFFF"/>
+                </a:solidFill>
+                <a:latin typeface="Calibri" pitchFamily="34" charset="0"/>
+              </a:rPr>
+              <a:t>Why These Visual Choices?</a:t>
+            </a:r>
+          </a:p>
+        </p:txBody>
+      </p:sp>
+      <p:sp>
+        <p:nvSpPr>
+          <p:cNvPr id="4" name="Card1"/>
+          <p:cNvSpPr/>
+          <p:nvPr/>
+        </p:nvSpPr>
+        <p:spPr>
+          <a:xfrm>
+            <a:off x="457200" y="1645920"/>
+            <a:ext cx="2651760" cy="3657600"/>
+          </a:xfrm>
+          <a:prstGeom prst="rect">
+            <a:avLst/>
+          </a:prstGeom>
+          <a:solidFill>
+            <a:srgbClr val="192535"/>
+          </a:solidFill>
+          <a:ln/>
+          <a:effectLst>
+            <a:outerShdw blurRad="152400" dist="38100" dir="8100000" algn="bl" rotWithShape="0">
+              <a:srgbClr val="000000">
+                <a:alpha val="25000"/>
+              </a:srgbClr>
+            </a:outerShdw>
+          </a:effectLst>
+        </p:spPr>
+        <p:txBody>
+          <a:bodyPr/>
+          <a:lstStyle/>
+          <a:p>
+            <a:endParaRPr/>
+          </a:p>
+        </p:txBody>
+      </p:sp>
+      <p:sp>
+        <p:nvSpPr>
+          <p:cNvPr id="5" name="Bar1"/>
+          <p:cNvSpPr/>
+          <p:nvPr/>
+        </p:nvSpPr>
+        <p:spPr>
+          <a:xfrm>
+            <a:off x="457200" y="1645920"/>
+            <a:ext cx="54864" cy="3657600"/>
+          </a:xfrm>
+          <a:prstGeom prst="rect">
+            <a:avLst/>
+          </a:prstGeom>
+          <a:solidFill>
+            <a:srgbClr val="EF4444"/>
+          </a:solidFill>
+          <a:ln/>
+        </p:spPr>
+        <p:txBody>
+          <a:bodyPr/>
+          <a:lstStyle/>
+          <a:p>
+            <a:endParaRPr/>
+          </a:p>
+        </p:txBody>
+      </p:sp>
+      <p:sp>
+        <p:nvSpPr>
+          <p:cNvPr id="6" name="TextC1"/>
+          <p:cNvSpPr/>
+          <p:nvPr/>
+        </p:nvSpPr>
+        <p:spPr>
+          <a:xfrm>
+            <a:off x="640080" y="1737360"/>
+            <a:ext cx="2377440" cy="3474720"/>
+          </a:xfrm>
+          <a:prstGeom prst="rect">
+            <a:avLst/>
+          </a:prstGeom>
+          <a:noFill/>
+          <a:ln/>
+        </p:spPr>
+        <p:txBody>
+          <a:bodyPr wrap="square" rtlCol="0" anchor="t"/>
+          <a:lstStyle/>
+          <a:p>
+            <a:pPr marL="0" indent="0">
+              <a:lnSpc>
+                <a:spcPts val="2400"/>
+              </a:lnSpc>
+              <a:buNone/>
+            </a:pPr>
+            <a:r>
+              <a:rPr lang="en-US" sz="1600" b="1" dirty="0">
+                <a:solidFill>
+                  <a:srgbClr val="FFFFFF"/>
+                </a:solidFill>
+                <a:latin typeface="Calibri" pitchFamily="34" charset="0"/>
+              </a:rPr>
+              <a:t>Gauges</a:t>
+            </a:r>
+          </a:p>
+          <a:p>
+            <a:pPr marL="0" indent="0">
+              <a:lnSpc>
+                <a:spcPts val="2400"/>
+              </a:lnSpc>
+              <a:buNone/>
+            </a:pPr>
+            <a:r>
+              <a:rPr lang="en-US" sz="1200" dirty="0">
+                <a:solidFill>
+                  <a:srgbClr val="94A3B8"/>
+                </a:solidFill>
+                <a:latin typeface="Calibri" pitchFamily="34" charset="0"/>
+              </a:rPr>
+              <a:t>Encode status (under / approaching / over) at a glance, no numbers needed to detect overruns.</a:t>
+            </a:r>
+          </a:p>
+          <a:p>
+            <a:pPr marL="0" indent="0">
+              <a:lnSpc>
+                <a:spcPts val="2400"/>
+              </a:lnSpc>
+              <a:buNone/>
+            </a:pPr>
+            <a:r>
+              <a:rPr lang="en-US" sz="1200" b="1" dirty="0">
+                <a:solidFill>
+                  <a:srgbClr val="EF4444"/>
+                </a:solidFill>
+                <a:latin typeface="Calibri" pitchFamily="34" charset="0"/>
+              </a:rPr>
+              <a:t>Red = over budget</a:t>
+            </a:r>
+          </a:p>
+          <a:p>
+            <a:pPr marL="0" indent="0">
+              <a:lnSpc>
+                <a:spcPts val="2400"/>
+              </a:lnSpc>
+              <a:buNone/>
+            </a:pPr>
+            <a:r>
+              <a:rPr lang="en-US" sz="1200" b="1" dirty="0">
+                <a:solidFill>
+                  <a:srgbClr val="F59E0B"/>
+                </a:solidFill>
+                <a:latin typeface="Calibri" pitchFamily="34" charset="0"/>
+              </a:rPr>
+              <a:t>Amber = approaching</a:t>
+            </a:r>
+          </a:p>
+          <a:p>
+            <a:pPr marL="0" indent="0">
+              <a:lnSpc>
+                <a:spcPts val="2400"/>
+              </a:lnSpc>
+              <a:buNone/>
+            </a:pPr>
+            <a:r>
+              <a:rPr lang="en-US" sz="1200" b="1" dirty="0">
+                <a:solidFill>
+                  <a:srgbClr val="10B981"/>
+                </a:solidFill>
+                <a:latin typeface="Calibri" pitchFamily="34" charset="0"/>
+              </a:rPr>
+              <a:t>Green = on track</a:t>
+            </a:r>
+          </a:p>
+        </p:txBody>
+      </p:sp>
+      <p:sp>
+        <p:nvSpPr>
+          <p:cNvPr id="7" name="Card2"/>
+          <p:cNvSpPr/>
+          <p:nvPr/>
+        </p:nvSpPr>
+        <p:spPr>
+          <a:xfrm>
+            <a:off x="3383280" y="1645920"/>
+            <a:ext cx="2651760" cy="3657600"/>
+          </a:xfrm>
+          <a:prstGeom prst="rect">
+            <a:avLst/>
+          </a:prstGeom>
+          <a:solidFill>
+            <a:srgbClr val="192535"/>
+          </a:solidFill>
+          <a:ln/>
+          <a:effectLst>
+            <a:outerShdw blurRad="152400" dist="38100" dir="8100000" algn="bl" rotWithShape="0">
+              <a:srgbClr val="000000">
+                <a:alpha val="25000"/>
+              </a:srgbClr>
+            </a:outerShdw>
+          </a:effectLst>
+        </p:spPr>
+        <p:txBody>
+          <a:bodyPr/>
+          <a:lstStyle/>
+          <a:p>
+            <a:endParaRPr/>
+          </a:p>
+        </p:txBody>
+      </p:sp>
+      <p:sp>
+        <p:nvSpPr>
+          <p:cNvPr id="8" name="Bar2"/>
+          <p:cNvSpPr/>
+          <p:nvPr/>
+        </p:nvSpPr>
+        <p:spPr>
+          <a:xfrm>
+            <a:off x="3383280" y="1645920"/>
+            <a:ext cx="54864" cy="3657600"/>
+          </a:xfrm>
+          <a:prstGeom prst="rect">
+            <a:avLst/>
+          </a:prstGeom>
+          <a:solidFill>
+            <a:srgbClr val="0D9488"/>
+          </a:solidFill>
+          <a:ln/>
+        </p:spPr>
+        <p:txBody>
+          <a:bodyPr/>
+          <a:lstStyle/>
+          <a:p>
+            <a:endParaRPr/>
+          </a:p>
+        </p:txBody>
+      </p:sp>
+      <p:sp>
+        <p:nvSpPr>
+          <p:cNvPr id="9" name="TextC2"/>
+          <p:cNvSpPr/>
+          <p:nvPr/>
+        </p:nvSpPr>
+        <p:spPr>
+          <a:xfrm>
+            <a:off x="3566160" y="1737360"/>
+            <a:ext cx="2377440" cy="3474720"/>
+          </a:xfrm>
+          <a:prstGeom prst="rect">
+            <a:avLst/>
+          </a:prstGeom>
+          <a:noFill/>
+          <a:ln/>
+        </p:spPr>
+        <p:txBody>
+          <a:bodyPr wrap="square" rtlCol="0" anchor="t"/>
+          <a:lstStyle/>
+          <a:p>
+            <a:pPr marL="0" indent="0">
+              <a:lnSpc>
+                <a:spcPts val="2400"/>
+              </a:lnSpc>
+              <a:buNone/>
+            </a:pPr>
+            <a:r>
+              <a:rPr lang="en-US" sz="1600" b="1" dirty="0">
+                <a:solidFill>
+                  <a:srgbClr val="FFFFFF"/>
+                </a:solidFill>
+                <a:latin typeface="Calibri" pitchFamily="34" charset="0"/>
+              </a:rPr>
+              <a:t>Connection Map</a:t>
+            </a:r>
+          </a:p>
+          <a:p>
+            <a:pPr marL="0" indent="0">
+              <a:lnSpc>
+                <a:spcPts val="2400"/>
+              </a:lnSpc>
+              <a:buNone/>
+            </a:pPr>
+            <a:r>
+              <a:rPr lang="en-US" sz="1200" dirty="0">
+                <a:solidFill>
+                  <a:srgbClr val="94A3B8"/>
+                </a:solidFill>
+                <a:latin typeface="Calibri" pitchFamily="34" charset="0"/>
+              </a:rPr>
+              <a:t>Shows geographic concentration of emissions. Line thickness = CO₂ volume. Color = transport mode.</a:t>
+            </a:r>
+          </a:p>
+          <a:p>
+            <a:pPr marL="0" indent="0">
+              <a:lnSpc>
+                <a:spcPts val="2400"/>
+              </a:lnSpc>
+              <a:buNone/>
+            </a:pPr>
+            <a:r>
+              <a:rPr lang="en-US" sz="1200" dirty="0">
+                <a:solidFill>
+                  <a:srgbClr val="E2E8F0"/>
+                </a:solidFill>
+                <a:latin typeface="Calibri" pitchFamily="34" charset="0"/>
+              </a:rPr>
+              <a:t>Answers: Where do we fly most? Which routes drive the most CO₂?</a:t>
+            </a:r>
+          </a:p>
+        </p:txBody>
+      </p:sp>
+      <p:sp>
+        <p:nvSpPr>
+          <p:cNvPr id="10" name="Card3"/>
+          <p:cNvSpPr/>
+          <p:nvPr/>
+        </p:nvSpPr>
+        <p:spPr>
+          <a:xfrm>
+            <a:off x="6309360" y="1645920"/>
+            <a:ext cx="2651760" cy="3657600"/>
+          </a:xfrm>
+          <a:prstGeom prst="rect">
+            <a:avLst/>
+          </a:prstGeom>
+          <a:solidFill>
+            <a:srgbClr val="192535"/>
+          </a:solidFill>
+          <a:ln/>
+          <a:effectLst>
+            <a:outerShdw blurRad="152400" dist="38100" dir="8100000" algn="bl" rotWithShape="0">
+              <a:srgbClr val="000000">
+                <a:alpha val="25000"/>
+              </a:srgbClr>
+            </a:outerShdw>
+          </a:effectLst>
+        </p:spPr>
+        <p:txBody>
+          <a:bodyPr/>
+          <a:lstStyle/>
+          <a:p>
+            <a:endParaRPr/>
+          </a:p>
+        </p:txBody>
+      </p:sp>
+      <p:sp>
+        <p:nvSpPr>
+          <p:cNvPr id="11" name="Bar3"/>
+          <p:cNvSpPr/>
+          <p:nvPr/>
+        </p:nvSpPr>
+        <p:spPr>
+          <a:xfrm>
+            <a:off x="6309360" y="1645920"/>
+            <a:ext cx="54864" cy="3657600"/>
+          </a:xfrm>
+          <a:prstGeom prst="rect">
+            <a:avLst/>
+          </a:prstGeom>
+          <a:solidFill>
+            <a:srgbClr val="2563EB"/>
+          </a:solidFill>
+          <a:ln/>
+        </p:spPr>
+        <p:txBody>
+          <a:bodyPr/>
+          <a:lstStyle/>
+          <a:p>
+            <a:endParaRPr/>
+          </a:p>
+        </p:txBody>
+      </p:sp>
+      <p:sp>
+        <p:nvSpPr>
+          <p:cNvPr id="12" name="TextC3"/>
+          <p:cNvSpPr/>
+          <p:nvPr/>
+        </p:nvSpPr>
+        <p:spPr>
+          <a:xfrm>
+            <a:off x="6492240" y="1737360"/>
+            <a:ext cx="2377440" cy="3474720"/>
+          </a:xfrm>
+          <a:prstGeom prst="rect">
+            <a:avLst/>
+          </a:prstGeom>
+          <a:noFill/>
+          <a:ln/>
+        </p:spPr>
+        <p:txBody>
+          <a:bodyPr wrap="square" rtlCol="0" anchor="t"/>
+          <a:lstStyle/>
+          <a:p>
+            <a:pPr marL="0" indent="0">
+              <a:lnSpc>
+                <a:spcPts val="2400"/>
+              </a:lnSpc>
+              <a:buNone/>
+            </a:pPr>
+            <a:r>
+              <a:rPr lang="en-US" sz="1600" b="1" dirty="0">
+                <a:solidFill>
+                  <a:srgbClr val="FFFFFF"/>
+                </a:solidFill>
+                <a:latin typeface="Calibri" pitchFamily="34" charset="0"/>
+              </a:rPr>
+              <a:t>Ranked Table</a:t>
+            </a:r>
+          </a:p>
+          <a:p>
+            <a:pPr marL="0" indent="0">
+              <a:lnSpc>
+                <a:spcPts val="2400"/>
+              </a:lnSpc>
+              <a:buNone/>
+            </a:pPr>
+            <a:r>
+              <a:rPr lang="en-US" sz="1200" dirty="0">
+                <a:solidFill>
+                  <a:srgbClr val="94A3B8"/>
+                </a:solidFill>
+                <a:latin typeface="Calibri" pitchFamily="34" charset="0"/>
+              </a:rPr>
+              <a:t>Prioritises action: highest saving potential shown first. One row = one decision a manager can act on today.</a:t>
+            </a:r>
+          </a:p>
+          <a:p>
+            <a:pPr marL="0" indent="0">
+              <a:lnSpc>
+                <a:spcPts val="2400"/>
+              </a:lnSpc>
+              <a:buNone/>
+            </a:pPr>
+            <a:r>
+              <a:rPr lang="en-US" sz="1200" dirty="0">
+                <a:solidFill>
+                  <a:srgbClr val="E2E8F0"/>
+                </a:solidFill>
+                <a:latin typeface="Calibri" pitchFamily="34" charset="0"/>
+              </a:rPr>
+              <a:t>Consistent BU color palette carried across all charts for zero re-learning.</a:t>
+            </a:r>
+          </a:p>
+          <a:p>
+            <a:pPr marL="0" indent="0">
+              <a:lnSpc>
+                <a:spcPts val="2400"/>
+              </a:lnSpc>
+              <a:buNone/>
+            </a:pPr>
+            <a:endParaRPr lang="en-US" sz="1200" dirty="0">
+              <a:solidFill>
+                <a:srgbClr val="E2E8F0"/>
+              </a:solidFill>
+              <a:latin typeface="Calibri" pitchFamily="34" charset="0"/>
+            </a:endParaRPr>
+          </a:p>
+          <a:p>
+            <a:pPr marL="0" indent="0">
+              <a:lnSpc>
+                <a:spcPts val="2400"/>
+              </a:lnSpc>
+              <a:buNone/>
+            </a:pPr>
+            <a:endParaRPr lang="en-US" sz="1200" dirty="0">
+              <a:solidFill>
+                <a:srgbClr val="E2E8F0"/>
+              </a:solidFill>
+              <a:latin typeface="Calibri" pitchFamily="34" charset="0"/>
+            </a:endParaRPr>
+          </a:p>
+        </p:txBody>
+      </p:sp>
+      <p:sp>
+        <p:nvSpPr>
+          <p:cNvPr id="13" name="Card4"/>
+          <p:cNvSpPr/>
+          <p:nvPr/>
+        </p:nvSpPr>
+        <p:spPr>
+          <a:xfrm>
+            <a:off x="9235440" y="1645920"/>
+            <a:ext cx="2194560" cy="3657600"/>
+          </a:xfrm>
+          <a:prstGeom prst="rect">
+            <a:avLst/>
+          </a:prstGeom>
+          <a:solidFill>
+            <a:srgbClr val="192535"/>
+          </a:solidFill>
+          <a:ln/>
+          <a:effectLst>
+            <a:outerShdw blurRad="152400" dist="38100" dir="8100000" algn="bl" rotWithShape="0">
+              <a:srgbClr val="000000">
+                <a:alpha val="25000"/>
+              </a:srgbClr>
+            </a:outerShdw>
+          </a:effectLst>
+        </p:spPr>
+        <p:txBody>
+          <a:bodyPr/>
+          <a:lstStyle/>
+          <a:p>
+            <a:endParaRPr/>
+          </a:p>
+        </p:txBody>
+      </p:sp>
+      <p:sp>
+        <p:nvSpPr>
+          <p:cNvPr id="14" name="Bar4"/>
+          <p:cNvSpPr/>
+          <p:nvPr/>
+        </p:nvSpPr>
+        <p:spPr>
+          <a:xfrm>
+            <a:off x="9235440" y="1645920"/>
+            <a:ext cx="54864" cy="3657600"/>
+          </a:xfrm>
+          <a:prstGeom prst="rect">
+            <a:avLst/>
+          </a:prstGeom>
+          <a:solidFill>
+            <a:srgbClr val="10B981"/>
+          </a:solidFill>
+          <a:ln/>
+        </p:spPr>
+        <p:txBody>
+          <a:bodyPr/>
+          <a:lstStyle/>
+          <a:p>
+            <a:endParaRPr/>
+          </a:p>
+        </p:txBody>
+      </p:sp>
+      <p:sp>
+        <p:nvSpPr>
+          <p:cNvPr id="15" name="TextC4"/>
+          <p:cNvSpPr/>
+          <p:nvPr/>
+        </p:nvSpPr>
+        <p:spPr>
+          <a:xfrm>
+            <a:off x="9418320" y="1737360"/>
+            <a:ext cx="1920240" cy="3474720"/>
+          </a:xfrm>
+          <a:prstGeom prst="rect">
+            <a:avLst/>
+          </a:prstGeom>
+          <a:noFill/>
+          <a:ln/>
+        </p:spPr>
+        <p:txBody>
+          <a:bodyPr wrap="square" rtlCol="0" anchor="t"/>
+          <a:lstStyle/>
+          <a:p>
+            <a:pPr marL="0" indent="0">
+              <a:lnSpc>
+                <a:spcPts val="2400"/>
+              </a:lnSpc>
+              <a:buNone/>
+            </a:pPr>
+            <a:r>
+              <a:rPr lang="en-US" sz="1600" b="1" dirty="0">
+                <a:solidFill>
+                  <a:srgbClr val="FFFFFF"/>
+                </a:solidFill>
+                <a:latin typeface="Calibri" pitchFamily="34" charset="0"/>
+              </a:rPr>
+              <a:t>Narrative Flow</a:t>
+            </a:r>
+          </a:p>
+          <a:p>
+            <a:pPr marL="0" indent="0">
+              <a:lnSpc>
+                <a:spcPts val="2400"/>
+              </a:lnSpc>
+              <a:buNone/>
+            </a:pPr>
+            <a:r>
+              <a:rPr lang="en-US" sz="1200" dirty="0">
+                <a:solidFill>
+                  <a:srgbClr val="94A3B8"/>
+                </a:solidFill>
+                <a:latin typeface="Calibri" pitchFamily="34" charset="0"/>
+              </a:rPr>
+              <a:t>Overview → BU detail → Geography → Action. Each section answers one question before handing off to the next.</a:t>
+            </a:r>
+          </a:p>
+        </p:txBody>
+      </p:sp>
+    </p:spTree>
+  </p:cSld>
+  <p:clrMapOvr>
+    <a:masterClrMapping/>
+  </p:clrMapOvr>
+</p:sld>
+</file>
+
+<file path=ppt/slides/slide9.xml><?xml version="1.0" encoding="utf-8"?>
+<p:sld xmlns:a="http://schemas.openxmlformats.org/drawingml/2006/main" xmlns:r="http://schemas.openxmlformats.org/officeDocument/2006/relationships" xmlns:p="http://schemas.openxmlformats.org/presentationml/2006/main" show="0">
   <p:cSld name="Slide 6">
     <p:bg>
       <p:bgPr>
@@ -11835,651 +12834,6 @@
               <a:t>Use the sidebar to switch CO₂ metric at any time, no reload needed.</a:t>
             </a:r>
             <a:endParaRPr lang="en-US" sz="1100" dirty="0"/>
-          </a:p>
-        </p:txBody>
-      </p:sp>
-    </p:spTree>
-  </p:cSld>
-  <p:clrMapOvr>
-    <a:masterClrMapping/>
-  </p:clrMapOvr>
-</p:sld>
-</file>
-
-<file path=ppt/slides/slide9.xml><?xml version="1.0" encoding="utf-8"?>
-<p:sld xmlns:a="http://schemas.openxmlformats.org/drawingml/2006/main" xmlns:r="http://schemas.openxmlformats.org/officeDocument/2006/relationships" xmlns:p="http://schemas.openxmlformats.org/presentationml/2006/main">
-  <p:cSld name="Slide 7">
-    <p:bg>
-      <p:bgPr>
-        <a:solidFill>
-          <a:srgbClr val="0F1923"/>
-        </a:solidFill>
-        <a:effectLst/>
-      </p:bgPr>
-    </p:bg>
-    <p:spTree>
-      <p:nvGrpSpPr>
-        <p:cNvPr id="1" name=""/>
-        <p:cNvGrpSpPr/>
-        <p:nvPr/>
-      </p:nvGrpSpPr>
-      <p:grpSpPr>
-        <a:xfrm>
-          <a:off x="0" y="0"/>
-          <a:ext cx="0" cy="0"/>
-          <a:chOff x="0" y="0"/>
-          <a:chExt cx="0" cy="0"/>
-        </a:xfrm>
-      </p:grpSpPr>
-      <p:sp>
-        <p:nvSpPr>
-          <p:cNvPr id="2" name="Shape 0"/>
-          <p:cNvSpPr/>
-          <p:nvPr/>
-        </p:nvSpPr>
-        <p:spPr>
-          <a:xfrm>
-            <a:off x="7132320" y="0"/>
-            <a:ext cx="5029200" cy="6858000"/>
-          </a:xfrm>
-          <a:prstGeom prst="rect">
-            <a:avLst/>
-          </a:prstGeom>
-          <a:solidFill>
-            <a:srgbClr val="0D9488">
-              <a:alpha val="90000"/>
-            </a:srgbClr>
-          </a:solidFill>
-          <a:ln/>
-        </p:spPr>
-        <p:txBody>
-          <a:bodyPr/>
-          <a:lstStyle/>
-          <a:p>
-            <a:endParaRPr/>
-          </a:p>
-        </p:txBody>
-      </p:sp>
-      <p:pic>
-        <p:nvPicPr>
-          <p:cNvPr id="3" name="Image 0" descr="preencoded.png"/>
-          <p:cNvPicPr>
-            <a:picLocks noChangeAspect="1"/>
-          </p:cNvPicPr>
-          <p:nvPr/>
-        </p:nvPicPr>
-        <p:blipFill>
-          <a:blip r:embed="rId3">
-            <a:alphaModFix amt="75000"/>
-          </a:blip>
-          <a:stretch>
-            <a:fillRect/>
-          </a:stretch>
-        </p:blipFill>
-        <p:spPr>
-          <a:xfrm>
-            <a:off x="7498080" y="365760"/>
-            <a:ext cx="4206240" cy="4206240"/>
-          </a:xfrm>
-          <a:prstGeom prst="rect">
-            <a:avLst/>
-          </a:prstGeom>
-        </p:spPr>
-      </p:pic>
-      <p:sp>
-        <p:nvSpPr>
-          <p:cNvPr id="4" name="Text 1"/>
-          <p:cNvSpPr/>
-          <p:nvPr/>
-        </p:nvSpPr>
-        <p:spPr>
-          <a:xfrm>
-            <a:off x="457200" y="365760"/>
-            <a:ext cx="6400800" cy="365760"/>
-          </a:xfrm>
-          <a:prstGeom prst="rect">
-            <a:avLst/>
-          </a:prstGeom>
-          <a:noFill/>
-          <a:ln/>
-        </p:spPr>
-        <p:txBody>
-          <a:bodyPr wrap="square" rtlCol="0" anchor="ctr"/>
-          <a:lstStyle/>
-          <a:p>
-            <a:pPr marL="0" indent="0">
-              <a:buNone/>
-            </a:pPr>
-            <a:r>
-              <a:rPr lang="en-US" sz="1000" b="1" kern="0" spc="300" dirty="0">
-                <a:solidFill>
-                  <a:srgbClr val="0D9488"/>
-                </a:solidFill>
-                <a:latin typeface="Calibri" pitchFamily="34" charset="0"/>
-                <a:ea typeface="Calibri" pitchFamily="34" charset="-122"/>
-                <a:cs typeface="Calibri" pitchFamily="34" charset="-120"/>
-              </a:rPr>
-              <a:t>08  —  TAKEAWAYS</a:t>
-            </a:r>
-            <a:endParaRPr lang="en-US" sz="1000" dirty="0"/>
-          </a:p>
-        </p:txBody>
-      </p:sp>
-      <p:sp>
-        <p:nvSpPr>
-          <p:cNvPr id="5" name="Text 2"/>
-          <p:cNvSpPr/>
-          <p:nvPr/>
-        </p:nvSpPr>
-        <p:spPr>
-          <a:xfrm>
-            <a:off x="457200" y="822960"/>
-            <a:ext cx="6400800" cy="2194560"/>
-          </a:xfrm>
-          <a:prstGeom prst="rect">
-            <a:avLst/>
-          </a:prstGeom>
-          <a:noFill/>
-          <a:ln/>
-        </p:spPr>
-        <p:txBody>
-          <a:bodyPr wrap="square" rtlCol="0" anchor="ctr"/>
-          <a:lstStyle/>
-          <a:p>
-            <a:pPr marL="0" indent="0">
-              <a:lnSpc>
-                <a:spcPct val="115000"/>
-              </a:lnSpc>
-              <a:buNone/>
-            </a:pPr>
-            <a:r>
-              <a:rPr lang="en-US" sz="4200" b="1" dirty="0">
-                <a:solidFill>
-                  <a:srgbClr val="FFFFFF"/>
-                </a:solidFill>
-                <a:latin typeface="Calibri" pitchFamily="34" charset="0"/>
-                <a:ea typeface="Calibri" pitchFamily="34" charset="-122"/>
-                <a:cs typeface="Calibri" pitchFamily="34" charset="-120"/>
-              </a:rPr>
-              <a:t>Ready to Reduce</a:t>
-            </a:r>
-            <a:endParaRPr lang="en-US" sz="4200" dirty="0"/>
-          </a:p>
-          <a:p>
-            <a:pPr marL="0" indent="0">
-              <a:lnSpc>
-                <a:spcPct val="115000"/>
-              </a:lnSpc>
-              <a:buNone/>
-            </a:pPr>
-            <a:r>
-              <a:rPr lang="en-US" sz="4200" b="1" dirty="0">
-                <a:solidFill>
-                  <a:srgbClr val="FFFFFF"/>
-                </a:solidFill>
-                <a:latin typeface="Calibri" pitchFamily="34" charset="0"/>
-                <a:ea typeface="Calibri" pitchFamily="34" charset="-122"/>
-                <a:cs typeface="Calibri" pitchFamily="34" charset="-120"/>
-              </a:rPr>
-              <a:t>Your Carbon</a:t>
-            </a:r>
-            <a:endParaRPr lang="en-US" sz="4200" dirty="0"/>
-          </a:p>
-          <a:p>
-            <a:pPr marL="0" indent="0">
-              <a:lnSpc>
-                <a:spcPct val="115000"/>
-              </a:lnSpc>
-              <a:buNone/>
-            </a:pPr>
-            <a:r>
-              <a:rPr lang="en-US" sz="4200" b="1" dirty="0">
-                <a:solidFill>
-                  <a:srgbClr val="FFFFFF"/>
-                </a:solidFill>
-                <a:latin typeface="Calibri" pitchFamily="34" charset="0"/>
-                <a:ea typeface="Calibri" pitchFamily="34" charset="-122"/>
-                <a:cs typeface="Calibri" pitchFamily="34" charset="-120"/>
-              </a:rPr>
-              <a:t>Footprint?</a:t>
-            </a:r>
-            <a:endParaRPr lang="en-US" sz="4200" dirty="0"/>
-          </a:p>
-        </p:txBody>
-      </p:sp>
-      <p:pic>
-        <p:nvPicPr>
-          <p:cNvPr id="6" name="Image 1" descr="preencoded.png"/>
-          <p:cNvPicPr>
-            <a:picLocks noChangeAspect="1"/>
-          </p:cNvPicPr>
-          <p:nvPr/>
-        </p:nvPicPr>
-        <p:blipFill>
-          <a:blip r:embed="rId4"/>
-          <a:stretch>
-            <a:fillRect/>
-          </a:stretch>
-        </p:blipFill>
-        <p:spPr>
-          <a:xfrm>
-            <a:off x="457200" y="3319272"/>
-            <a:ext cx="320040" cy="320040"/>
-          </a:xfrm>
-          <a:prstGeom prst="rect">
-            <a:avLst/>
-          </a:prstGeom>
-        </p:spPr>
-      </p:pic>
-      <p:sp>
-        <p:nvSpPr>
-          <p:cNvPr id="7" name="Text 3"/>
-          <p:cNvSpPr/>
-          <p:nvPr/>
-        </p:nvSpPr>
-        <p:spPr>
-          <a:xfrm>
-            <a:off x="914400" y="3291840"/>
-            <a:ext cx="5943600" cy="411480"/>
-          </a:xfrm>
-          <a:prstGeom prst="rect">
-            <a:avLst/>
-          </a:prstGeom>
-          <a:noFill/>
-          <a:ln/>
-        </p:spPr>
-        <p:txBody>
-          <a:bodyPr wrap="square" rtlCol="0" anchor="ctr"/>
-          <a:lstStyle/>
-          <a:p>
-            <a:pPr marL="0" indent="0">
-              <a:buNone/>
-            </a:pPr>
-            <a:r>
-              <a:rPr lang="en-US" sz="1300" dirty="0">
-                <a:solidFill>
-                  <a:srgbClr val="E2E8F0"/>
-                </a:solidFill>
-                <a:latin typeface="Calibri" pitchFamily="34" charset="0"/>
-                <a:ea typeface="Calibri" pitchFamily="34" charset="-122"/>
-                <a:cs typeface="Calibri" pitchFamily="34" charset="-120"/>
-              </a:rPr>
-              <a:t>Real-time budget compliance across all BUs</a:t>
-            </a:r>
-            <a:endParaRPr lang="en-US" sz="1300" dirty="0"/>
-          </a:p>
-        </p:txBody>
-      </p:sp>
-      <p:pic>
-        <p:nvPicPr>
-          <p:cNvPr id="8" name="Image 2" descr="preencoded.png"/>
-          <p:cNvPicPr>
-            <a:picLocks noChangeAspect="1"/>
-          </p:cNvPicPr>
-          <p:nvPr/>
-        </p:nvPicPr>
-        <p:blipFill>
-          <a:blip r:embed="rId4"/>
-          <a:stretch>
-            <a:fillRect/>
-          </a:stretch>
-        </p:blipFill>
-        <p:spPr>
-          <a:xfrm>
-            <a:off x="457200" y="3831336"/>
-            <a:ext cx="320040" cy="320040"/>
-          </a:xfrm>
-          <a:prstGeom prst="rect">
-            <a:avLst/>
-          </a:prstGeom>
-        </p:spPr>
-      </p:pic>
-      <p:sp>
-        <p:nvSpPr>
-          <p:cNvPr id="9" name="Text 4"/>
-          <p:cNvSpPr/>
-          <p:nvPr/>
-        </p:nvSpPr>
-        <p:spPr>
-          <a:xfrm>
-            <a:off x="914400" y="3803904"/>
-            <a:ext cx="5943600" cy="411480"/>
-          </a:xfrm>
-          <a:prstGeom prst="rect">
-            <a:avLst/>
-          </a:prstGeom>
-          <a:noFill/>
-          <a:ln/>
-        </p:spPr>
-        <p:txBody>
-          <a:bodyPr wrap="square" rtlCol="0" anchor="ctr"/>
-          <a:lstStyle/>
-          <a:p>
-            <a:pPr marL="0" indent="0">
-              <a:buNone/>
-            </a:pPr>
-            <a:r>
-              <a:rPr lang="en-US" sz="1300" dirty="0">
-                <a:solidFill>
-                  <a:srgbClr val="E2E8F0"/>
-                </a:solidFill>
-                <a:latin typeface="Calibri" pitchFamily="34" charset="0"/>
-                <a:ea typeface="Calibri" pitchFamily="34" charset="-122"/>
-                <a:cs typeface="Calibri" pitchFamily="34" charset="-120"/>
-              </a:rPr>
-              <a:t>Automatic detection of mode-shift opportunities</a:t>
-            </a:r>
-            <a:endParaRPr lang="en-US" sz="1300" dirty="0"/>
-          </a:p>
-        </p:txBody>
-      </p:sp>
-      <p:pic>
-        <p:nvPicPr>
-          <p:cNvPr id="10" name="Image 3" descr="preencoded.png"/>
-          <p:cNvPicPr>
-            <a:picLocks noChangeAspect="1"/>
-          </p:cNvPicPr>
-          <p:nvPr/>
-        </p:nvPicPr>
-        <p:blipFill>
-          <a:blip r:embed="rId4"/>
-          <a:stretch>
-            <a:fillRect/>
-          </a:stretch>
-        </p:blipFill>
-        <p:spPr>
-          <a:xfrm>
-            <a:off x="457200" y="4343400"/>
-            <a:ext cx="320040" cy="320040"/>
-          </a:xfrm>
-          <a:prstGeom prst="rect">
-            <a:avLst/>
-          </a:prstGeom>
-        </p:spPr>
-      </p:pic>
-      <p:sp>
-        <p:nvSpPr>
-          <p:cNvPr id="11" name="Text 5"/>
-          <p:cNvSpPr/>
-          <p:nvPr/>
-        </p:nvSpPr>
-        <p:spPr>
-          <a:xfrm>
-            <a:off x="914400" y="4315968"/>
-            <a:ext cx="5943600" cy="411480"/>
-          </a:xfrm>
-          <a:prstGeom prst="rect">
-            <a:avLst/>
-          </a:prstGeom>
-          <a:noFill/>
-          <a:ln/>
-        </p:spPr>
-        <p:txBody>
-          <a:bodyPr wrap="square" rtlCol="0" anchor="ctr"/>
-          <a:lstStyle/>
-          <a:p>
-            <a:pPr marL="0" indent="0">
-              <a:buNone/>
-            </a:pPr>
-            <a:r>
-              <a:rPr lang="en-US" sz="1300" dirty="0">
-                <a:solidFill>
-                  <a:srgbClr val="E2E8F0"/>
-                </a:solidFill>
-                <a:latin typeface="Calibri" pitchFamily="34" charset="0"/>
-                <a:ea typeface="Calibri" pitchFamily="34" charset="-122"/>
-                <a:cs typeface="Calibri" pitchFamily="34" charset="-120"/>
-              </a:rPr>
-              <a:t>Interactive maps and route deep-dives</a:t>
-            </a:r>
-            <a:endParaRPr lang="en-US" sz="1300" dirty="0"/>
-          </a:p>
-        </p:txBody>
-      </p:sp>
-      <p:pic>
-        <p:nvPicPr>
-          <p:cNvPr id="12" name="Image 4" descr="preencoded.png"/>
-          <p:cNvPicPr>
-            <a:picLocks noChangeAspect="1"/>
-          </p:cNvPicPr>
-          <p:nvPr/>
-        </p:nvPicPr>
-        <p:blipFill>
-          <a:blip r:embed="rId4"/>
-          <a:stretch>
-            <a:fillRect/>
-          </a:stretch>
-        </p:blipFill>
-        <p:spPr>
-          <a:xfrm>
-            <a:off x="457200" y="4855464"/>
-            <a:ext cx="320040" cy="320040"/>
-          </a:xfrm>
-          <a:prstGeom prst="rect">
-            <a:avLst/>
-          </a:prstGeom>
-        </p:spPr>
-      </p:pic>
-      <p:sp>
-        <p:nvSpPr>
-          <p:cNvPr id="13" name="Text 6"/>
-          <p:cNvSpPr/>
-          <p:nvPr/>
-        </p:nvSpPr>
-        <p:spPr>
-          <a:xfrm>
-            <a:off x="914400" y="4828032"/>
-            <a:ext cx="5943600" cy="411480"/>
-          </a:xfrm>
-          <a:prstGeom prst="rect">
-            <a:avLst/>
-          </a:prstGeom>
-          <a:noFill/>
-          <a:ln/>
-        </p:spPr>
-        <p:txBody>
-          <a:bodyPr wrap="square" rtlCol="0" anchor="ctr"/>
-          <a:lstStyle/>
-          <a:p>
-            <a:pPr marL="0" indent="0">
-              <a:buNone/>
-            </a:pPr>
-            <a:r>
-              <a:rPr lang="en-US" sz="1300" dirty="0">
-                <a:solidFill>
-                  <a:srgbClr val="E2E8F0"/>
-                </a:solidFill>
-                <a:latin typeface="Calibri" pitchFamily="34" charset="0"/>
-                <a:ea typeface="Calibri" pitchFamily="34" charset="-122"/>
-                <a:cs typeface="Calibri" pitchFamily="34" charset="-120"/>
-              </a:rPr>
-              <a:t>Excel export with per-trip recommendations</a:t>
-            </a:r>
-            <a:endParaRPr lang="en-US" sz="1300" dirty="0"/>
-          </a:p>
-        </p:txBody>
-      </p:sp>
-      <p:pic>
-        <p:nvPicPr>
-          <p:cNvPr id="14" name="Image 5" descr="preencoded.png"/>
-          <p:cNvPicPr>
-            <a:picLocks noChangeAspect="1"/>
-          </p:cNvPicPr>
-          <p:nvPr/>
-        </p:nvPicPr>
-        <p:blipFill>
-          <a:blip r:embed="rId5"/>
-          <a:stretch>
-            <a:fillRect/>
-          </a:stretch>
-        </p:blipFill>
-        <p:spPr>
-          <a:xfrm>
-            <a:off x="457200" y="5367528"/>
-            <a:ext cx="320040" cy="320040"/>
-          </a:xfrm>
-          <a:prstGeom prst="rect">
-            <a:avLst/>
-          </a:prstGeom>
-        </p:spPr>
-      </p:pic>
-      <p:sp>
-        <p:nvSpPr>
-          <p:cNvPr id="15" name="Text 7"/>
-          <p:cNvSpPr/>
-          <p:nvPr/>
-        </p:nvSpPr>
-        <p:spPr>
-          <a:xfrm>
-            <a:off x="914400" y="5340096"/>
-            <a:ext cx="5943600" cy="411480"/>
-          </a:xfrm>
-          <a:prstGeom prst="rect">
-            <a:avLst/>
-          </a:prstGeom>
-          <a:noFill/>
-          <a:ln/>
-        </p:spPr>
-        <p:txBody>
-          <a:bodyPr wrap="square" rtlCol="0" anchor="ctr"/>
-          <a:lstStyle/>
-          <a:p>
-            <a:pPr marL="0" indent="0">
-              <a:buNone/>
-            </a:pPr>
-            <a:r>
-              <a:rPr lang="en-US" sz="1300" dirty="0">
-                <a:solidFill>
-                  <a:srgbClr val="E2E8F0"/>
-                </a:solidFill>
-                <a:latin typeface="Calibri" pitchFamily="34" charset="0"/>
-                <a:ea typeface="Calibri" pitchFamily="34" charset="-122"/>
-                <a:cs typeface="Calibri" pitchFamily="34" charset="-120"/>
-              </a:rPr>
-              <a:t>Runs locally</a:t>
-            </a:r>
-            <a:endParaRPr lang="en-US" sz="1300" dirty="0"/>
-          </a:p>
-        </p:txBody>
-      </p:sp>
-      <p:sp>
-        <p:nvSpPr>
-          <p:cNvPr id="16" name="Text 8"/>
-          <p:cNvSpPr/>
-          <p:nvPr/>
-        </p:nvSpPr>
-        <p:spPr>
-          <a:xfrm>
-            <a:off x="7498080" y="5029200"/>
-            <a:ext cx="4206240" cy="594360"/>
-          </a:xfrm>
-          <a:prstGeom prst="rect">
-            <a:avLst/>
-          </a:prstGeom>
-          <a:noFill/>
-          <a:ln/>
-        </p:spPr>
-        <p:txBody>
-          <a:bodyPr wrap="square" rtlCol="0" anchor="ctr"/>
-          <a:lstStyle/>
-          <a:p>
-            <a:pPr marL="0" indent="0" algn="ctr">
-              <a:buNone/>
-            </a:pPr>
-            <a:r>
-              <a:rPr lang="en-US" sz="2800" b="1" dirty="0">
-                <a:solidFill>
-                  <a:srgbClr val="0F1923"/>
-                </a:solidFill>
-                <a:latin typeface="Calibri" pitchFamily="34" charset="0"/>
-                <a:ea typeface="Calibri" pitchFamily="34" charset="-122"/>
-                <a:cs typeface="Calibri" pitchFamily="34" charset="-120"/>
-              </a:rPr>
-              <a:t>Get Started</a:t>
-            </a:r>
-            <a:endParaRPr lang="en-US" sz="2800" dirty="0"/>
-          </a:p>
-        </p:txBody>
-      </p:sp>
-      <p:sp>
-        <p:nvSpPr>
-          <p:cNvPr id="17" name="Text 9"/>
-          <p:cNvSpPr/>
-          <p:nvPr/>
-        </p:nvSpPr>
-        <p:spPr>
-          <a:xfrm>
-            <a:off x="7680960" y="5669280"/>
-            <a:ext cx="3840480" cy="457200"/>
-          </a:xfrm>
-          <a:prstGeom prst="rect">
-            <a:avLst/>
-          </a:prstGeom>
-          <a:solidFill>
-            <a:srgbClr val="FFFFFF">
-              <a:alpha val="80000"/>
-            </a:srgbClr>
-          </a:solidFill>
-          <a:ln/>
-        </p:spPr>
-        <p:txBody>
-          <a:bodyPr wrap="square" rtlCol="0" anchor="ctr"/>
-          <a:lstStyle/>
-          <a:p>
-            <a:pPr marL="0" indent="0" algn="ctr">
-              <a:buNone/>
-            </a:pPr>
-            <a:r>
-              <a:rPr lang="en-US" sz="1400" dirty="0">
-                <a:solidFill>
-                  <a:srgbClr val="0F1923"/>
-                </a:solidFill>
-                <a:latin typeface="Consolas" pitchFamily="34" charset="0"/>
-                <a:ea typeface="Consolas" pitchFamily="34" charset="-122"/>
-                <a:cs typeface="Consolas" pitchFamily="34" charset="-120"/>
-              </a:rPr>
-              <a:t>streamlit run app.py</a:t>
-            </a:r>
-            <a:endParaRPr lang="en-US" sz="1400" dirty="0"/>
-          </a:p>
-        </p:txBody>
-      </p:sp>
-      <p:sp>
-        <p:nvSpPr>
-          <p:cNvPr id="18" name="Text 10"/>
-          <p:cNvSpPr/>
-          <p:nvPr/>
-        </p:nvSpPr>
-        <p:spPr>
-          <a:xfrm>
-            <a:off x="0" y="6492240"/>
-            <a:ext cx="12161520" cy="320040"/>
-          </a:xfrm>
-          <a:prstGeom prst="rect">
-            <a:avLst/>
-          </a:prstGeom>
-          <a:noFill/>
-          <a:ln/>
-        </p:spPr>
-        <p:txBody>
-          <a:bodyPr wrap="square" rtlCol="0" anchor="ctr"/>
-          <a:lstStyle/>
-          <a:p>
-            <a:pPr marL="0" indent="0" algn="ctr">
-              <a:buNone/>
-            </a:pPr>
-            <a:r>
-              <a:rPr lang="en-US" sz="1000" dirty="0">
-                <a:solidFill>
-                  <a:srgbClr val="94A3B8"/>
-                </a:solidFill>
-                <a:latin typeface="Calibri" pitchFamily="34" charset="0"/>
-                <a:ea typeface="Calibri" pitchFamily="34" charset="-122"/>
-                <a:cs typeface="Calibri" pitchFamily="34" charset="-120"/>
-              </a:rPr>
-              <a:t>Built with Streamlit  ·  Plotly  ·  Python</a:t>
-            </a:r>
-            <a:endParaRPr lang="en-US" sz="1000" dirty="0"/>
           </a:p>
         </p:txBody>
       </p:sp>
